--- a/Presentacion_Churn_SDG.pptx
+++ b/Presentacion_Churn_SDG.pptx
@@ -27,6 +27,8 @@
     <p:sldId id="275" r:id="rId21"/>
     <p:sldId id="276" r:id="rId22"/>
     <p:sldId id="277" r:id="rId23"/>
+    <p:sldId id="281" r:id="rId32"/>
+    <p:sldId id="282" r:id="rId33"/>
     <p:sldId id="278" r:id="rId24"/>
     <p:sldId id="279" r:id="rId25"/>
     <p:sldId id="280" r:id="rId26"/>
@@ -14770,6 +14772,10 @@
           </a:solidFill>
           <a:ln/>
         </p:spPr>
+        <p:txBody>
+          <a:bodyPr/>
+          <a:p/>
+        </p:txBody>
       </p:sp>
       <p:sp>
         <p:nvSpPr>
@@ -14877,6 +14883,10 @@
             </a:outerShdw>
           </a:effectLst>
         </p:spPr>
+        <p:txBody>
+          <a:bodyPr/>
+          <a:p/>
+        </p:txBody>
       </p:sp>
       <p:sp>
         <p:nvSpPr>
@@ -14897,6 +14907,10 @@
           </a:solidFill>
           <a:ln/>
         </p:spPr>
+        <p:txBody>
+          <a:bodyPr/>
+          <a:p/>
+        </p:txBody>
       </p:sp>
       <p:sp>
         <p:nvSpPr>
@@ -14931,7 +14945,7 @@
                 <a:ea typeface="Calibri" pitchFamily="34" charset="-122"/>
                 <a:cs typeface="Calibri" pitchFamily="34" charset="-120"/>
               </a:rPr>
-              <a:t>PostgreSQL 13</a:t>
+              <a:t>3x PostgreSQL</a:t>
             </a:r>
             <a:endParaRPr lang="en-US" sz="1200" dirty="0"/>
           </a:p>
@@ -14970,7 +14984,7 @@
                 <a:ea typeface="Calibri" pitchFamily="34" charset="-122"/>
                 <a:cs typeface="Calibri" pitchFamily="34" charset="-120"/>
               </a:rPr>
-              <a:t>Metadata de Airflow</a:t>
+              <a:t>airflow + churn_db + mlflow_db</a:t>
             </a:r>
             <a:endParaRPr lang="en-US" sz="1000" dirty="0"/>
           </a:p>
@@ -15004,6 +15018,10 @@
             </a:outerShdw>
           </a:effectLst>
         </p:spPr>
+        <p:txBody>
+          <a:bodyPr/>
+          <a:p/>
+        </p:txBody>
       </p:sp>
       <p:sp>
         <p:nvSpPr>
@@ -15024,6 +15042,10 @@
           </a:solidFill>
           <a:ln/>
         </p:spPr>
+        <p:txBody>
+          <a:bodyPr/>
+          <a:p/>
+        </p:txBody>
       </p:sp>
       <p:sp>
         <p:nvSpPr>
@@ -15097,7 +15119,7 @@
                 <a:ea typeface="Calibri" pitchFamily="34" charset="-122"/>
                 <a:cs typeface="Calibri" pitchFamily="34" charset="-120"/>
               </a:rPr>
-              <a:t>UI en localhost:8080</a:t>
+              <a:t>Airflow UI en :8080</a:t>
             </a:r>
             <a:endParaRPr lang="en-US" sz="1000" dirty="0"/>
           </a:p>
@@ -15131,6 +15153,10 @@
             </a:outerShdw>
           </a:effectLst>
         </p:spPr>
+        <p:txBody>
+          <a:bodyPr/>
+          <a:p/>
+        </p:txBody>
       </p:sp>
       <p:sp>
         <p:nvSpPr>
@@ -15151,6 +15177,10 @@
           </a:solidFill>
           <a:ln/>
         </p:spPr>
+        <p:txBody>
+          <a:bodyPr/>
+          <a:p/>
+        </p:txBody>
       </p:sp>
       <p:sp>
         <p:nvSpPr>
@@ -15185,7 +15215,7 @@
                 <a:ea typeface="Calibri" pitchFamily="34" charset="-122"/>
                 <a:cs typeface="Calibri" pitchFamily="34" charset="-120"/>
               </a:rPr>
-              <a:t>Scheduler</a:t>
+              <a:t>Monitoring Stack</a:t>
             </a:r>
             <a:endParaRPr lang="en-US" sz="1200" dirty="0"/>
           </a:p>
@@ -15224,7 +15254,7 @@
                 <a:ea typeface="Calibri" pitchFamily="34" charset="-122"/>
                 <a:cs typeface="Calibri" pitchFamily="34" charset="-120"/>
               </a:rPr>
-              <a:t>Ejecuta DAGs</a:t>
+              <a:t>Prometheus + Grafana :3000</a:t>
             </a:r>
             <a:endParaRPr lang="en-US" sz="1000" dirty="0"/>
           </a:p>
@@ -15258,6 +15288,10 @@
             </a:outerShdw>
           </a:effectLst>
         </p:spPr>
+        <p:txBody>
+          <a:bodyPr/>
+          <a:p/>
+        </p:txBody>
       </p:sp>
       <p:sp>
         <p:nvSpPr>
@@ -15278,6 +15312,10 @@
           </a:solidFill>
           <a:ln/>
         </p:spPr>
+        <p:txBody>
+          <a:bodyPr/>
+          <a:p/>
+        </p:txBody>
       </p:sp>
       <p:sp>
         <p:nvSpPr>
@@ -15312,7 +15350,7 @@
                 <a:ea typeface="Calibri" pitchFamily="34" charset="-122"/>
                 <a:cs typeface="Calibri" pitchFamily="34" charset="-120"/>
               </a:rPr>
-              <a:t>Triggerer</a:t>
+              <a:t>MLflow 2.12.2</a:t>
             </a:r>
             <a:endParaRPr lang="en-US" sz="1200" dirty="0"/>
           </a:p>
@@ -15351,7 +15389,7 @@
                 <a:ea typeface="Calibri" pitchFamily="34" charset="-122"/>
                 <a:cs typeface="Calibri" pitchFamily="34" charset="-120"/>
               </a:rPr>
-              <a:t>Deferrable ops</a:t>
+              <a:t>Experiment tracking :5000</a:t>
             </a:r>
             <a:endParaRPr lang="en-US" sz="1000" dirty="0"/>
           </a:p>
@@ -15378,6 +15416,10 @@
           </a:solidFill>
           <a:ln/>
         </p:spPr>
+        <p:txBody>
+          <a:bodyPr/>
+          <a:p/>
+        </p:txBody>
       </p:sp>
       <p:sp>
         <p:nvSpPr>
@@ -15449,7 +15491,7 @@
                   <a:srgbClr val="4B5563"/>
                 </a:solidFill>
               </a:rPr>
-              <a:t>LocalExecutor: suficiente para 1 DAG secuencial. No necesitamos Celery + Redis.</a:t>
+              <a:t>10 servicios Docker: Airflow (webserver, scheduler, triggerer, init), 3x PostgreSQL, MLflow, Pushgateway, Prometheus, Grafana.</a:t>
             </a:r>
             <a:endParaRPr lang="en-US" sz="1050" dirty="0"/>
           </a:p>
@@ -15464,7 +15506,7 @@
                   <a:srgbClr val="4B5563"/>
                 </a:solidFill>
               </a:rPr>
-              <a:t>Imagen custom: la base de Airflow no incluye xgboost, sklearn, etc. El Dockerfile instala requirements.txt.</a:t>
+              <a:t>Imagen custom con xgboost, sklearn, mlflow, etc. via Dockerfile + requirements.txt.</a:t>
             </a:r>
             <a:endParaRPr lang="en-US" sz="1050" dirty="0"/>
           </a:p>
@@ -15479,7 +15521,7 @@
                   <a:srgbClr val="4B5563"/>
                 </a:solidFill>
               </a:rPr>
-              <a:t>Volumenes montados: scripts/, data/ y models/ se montan en el contenedor. Facilita el desarrollo iterativo.</a:t>
+              <a:t>Monitoring stack: evaluate_model exporta metricas al Pushgateway, Prometheus las scrapea, Grafana las visualiza.</a:t>
             </a:r>
             <a:endParaRPr lang="en-US" sz="1050" dirty="0"/>
           </a:p>
@@ -15494,7 +15536,7 @@
                   <a:srgbClr val="4B5563"/>
                 </a:solidFill>
               </a:rPr>
-              <a:t>Variables de entorno: rutas configurables (CHURN_DATA_DIR, etc.) para flexibilidad.</a:t>
+              <a:t>Volumenes montados: scripts/, data/, models/ y monitoring/ para desarrollo iterativo.</a:t>
             </a:r>
             <a:endParaRPr lang="en-US" sz="1050" dirty="0"/>
           </a:p>
@@ -15521,6 +15563,10 @@
           </a:solidFill>
           <a:ln/>
         </p:spPr>
+        <p:txBody>
+          <a:bodyPr/>
+          <a:p/>
+        </p:txBody>
       </p:sp>
       <p:sp>
         <p:nvSpPr>
@@ -15711,7 +15757,7 @@
                 <a:ea typeface="Consolas" pitchFamily="34" charset="-122"/>
                 <a:cs typeface="Consolas" pitchFamily="34" charset="-120"/>
               </a:rPr>
-              <a:t># → http://localhost:8080</a:t>
+              <a:t># → Airflow :8080 | MLflow :5000</a:t>
             </a:r>
             <a:endParaRPr lang="en-US" sz="1000" dirty="0"/>
           </a:p>
@@ -15750,7 +15796,7 @@
                 <a:ea typeface="Consolas" pitchFamily="34" charset="-122"/>
                 <a:cs typeface="Consolas" pitchFamily="34" charset="-120"/>
               </a:rPr>
-              <a:t># user: airflow / pass: airflow</a:t>
+              <a:t># → Grafana :3000 | Prometheus :9090</a:t>
             </a:r>
             <a:endParaRPr lang="en-US" sz="1000" dirty="0"/>
           </a:p>
@@ -15765,6 +15811,695 @@
 </file>
 
 <file path=ppt/slides/slide23.xml><?xml version="1.0" encoding="utf-8"?>
+<p:sld xmlns:a="http://schemas.openxmlformats.org/drawingml/2006/main" xmlns:p="http://schemas.openxmlformats.org/presentationml/2006/main" xmlns:r="http://schemas.openxmlformats.org/officeDocument/2006/relationships">
+  <p:cSld>
+    <p:bg>
+      <p:bgPr>
+        <a:solidFill>
+          <a:srgbClr val="FFFFFF"/>
+        </a:solidFill>
+        <a:effectLst/>
+      </p:bgPr>
+    </p:bg>
+    <p:spTree>
+      <p:nvGrpSpPr>
+        <p:cNvPr id="1" name=""/>
+        <p:cNvGrpSpPr/>
+        <p:nvPr/>
+      </p:nvGrpSpPr>
+      <p:grpSpPr/>
+      <p:sp>
+        <p:nvSpPr>
+          <p:cNvPr id="2" name="TextBox 1"/>
+          <p:cNvSpPr txBox="1"/>
+          <p:nvPr/>
+        </p:nvSpPr>
+        <p:spPr>
+          <a:xfrm>
+            <a:off x="457200" y="182880"/>
+            <a:ext cx="6858000" cy="502920"/>
+          </a:xfrm>
+          <a:prstGeom prst="rect">
+            <a:avLst/>
+          </a:prstGeom>
+          <a:noFill/>
+        </p:spPr>
+        <p:txBody>
+          <a:bodyPr wrap="square" lIns="0" tIns="0" rIns="0" bIns="0">
+            <a:spAutoFit/>
+          </a:bodyPr>
+          <a:lstStyle/>
+          <a:p>
+            <a:pPr algn="l"/>
+            <a:r>
+              <a:rPr sz="2400" b="1">
+                <a:solidFill>
+                  <a:srgbClr val="1B2A4A"/>
+                </a:solidFill>
+                <a:latin typeface="Calibri"/>
+              </a:rPr>
+              <a:t>Evidencia: Orquestacion y Experiment Tracking</a:t>
+            </a:r>
+          </a:p>
+        </p:txBody>
+      </p:sp>
+      <p:sp>
+        <p:nvSpPr>
+          <p:cNvPr id="3" name="Rectangle 2"/>
+          <p:cNvSpPr/>
+          <p:nvPr/>
+        </p:nvSpPr>
+        <p:spPr>
+          <a:xfrm>
+            <a:off x="457200" y="731520"/>
+            <a:ext cx="1097280" cy="36576"/>
+          </a:xfrm>
+          <a:prstGeom prst="rect">
+            <a:avLst/>
+          </a:prstGeom>
+          <a:solidFill>
+            <a:srgbClr val="0078D4"/>
+          </a:solidFill>
+          <a:ln>
+            <a:noFill/>
+          </a:ln>
+        </p:spPr>
+        <p:style>
+          <a:lnRef idx="1">
+            <a:schemeClr val="accent1"/>
+          </a:lnRef>
+          <a:fillRef idx="3">
+            <a:schemeClr val="accent1"/>
+          </a:fillRef>
+          <a:effectRef idx="2">
+            <a:schemeClr val="accent1"/>
+          </a:effectRef>
+          <a:fontRef idx="minor">
+            <a:schemeClr val="lt1"/>
+          </a:fontRef>
+        </p:style>
+        <p:txBody>
+          <a:bodyPr rtlCol="0" anchor="ctr"/>
+          <a:lstStyle/>
+          <a:p>
+            <a:pPr algn="ctr"/>
+          </a:p>
+        </p:txBody>
+      </p:sp>
+      <p:sp>
+        <p:nvSpPr>
+          <p:cNvPr id="4" name="TextBox 3"/>
+          <p:cNvSpPr txBox="1"/>
+          <p:nvPr/>
+        </p:nvSpPr>
+        <p:spPr>
+          <a:xfrm>
+            <a:off x="7315200" y="137160"/>
+            <a:ext cx="1554480" cy="365760"/>
+          </a:xfrm>
+          <a:prstGeom prst="rect">
+            <a:avLst/>
+          </a:prstGeom>
+          <a:noFill/>
+        </p:spPr>
+        <p:txBody>
+          <a:bodyPr wrap="square" lIns="0" tIns="0" rIns="0" bIns="0">
+            <a:spAutoFit/>
+          </a:bodyPr>
+          <a:lstStyle/>
+          <a:p>
+            <a:pPr algn="r"/>
+            <a:r>
+              <a:rPr sz="1400" b="1">
+                <a:solidFill>
+                  <a:srgbClr val="0078D4"/>
+                </a:solidFill>
+                <a:latin typeface="Calibri"/>
+              </a:rPr>
+              <a:t>sdg group</a:t>
+            </a:r>
+          </a:p>
+        </p:txBody>
+      </p:sp>
+      <p:sp>
+        <p:nvSpPr>
+          <p:cNvPr id="5" name="TextBox 4"/>
+          <p:cNvSpPr txBox="1"/>
+          <p:nvPr/>
+        </p:nvSpPr>
+        <p:spPr>
+          <a:xfrm>
+            <a:off x="274320" y="4709160"/>
+            <a:ext cx="2743200" cy="365760"/>
+          </a:xfrm>
+          <a:prstGeom prst="rect">
+            <a:avLst/>
+          </a:prstGeom>
+          <a:noFill/>
+        </p:spPr>
+        <p:txBody>
+          <a:bodyPr wrap="square" lIns="0" tIns="0" rIns="0" bIns="0">
+            <a:spAutoFit/>
+          </a:bodyPr>
+          <a:lstStyle/>
+          <a:p>
+            <a:pPr algn="l"/>
+            <a:r>
+              <a:rPr sz="800" b="0">
+                <a:solidFill>
+                  <a:srgbClr val="9CA3AF"/>
+                </a:solidFill>
+                <a:latin typeface="Calibri"/>
+              </a:rPr>
+              <a:t>Copyright © SDG Group</a:t>
+            </a:r>
+          </a:p>
+        </p:txBody>
+      </p:sp>
+      <p:sp>
+        <p:nvSpPr>
+          <p:cNvPr id="6" name="TextBox 5"/>
+          <p:cNvSpPr txBox="1"/>
+          <p:nvPr/>
+        </p:nvSpPr>
+        <p:spPr>
+          <a:xfrm>
+            <a:off x="457200" y="860000"/>
+            <a:ext cx="4000000" cy="300000"/>
+          </a:xfrm>
+          <a:prstGeom prst="rect">
+            <a:avLst/>
+          </a:prstGeom>
+          <a:noFill/>
+        </p:spPr>
+        <p:txBody>
+          <a:bodyPr wrap="square" lIns="0" tIns="0" rIns="0" bIns="0">
+            <a:spAutoFit/>
+          </a:bodyPr>
+          <a:lstStyle/>
+          <a:p>
+            <a:pPr algn="l"/>
+            <a:r>
+              <a:rPr sz="1100" b="1">
+                <a:solidFill>
+                  <a:srgbClr val="0078D4"/>
+                </a:solidFill>
+                <a:latin typeface="Calibri"/>
+              </a:rPr>
+              <a:t>Apache Airflow — DAG con 10 runs exitosos</a:t>
+            </a:r>
+          </a:p>
+        </p:txBody>
+      </p:sp>
+      <p:pic>
+        <p:nvPicPr>
+          <p:cNvPr id="7" name="Picture 6" descr="airflow_dag.png"/>
+          <p:cNvPicPr>
+            <a:picLocks noChangeAspect="1"/>
+          </p:cNvPicPr>
+          <p:nvPr/>
+        </p:nvPicPr>
+        <p:blipFill>
+          <a:blip r:embed="rId2"/>
+          <a:stretch>
+            <a:fillRect/>
+          </a:stretch>
+        </p:blipFill>
+        <p:spPr>
+          <a:xfrm>
+            <a:off x="457200" y="1150000"/>
+            <a:ext cx="4000000" cy="2100000"/>
+          </a:xfrm>
+          <a:prstGeom prst="rect">
+            <a:avLst/>
+          </a:prstGeom>
+        </p:spPr>
+      </p:pic>
+      <p:sp>
+        <p:nvSpPr>
+          <p:cNvPr id="8" name="TextBox 7"/>
+          <p:cNvSpPr txBox="1"/>
+          <p:nvPr/>
+        </p:nvSpPr>
+        <p:spPr>
+          <a:xfrm>
+            <a:off x="4700000" y="860000"/>
+            <a:ext cx="4000000" cy="300000"/>
+          </a:xfrm>
+          <a:prstGeom prst="rect">
+            <a:avLst/>
+          </a:prstGeom>
+          <a:noFill/>
+        </p:spPr>
+        <p:txBody>
+          <a:bodyPr wrap="square" lIns="0" tIns="0" rIns="0" bIns="0">
+            <a:spAutoFit/>
+          </a:bodyPr>
+          <a:lstStyle/>
+          <a:p>
+            <a:pPr algn="l"/>
+            <a:r>
+              <a:rPr sz="1100" b="1">
+                <a:solidFill>
+                  <a:srgbClr val="0078D4"/>
+                </a:solidFill>
+                <a:latin typeface="Calibri"/>
+              </a:rPr>
+              <a:t>MLflow 2.12.2 — Run completado con metricas</a:t>
+            </a:r>
+          </a:p>
+        </p:txBody>
+      </p:sp>
+      <p:pic>
+        <p:nvPicPr>
+          <p:cNvPr id="9" name="Picture 8" descr="mlflow_run.png"/>
+          <p:cNvPicPr>
+            <a:picLocks noChangeAspect="1"/>
+          </p:cNvPicPr>
+          <p:nvPr/>
+        </p:nvPicPr>
+        <p:blipFill>
+          <a:blip r:embed="rId3"/>
+          <a:stretch>
+            <a:fillRect/>
+          </a:stretch>
+        </p:blipFill>
+        <p:spPr>
+          <a:xfrm>
+            <a:off x="4700000" y="1150000"/>
+            <a:ext cx="4000000" cy="2100000"/>
+          </a:xfrm>
+          <a:prstGeom prst="rect">
+            <a:avLst/>
+          </a:prstGeom>
+        </p:spPr>
+      </p:pic>
+      <p:sp>
+        <p:nvSpPr>
+          <p:cNvPr id="10" name="TextBox 9"/>
+          <p:cNvSpPr txBox="1"/>
+          <p:nvPr/>
+        </p:nvSpPr>
+        <p:spPr>
+          <a:xfrm>
+            <a:off x="457200" y="3400000"/>
+            <a:ext cx="8200000" cy="800000"/>
+          </a:xfrm>
+          <a:prstGeom prst="rect">
+            <a:avLst/>
+          </a:prstGeom>
+          <a:noFill/>
+        </p:spPr>
+        <p:txBody>
+          <a:bodyPr wrap="square" lIns="0" tIns="0" rIns="0" bIns="0">
+            <a:spAutoFit/>
+          </a:bodyPr>
+          <a:lstStyle/>
+          <a:p>
+            <a:pPr algn="l"/>
+            <a:r>
+              <a:rPr sz="1000" b="0">
+                <a:solidFill>
+                  <a:srgbClr val="4B5563"/>
+                </a:solidFill>
+                <a:latin typeface="Calibri"/>
+              </a:rPr>
+              <a:t>Airflow ejecuta el DAG de 3 tasks (data_preparation → train_model → evaluate_model) en ~1 min 21s. MLflow registra automaticamente 41 hiperparametros y 4 metricas de validacion (val_auc_roc=0.6913, val_f1=0.6376). Cada run queda versionado para comparacion futura.</a:t>
+            </a:r>
+          </a:p>
+        </p:txBody>
+      </p:sp>
+    </p:spTree>
+  </p:cSld>
+  <p:clrMapOvr>
+    <a:masterClrMapping/>
+  </p:clrMapOvr>
+</p:sld>
+</file>
+
+<file path=ppt/slides/slide24.xml><?xml version="1.0" encoding="utf-8"?>
+<p:sld xmlns:a="http://schemas.openxmlformats.org/drawingml/2006/main" xmlns:p="http://schemas.openxmlformats.org/presentationml/2006/main" xmlns:r="http://schemas.openxmlformats.org/officeDocument/2006/relationships">
+  <p:cSld>
+    <p:bg>
+      <p:bgPr>
+        <a:solidFill>
+          <a:srgbClr val="FFFFFF"/>
+        </a:solidFill>
+        <a:effectLst/>
+      </p:bgPr>
+    </p:bg>
+    <p:spTree>
+      <p:nvGrpSpPr>
+        <p:cNvPr id="1" name=""/>
+        <p:cNvGrpSpPr/>
+        <p:nvPr/>
+      </p:nvGrpSpPr>
+      <p:grpSpPr/>
+      <p:sp>
+        <p:nvSpPr>
+          <p:cNvPr id="2" name="TextBox 1"/>
+          <p:cNvSpPr txBox="1"/>
+          <p:nvPr/>
+        </p:nvSpPr>
+        <p:spPr>
+          <a:xfrm>
+            <a:off x="457200" y="182880"/>
+            <a:ext cx="6858000" cy="502920"/>
+          </a:xfrm>
+          <a:prstGeom prst="rect">
+            <a:avLst/>
+          </a:prstGeom>
+          <a:noFill/>
+        </p:spPr>
+        <p:txBody>
+          <a:bodyPr wrap="square" lIns="0" tIns="0" rIns="0" bIns="0">
+            <a:spAutoFit/>
+          </a:bodyPr>
+          <a:lstStyle/>
+          <a:p>
+            <a:pPr algn="l"/>
+            <a:r>
+              <a:rPr sz="2400" b="1">
+                <a:solidFill>
+                  <a:srgbClr val="1B2A4A"/>
+                </a:solidFill>
+                <a:latin typeface="Calibri"/>
+              </a:rPr>
+              <a:t>Evidencia: Monitoreo con Prometheus y Grafana</a:t>
+            </a:r>
+          </a:p>
+        </p:txBody>
+      </p:sp>
+      <p:sp>
+        <p:nvSpPr>
+          <p:cNvPr id="3" name="Rectangle 2"/>
+          <p:cNvSpPr/>
+          <p:nvPr/>
+        </p:nvSpPr>
+        <p:spPr>
+          <a:xfrm>
+            <a:off x="457200" y="731520"/>
+            <a:ext cx="1097280" cy="36576"/>
+          </a:xfrm>
+          <a:prstGeom prst="rect">
+            <a:avLst/>
+          </a:prstGeom>
+          <a:solidFill>
+            <a:srgbClr val="0078D4"/>
+          </a:solidFill>
+          <a:ln>
+            <a:noFill/>
+          </a:ln>
+        </p:spPr>
+        <p:style>
+          <a:lnRef idx="1">
+            <a:schemeClr val="accent1"/>
+          </a:lnRef>
+          <a:fillRef idx="3">
+            <a:schemeClr val="accent1"/>
+          </a:fillRef>
+          <a:effectRef idx="2">
+            <a:schemeClr val="accent1"/>
+          </a:effectRef>
+          <a:fontRef idx="minor">
+            <a:schemeClr val="lt1"/>
+          </a:fontRef>
+        </p:style>
+        <p:txBody>
+          <a:bodyPr rtlCol="0" anchor="ctr"/>
+          <a:lstStyle/>
+          <a:p>
+            <a:pPr algn="ctr"/>
+          </a:p>
+        </p:txBody>
+      </p:sp>
+      <p:sp>
+        <p:nvSpPr>
+          <p:cNvPr id="4" name="TextBox 3"/>
+          <p:cNvSpPr txBox="1"/>
+          <p:nvPr/>
+        </p:nvSpPr>
+        <p:spPr>
+          <a:xfrm>
+            <a:off x="7315200" y="137160"/>
+            <a:ext cx="1554480" cy="365760"/>
+          </a:xfrm>
+          <a:prstGeom prst="rect">
+            <a:avLst/>
+          </a:prstGeom>
+          <a:noFill/>
+        </p:spPr>
+        <p:txBody>
+          <a:bodyPr wrap="square" lIns="0" tIns="0" rIns="0" bIns="0">
+            <a:spAutoFit/>
+          </a:bodyPr>
+          <a:lstStyle/>
+          <a:p>
+            <a:pPr algn="r"/>
+            <a:r>
+              <a:rPr sz="1400" b="1">
+                <a:solidFill>
+                  <a:srgbClr val="0078D4"/>
+                </a:solidFill>
+                <a:latin typeface="Calibri"/>
+              </a:rPr>
+              <a:t>sdg group</a:t>
+            </a:r>
+          </a:p>
+        </p:txBody>
+      </p:sp>
+      <p:sp>
+        <p:nvSpPr>
+          <p:cNvPr id="5" name="TextBox 4"/>
+          <p:cNvSpPr txBox="1"/>
+          <p:nvPr/>
+        </p:nvSpPr>
+        <p:spPr>
+          <a:xfrm>
+            <a:off x="274320" y="4709160"/>
+            <a:ext cx="2743200" cy="365760"/>
+          </a:xfrm>
+          <a:prstGeom prst="rect">
+            <a:avLst/>
+          </a:prstGeom>
+          <a:noFill/>
+        </p:spPr>
+        <p:txBody>
+          <a:bodyPr wrap="square" lIns="0" tIns="0" rIns="0" bIns="0">
+            <a:spAutoFit/>
+          </a:bodyPr>
+          <a:lstStyle/>
+          <a:p>
+            <a:pPr algn="l"/>
+            <a:r>
+              <a:rPr sz="800" b="0">
+                <a:solidFill>
+                  <a:srgbClr val="9CA3AF"/>
+                </a:solidFill>
+                <a:latin typeface="Calibri"/>
+              </a:rPr>
+              <a:t>Copyright © SDG Group</a:t>
+            </a:r>
+          </a:p>
+        </p:txBody>
+      </p:sp>
+      <p:sp>
+        <p:nvSpPr>
+          <p:cNvPr id="6" name="TextBox 5"/>
+          <p:cNvSpPr txBox="1"/>
+          <p:nvPr/>
+        </p:nvSpPr>
+        <p:spPr>
+          <a:xfrm>
+            <a:off x="457200" y="860000"/>
+            <a:ext cx="5400000" cy="300000"/>
+          </a:xfrm>
+          <a:prstGeom prst="rect">
+            <a:avLst/>
+          </a:prstGeom>
+          <a:noFill/>
+        </p:spPr>
+        <p:txBody>
+          <a:bodyPr wrap="square" lIns="0" tIns="0" rIns="0" bIns="0">
+            <a:spAutoFit/>
+          </a:bodyPr>
+          <a:lstStyle/>
+          <a:p>
+            <a:pPr algn="l"/>
+            <a:r>
+              <a:rPr sz="1100" b="1">
+                <a:solidFill>
+                  <a:srgbClr val="0078D4"/>
+                </a:solidFill>
+                <a:latin typeface="Calibri"/>
+              </a:rPr>
+              <a:t>Grafana — Dashboard Churn Prediction Pipeline</a:t>
+            </a:r>
+          </a:p>
+        </p:txBody>
+      </p:sp>
+      <p:pic>
+        <p:nvPicPr>
+          <p:cNvPr id="7" name="Picture 6" descr="grafana_dashboard.png"/>
+          <p:cNvPicPr>
+            <a:picLocks noChangeAspect="1"/>
+          </p:cNvPicPr>
+          <p:nvPr/>
+        </p:nvPicPr>
+        <p:blipFill>
+          <a:blip r:embed="rId2"/>
+          <a:stretch>
+            <a:fillRect/>
+          </a:stretch>
+        </p:blipFill>
+        <p:spPr>
+          <a:xfrm>
+            <a:off x="457200" y="1150000"/>
+            <a:ext cx="5400000" cy="2800000"/>
+          </a:xfrm>
+          <a:prstGeom prst="rect">
+            <a:avLst/>
+          </a:prstGeom>
+        </p:spPr>
+      </p:pic>
+      <p:sp>
+        <p:nvSpPr>
+          <p:cNvPr id="8" name="TextBox 7"/>
+          <p:cNvSpPr txBox="1"/>
+          <p:nvPr/>
+        </p:nvSpPr>
+        <p:spPr>
+          <a:xfrm>
+            <a:off x="6100000" y="860000"/>
+            <a:ext cx="2700000" cy="300000"/>
+          </a:xfrm>
+          <a:prstGeom prst="rect">
+            <a:avLst/>
+          </a:prstGeom>
+          <a:noFill/>
+        </p:spPr>
+        <p:txBody>
+          <a:bodyPr wrap="square" lIns="0" tIns="0" rIns="0" bIns="0">
+            <a:spAutoFit/>
+          </a:bodyPr>
+          <a:lstStyle/>
+          <a:p>
+            <a:pPr algn="l"/>
+            <a:r>
+              <a:rPr sz="1100" b="1">
+                <a:solidFill>
+                  <a:srgbClr val="0078D4"/>
+                </a:solidFill>
+                <a:latin typeface="Calibri"/>
+              </a:rPr>
+              <a:t>Prometheus — Metricas en tiempo real</a:t>
+            </a:r>
+          </a:p>
+        </p:txBody>
+      </p:sp>
+      <p:pic>
+        <p:nvPicPr>
+          <p:cNvPr id="9" name="Picture 8" descr="prometheus_query.png"/>
+          <p:cNvPicPr>
+            <a:picLocks noChangeAspect="1"/>
+          </p:cNvPicPr>
+          <p:nvPr/>
+        </p:nvPicPr>
+        <p:blipFill>
+          <a:blip r:embed="rId3"/>
+          <a:stretch>
+            <a:fillRect/>
+          </a:stretch>
+        </p:blipFill>
+        <p:spPr>
+          <a:xfrm>
+            <a:off x="6100000" y="1150000"/>
+            <a:ext cx="2700000" cy="1300000"/>
+          </a:xfrm>
+          <a:prstGeom prst="rect">
+            <a:avLst/>
+          </a:prstGeom>
+        </p:spPr>
+      </p:pic>
+      <p:sp>
+        <p:nvSpPr>
+          <p:cNvPr id="10" name="TextBox 9"/>
+          <p:cNvSpPr txBox="1"/>
+          <p:nvPr/>
+        </p:nvSpPr>
+        <p:spPr>
+          <a:xfrm>
+            <a:off x="6100000" y="2550000"/>
+            <a:ext cx="2700000" cy="1400000"/>
+          </a:xfrm>
+          <a:prstGeom prst="rect">
+            <a:avLst/>
+          </a:prstGeom>
+          <a:noFill/>
+        </p:spPr>
+        <p:txBody>
+          <a:bodyPr wrap="square" lIns="0" tIns="0" rIns="0" bIns="0">
+            <a:spAutoFit/>
+          </a:bodyPr>
+          <a:lstStyle/>
+          <a:p>
+            <a:pPr algn="l"/>
+            <a:r>
+              <a:rPr sz="900" b="0">
+                <a:solidFill>
+                  <a:srgbClr val="4B5563"/>
+                </a:solidFill>
+                <a:latin typeface="Calibri"/>
+              </a:rPr>
+              <a:t>El pipeline exporta metricas al Pushgateway tras cada ejecucion. Prometheus las scrapea cada 15s. El dashboard muestra AUC-ROC, F1, confusion matrix, lift por percentil y datos del pipeline en tiempo real.</a:t>
+            </a:r>
+          </a:p>
+        </p:txBody>
+      </p:sp>
+      <p:sp>
+        <p:nvSpPr>
+          <p:cNvPr id="11" name="TextBox 10"/>
+          <p:cNvSpPr txBox="1"/>
+          <p:nvPr/>
+        </p:nvSpPr>
+        <p:spPr>
+          <a:xfrm>
+            <a:off x="457200" y="4100000"/>
+            <a:ext cx="8200000" cy="500000"/>
+          </a:xfrm>
+          <a:prstGeom prst="rect">
+            <a:avLst/>
+          </a:prstGeom>
+          <a:noFill/>
+        </p:spPr>
+        <p:txBody>
+          <a:bodyPr wrap="square" lIns="0" tIns="0" rIns="0" bIns="0">
+            <a:spAutoFit/>
+          </a:bodyPr>
+          <a:lstStyle/>
+          <a:p>
+            <a:pPr algn="l"/>
+            <a:r>
+              <a:rPr sz="1000" b="1">
+                <a:solidFill>
+                  <a:srgbClr val="1B2A4A"/>
+                </a:solidFill>
+                <a:latin typeface="Calibri"/>
+              </a:rPr>
+              <a:t>Stack completo: evaluate_model.py → metrics_exporter.py → Pushgateway (:9091) → Prometheus (:9090) → Grafana (:3000)</a:t>
+            </a:r>
+          </a:p>
+        </p:txBody>
+      </p:sp>
+    </p:spTree>
+  </p:cSld>
+  <p:clrMapOvr>
+    <a:masterClrMapping/>
+  </p:clrMapOvr>
+</p:sld>
+</file>
+
+<file path=ppt/slides/slide25.xml><?xml version="1.0" encoding="utf-8"?>
 <p:sld xmlns:a="http://schemas.openxmlformats.org/drawingml/2006/main" xmlns:r="http://schemas.openxmlformats.org/officeDocument/2006/relationships" xmlns:p="http://schemas.openxmlformats.org/presentationml/2006/main">
   <p:cSld name="Slide 23">
     <p:bg>
@@ -16011,7 +16746,7 @@
 </p:sld>
 </file>
 
-<file path=ppt/slides/slide24.xml><?xml version="1.0" encoding="utf-8"?>
+<file path=ppt/slides/slide26.xml><?xml version="1.0" encoding="utf-8"?>
 <p:sld xmlns:a="http://schemas.openxmlformats.org/drawingml/2006/main" xmlns:r="http://schemas.openxmlformats.org/officeDocument/2006/relationships" xmlns:p="http://schemas.openxmlformats.org/presentationml/2006/main">
   <p:cSld name="Slide 24">
     <p:bg>
@@ -16093,6 +16828,10 @@
           </a:solidFill>
           <a:ln/>
         </p:spPr>
+        <p:txBody>
+          <a:bodyPr/>
+          <a:p/>
+        </p:txBody>
       </p:sp>
       <p:sp>
         <p:nvSpPr>
@@ -16193,6 +16932,10 @@
           </a:solidFill>
           <a:ln/>
         </p:spPr>
+        <p:txBody>
+          <a:bodyPr/>
+          <a:p/>
+        </p:txBody>
       </p:sp>
       <p:sp>
         <p:nvSpPr>
@@ -16257,45 +17000,6 @@
           </a:prstGeom>
         </p:spPr>
       </p:pic>
-      <p:sp>
-        <p:nvSpPr>
-          <p:cNvPr id="9" name="Text 6"/>
-          <p:cNvSpPr/>
-          <p:nvPr/>
-        </p:nvSpPr>
-        <p:spPr>
-          <a:xfrm>
-            <a:off x="932688" y="1645920"/>
-            <a:ext cx="3383280" cy="301752"/>
-          </a:xfrm>
-          <a:prstGeom prst="rect">
-            <a:avLst/>
-          </a:prstGeom>
-          <a:noFill/>
-          <a:ln/>
-        </p:spPr>
-        <p:txBody>
-          <a:bodyPr wrap="square" lIns="0" tIns="0" rIns="0" bIns="0" rtlCol="0" anchor="ctr"/>
-          <a:lstStyle/>
-          <a:p>
-            <a:pPr indent="0" marL="0">
-              <a:buNone/>
-            </a:pPr>
-            <a:r>
-              <a:rPr lang="en-US" sz="1100" dirty="0">
-                <a:solidFill>
-                  <a:srgbClr val="4B5563"/>
-                </a:solidFill>
-                <a:latin typeface="Calibri" pitchFamily="34" charset="0"/>
-                <a:ea typeface="Calibri" pitchFamily="34" charset="-122"/>
-                <a:cs typeface="Calibri" pitchFamily="34" charset="-120"/>
-              </a:rPr>
-              <a:t>EDA profundo con deteccion de 13+ trampas</a:t>
-            </a:r>
-            <a:endParaRPr lang="en-US" sz="1100" dirty="0"/>
-          </a:p>
-        </p:txBody>
-      </p:sp>
       <p:pic>
         <p:nvPicPr>
           <p:cNvPr id="10" name="Image 1" descr="preencoded.png">    </p:cNvPr>
@@ -16345,7 +17049,7 @@
               <a:buNone/>
             </a:pPr>
             <a:r>
-              <a:rPr lang="en-US" sz="1100" dirty="0">
+              <a:rPr lang="en-US" sz="1200" dirty="0">
                 <a:solidFill>
                   <a:srgbClr val="4B5563"/>
                 </a:solidFill>
@@ -16408,7 +17112,7 @@
               <a:buNone/>
             </a:pPr>
             <a:r>
-              <a:rPr lang="en-US" sz="1100" dirty="0">
+              <a:rPr lang="en-US" sz="1200" dirty="0">
                 <a:solidFill>
                   <a:srgbClr val="4B5563"/>
                 </a:solidFill>
@@ -16471,7 +17175,7 @@
               <a:buNone/>
             </a:pPr>
             <a:r>
-              <a:rPr lang="en-US" sz="1100" dirty="0">
+              <a:rPr lang="en-US" sz="1200" dirty="0">
                 <a:solidFill>
                   <a:srgbClr val="4B5563"/>
                 </a:solidFill>
@@ -16534,7 +17238,7 @@
               <a:buNone/>
             </a:pPr>
             <a:r>
-              <a:rPr lang="en-US" sz="1100" dirty="0">
+              <a:rPr lang="en-US" sz="1200" dirty="0">
                 <a:solidFill>
                   <a:srgbClr val="4B5563"/>
                 </a:solidFill>
@@ -16542,7 +17246,7 @@
                 <a:ea typeface="Calibri" pitchFamily="34" charset="-122"/>
                 <a:cs typeface="Calibri" pitchFamily="34" charset="-120"/>
               </a:rPr>
-              <a:t>3 scripts modulares y testeados</a:t>
+              <a:t>DAG Airflow + Docker (10 servicios)</a:t>
             </a:r>
             <a:endParaRPr lang="en-US" sz="1100" dirty="0"/>
           </a:p>
@@ -16597,7 +17301,7 @@
               <a:buNone/>
             </a:pPr>
             <a:r>
-              <a:rPr lang="en-US" sz="1100" dirty="0">
+              <a:rPr lang="en-US" sz="1200" dirty="0">
                 <a:solidFill>
                   <a:srgbClr val="4B5563"/>
                 </a:solidFill>
@@ -16605,7 +17309,7 @@
                 <a:ea typeface="Calibri" pitchFamily="34" charset="-122"/>
                 <a:cs typeface="Calibri" pitchFamily="34" charset="-120"/>
               </a:rPr>
-              <a:t>DAG Airflow + Docker listo para deploy</a:t>
+              <a:t>PostgreSQL + MLflow: persistencia y tracking</a:t>
             </a:r>
             <a:endParaRPr lang="en-US" sz="1100" dirty="0"/>
           </a:p>
@@ -16637,45 +17341,6 @@
       </p:pic>
       <p:sp>
         <p:nvSpPr>
-          <p:cNvPr id="21" name="Text 12"/>
-          <p:cNvSpPr/>
-          <p:nvPr/>
-        </p:nvSpPr>
-        <p:spPr>
-          <a:xfrm>
-            <a:off x="932688" y="3840480"/>
-            <a:ext cx="3383280" cy="301752"/>
-          </a:xfrm>
-          <a:prstGeom prst="rect">
-            <a:avLst/>
-          </a:prstGeom>
-          <a:noFill/>
-          <a:ln/>
-        </p:spPr>
-        <p:txBody>
-          <a:bodyPr wrap="square" lIns="0" tIns="0" rIns="0" bIns="0" rtlCol="0" anchor="ctr"/>
-          <a:lstStyle/>
-          <a:p>
-            <a:pPr indent="0" marL="0">
-              <a:buNone/>
-            </a:pPr>
-            <a:r>
-              <a:rPr lang="en-US" sz="1100" dirty="0">
-                <a:solidFill>
-                  <a:srgbClr val="4B5563"/>
-                </a:solidFill>
-                <a:latin typeface="Calibri" pitchFamily="34" charset="0"/>
-                <a:ea typeface="Calibri" pitchFamily="34" charset="-122"/>
-                <a:cs typeface="Calibri" pitchFamily="34" charset="-120"/>
-              </a:rPr>
-              <a:t>Estudio de ablacion (no-leakage)</a:t>
-            </a:r>
-            <a:endParaRPr lang="en-US" sz="1100" dirty="0"/>
-          </a:p>
-        </p:txBody>
-      </p:sp>
-      <p:sp>
-        <p:nvSpPr>
           <p:cNvPr id="22" name="Shape 13"/>
           <p:cNvSpPr/>
           <p:nvPr/>
@@ -16695,6 +17360,10 @@
           </a:solidFill>
           <a:ln/>
         </p:spPr>
+        <p:txBody>
+          <a:bodyPr/>
+          <a:p/>
+        </p:txBody>
       </p:sp>
       <p:sp>
         <p:nvSpPr>
@@ -16761,27 +17430,12 @@
               <a:buChar char="•"/>
             </a:pPr>
             <a:r>
-              <a:rPr lang="en-US" sz="1050" dirty="0">
+              <a:rPr lang="en-US" sz="1200" dirty="0">
                 <a:solidFill>
                   <a:srgbClr val="4B5563"/>
                 </a:solidFill>
               </a:rPr>
-              <a:t>MLflow para experiment tracking — versionar modelos, comparar runs, registro de artefactos.</a:t>
-            </a:r>
-            <a:endParaRPr lang="en-US" sz="1050" dirty="0"/>
-          </a:p>
-          <a:p>
-            <a:pPr indent="0" marL="0">
-              <a:buNone/>
-            </a:pPr>
-            <a:r>
-              <a:rPr lang="en-US" sz="400" dirty="0">
-                <a:solidFill>
-                  <a:srgbClr val="000000"/>
-                </a:solidFill>
-              </a:rPr>
-              <a:t>
-</a:t>
+              <a:t>Feature store para centralizar features reutilizables entre modelos.</a:t>
             </a:r>
             <a:endParaRPr lang="en-US" sz="1050" dirty="0"/>
           </a:p>
@@ -16791,27 +17445,12 @@
               <a:buChar char="•"/>
             </a:pPr>
             <a:r>
-              <a:rPr lang="en-US" sz="1050" dirty="0">
+              <a:rPr lang="en-US" sz="1200" dirty="0">
                 <a:solidFill>
                   <a:srgbClr val="4B5563"/>
                 </a:solidFill>
               </a:rPr>
-              <a:t>PostgreSQL para persistencia de datos procesados en vez de CSVs.</a:t>
-            </a:r>
-            <a:endParaRPr lang="en-US" sz="1050" dirty="0"/>
-          </a:p>
-          <a:p>
-            <a:pPr indent="0" marL="0">
-              <a:buNone/>
-            </a:pPr>
-            <a:r>
-              <a:rPr lang="en-US" sz="400" dirty="0">
-                <a:solidFill>
-                  <a:srgbClr val="000000"/>
-                </a:solidFill>
-              </a:rPr>
-              <a:t>
-</a:t>
+              <a:t>A/B testing para validar impacto real de las campanas de retencion.</a:t>
             </a:r>
             <a:endParaRPr lang="en-US" sz="1050" dirty="0"/>
           </a:p>
@@ -16821,27 +17460,12 @@
               <a:buChar char="•"/>
             </a:pPr>
             <a:r>
-              <a:rPr lang="en-US" sz="1050" dirty="0">
+              <a:rPr lang="en-US" sz="1200" dirty="0">
                 <a:solidFill>
                   <a:srgbClr val="4B5563"/>
                 </a:solidFill>
               </a:rPr>
-              <a:t>Prometheus + Grafana para monitorizar drift del modelo y metricas en produccion.</a:t>
-            </a:r>
-            <a:endParaRPr lang="en-US" sz="1050" dirty="0"/>
-          </a:p>
-          <a:p>
-            <a:pPr indent="0" marL="0">
-              <a:buNone/>
-            </a:pPr>
-            <a:r>
-              <a:rPr lang="en-US" sz="400" dirty="0">
-                <a:solidFill>
-                  <a:srgbClr val="000000"/>
-                </a:solidFill>
-              </a:rPr>
-              <a:t>
-</a:t>
+              <a:t>Datos reales desbalanceados: adaptar con SMOTE/class_weight (~2%).</a:t>
             </a:r>
             <a:endParaRPr lang="en-US" sz="1050" dirty="0"/>
           </a:p>
@@ -16851,27 +17475,12 @@
               <a:buChar char="•"/>
             </a:pPr>
             <a:r>
-              <a:rPr lang="en-US" sz="1050" dirty="0">
+              <a:rPr lang="en-US" sz="1200" dirty="0">
                 <a:solidFill>
                   <a:srgbClr val="4B5563"/>
                 </a:solidFill>
               </a:rPr>
-              <a:t>Feature store para centralizar features reutilizables entre modelos.</a:t>
-            </a:r>
-            <a:endParaRPr lang="en-US" sz="1050" dirty="0"/>
-          </a:p>
-          <a:p>
-            <a:pPr indent="0" marL="0">
-              <a:buNone/>
-            </a:pPr>
-            <a:r>
-              <a:rPr lang="en-US" sz="400" dirty="0">
-                <a:solidFill>
-                  <a:srgbClr val="000000"/>
-                </a:solidFill>
-              </a:rPr>
-              <a:t>
-</a:t>
+              <a:t>Alertas automaticas en Grafana (umbrales de AUC, drift detection).</a:t>
             </a:r>
             <a:endParaRPr lang="en-US" sz="1050" dirty="0"/>
           </a:p>
@@ -16881,44 +17490,112 @@
               <a:buChar char="•"/>
             </a:pPr>
             <a:r>
-              <a:rPr lang="en-US" sz="1050" dirty="0">
+              <a:rPr lang="en-US" sz="1200" dirty="0">
                 <a:solidFill>
                   <a:srgbClr val="4B5563"/>
                 </a:solidFill>
               </a:rPr>
-              <a:t>A/B testing para validar impacto real de las campanas de retencion.</a:t>
+              <a:t>CI/CD para reentrenamiento automatico con datos frescos.</a:t>
             </a:r>
             <a:endParaRPr lang="en-US" sz="1050" dirty="0"/>
           </a:p>
-          <a:p>
-            <a:pPr indent="0" marL="0">
-              <a:buNone/>
-            </a:pPr>
-            <a:r>
-              <a:rPr lang="en-US" sz="400" dirty="0">
-                <a:solidFill>
-                  <a:srgbClr val="000000"/>
-                </a:solidFill>
-              </a:rPr>
-              <a:t>
-</a:t>
-            </a:r>
-            <a:endParaRPr lang="en-US" sz="1050" dirty="0"/>
-          </a:p>
-          <a:p>
-            <a:pPr marL="342900" indent="-342900">
-              <a:buSzPct val="100000"/>
-              <a:buChar char="•"/>
-            </a:pPr>
-            <a:r>
-              <a:rPr lang="en-US" sz="1050" dirty="0">
+        </p:txBody>
+      </p:sp>
+      <p:sp>
+        <p:nvSpPr>
+          <p:cNvPr id="50" name="Text 49"/>
+          <p:cNvSpPr/>
+          <p:nvPr/>
+        </p:nvSpPr>
+        <p:spPr>
+          <a:xfrm>
+            <a:off x="932688" y="3840480"/>
+            <a:ext cx="3383280" cy="301752"/>
+          </a:xfrm>
+          <a:prstGeom prst="rect">
+            <a:avLst/>
+          </a:prstGeom>
+          <a:noFill/>
+          <a:ln/>
+        </p:spPr>
+        <p:txBody>
+          <a:bodyPr wrap="square" lIns="0" tIns="0" rIns="0" bIns="0" rtlCol="0" anchor="ctr"/>
+          <a:lstStyle/>
+          <a:p>
+            <a:pPr indent="0" marL="0">
+              <a:buNone/>
+            </a:pPr>
+            <a:r>
+              <a:rPr lang="en-US" sz="1200" dirty="0">
                 <a:solidFill>
                   <a:srgbClr val="4B5563"/>
                 </a:solidFill>
-              </a:rPr>
-              <a:t>Datos reales desbalanceados: adaptar con SMOTE/class_weight para churn real (~2%).</a:t>
-            </a:r>
-            <a:endParaRPr lang="en-US" sz="1050" dirty="0"/>
+                <a:latin typeface="Calibri" pitchFamily="34" charset="0"/>
+                <a:ea typeface="Calibri" pitchFamily="34" charset="-122"/>
+                <a:cs typeface="Calibri" pitchFamily="34" charset="-120"/>
+              </a:rPr>
+              <a:t>Prometheus + Grafana: monitoreo en vivo</a:t>
+            </a:r>
+            <a:endParaRPr lang="en-US" sz="1100" dirty="0"/>
+          </a:p>
+        </p:txBody>
+      </p:sp>
+      <p:pic>
+        <p:nvPicPr>
+          <p:cNvPr id="51" name="Picture 50" descr="preencoded.png">    </p:cNvPr>
+          <p:cNvPicPr>
+            <a:picLocks noChangeAspect="1"/>
+          </p:cNvPicPr>
+          <p:nvPr/>
+        </p:nvPicPr>
+        <p:blipFill>
+          <a:blip r:embed="rId6"/>
+          <a:stretch>
+            <a:fillRect/>
+          </a:stretch>
+        </p:blipFill>
+        <p:spPr>
+          <a:xfrm>
+            <a:off x="640080" y="3840480"/>
+            <a:ext cx="201168" cy="201168"/>
+          </a:xfrm>
+          <a:prstGeom prst="rect">
+            <a:avLst/>
+          </a:prstGeom>
+        </p:spPr>
+      </p:pic>
+      <p:sp>
+        <p:nvSpPr>
+          <p:cNvPr id="52" name="TextBox 51"/>
+          <p:cNvSpPr txBox="1"/>
+          <p:nvPr/>
+        </p:nvSpPr>
+        <p:spPr>
+          <a:xfrm>
+            <a:off x="932688" y="1645920"/>
+            <a:ext cx="3383280" cy="301752"/>
+          </a:xfrm>
+          <a:prstGeom prst="rect">
+            <a:avLst/>
+          </a:prstGeom>
+          <a:noFill/>
+        </p:spPr>
+        <p:txBody>
+          <a:bodyPr wrap="square" lIns="0" tIns="0" rIns="0" bIns="0">
+            <a:spAutoFit/>
+          </a:bodyPr>
+          <a:lstStyle/>
+          <a:p>
+            <a:pPr algn="l"/>
+            <a:r>
+              <a:rPr sz="1200">
+                <a:solidFill>
+                  <a:srgbClr val="4B5563"/>
+                </a:solidFill>
+                <a:latin typeface="Calibri"/>
+              </a:rPr>
+              <a:t>EDA profundo + 13 trampas detectadas</a:t>
+            </a:r>
           </a:p>
         </p:txBody>
       </p:sp>
@@ -16930,7 +17607,7 @@
 </p:sld>
 </file>
 
-<file path=ppt/slides/slide25.xml><?xml version="1.0" encoding="utf-8"?>
+<file path=ppt/slides/slide27.xml><?xml version="1.0" encoding="utf-8"?>
 <p:sld xmlns:a="http://schemas.openxmlformats.org/drawingml/2006/main" xmlns:r="http://schemas.openxmlformats.org/officeDocument/2006/relationships" xmlns:p="http://schemas.openxmlformats.org/presentationml/2006/main">
   <p:cSld name="Slide 25">
     <p:bg>

--- a/Presentacion_Churn_SDG.pptx
+++ b/Presentacion_Churn_SDG.pptx
@@ -4023,6 +4023,141 @@
           </a:p>
         </p:txBody>
       </p:sp>
+      <p:sp>
+        <p:nvSpPr>
+          <p:cNvPr id="9" name="Oval 8"/>
+          <p:cNvSpPr/>
+          <p:nvPr/>
+        </p:nvSpPr>
+        <p:spPr>
+          <a:xfrm>
+            <a:off x="6400000" y="800000"/>
+            <a:ext cx="3200000" cy="3200000"/>
+          </a:xfrm>
+          <a:prstGeom prst="ellipse">
+            <a:avLst/>
+          </a:prstGeom>
+          <a:solidFill>
+            <a:srgbClr val="FFFFFF">
+              <a:alpha val="12000"/>
+            </a:srgbClr>
+          </a:solidFill>
+          <a:ln>
+            <a:noFill/>
+          </a:ln>
+        </p:spPr>
+        <p:style>
+          <a:lnRef idx="1">
+            <a:schemeClr val="accent1"/>
+          </a:lnRef>
+          <a:fillRef idx="3">
+            <a:schemeClr val="accent1"/>
+          </a:fillRef>
+          <a:effectRef idx="2">
+            <a:schemeClr val="accent1"/>
+          </a:effectRef>
+          <a:fontRef idx="minor">
+            <a:schemeClr val="lt1"/>
+          </a:fontRef>
+        </p:style>
+        <p:txBody>
+          <a:bodyPr rtlCol="0" anchor="ctr"/>
+          <a:lstStyle/>
+          <a:p>
+            <a:pPr algn="ctr"/>
+          </a:p>
+        </p:txBody>
+      </p:sp>
+      <p:sp>
+        <p:nvSpPr>
+          <p:cNvPr id="10" name="Oval 9"/>
+          <p:cNvSpPr/>
+          <p:nvPr/>
+        </p:nvSpPr>
+        <p:spPr>
+          <a:xfrm>
+            <a:off x="7500000" y="2500000"/>
+            <a:ext cx="2200000" cy="2200000"/>
+          </a:xfrm>
+          <a:prstGeom prst="ellipse">
+            <a:avLst/>
+          </a:prstGeom>
+          <a:solidFill>
+            <a:srgbClr val="FFFFFF">
+              <a:alpha val="8000"/>
+            </a:srgbClr>
+          </a:solidFill>
+          <a:ln>
+            <a:noFill/>
+          </a:ln>
+        </p:spPr>
+        <p:style>
+          <a:lnRef idx="1">
+            <a:schemeClr val="accent1"/>
+          </a:lnRef>
+          <a:fillRef idx="3">
+            <a:schemeClr val="accent1"/>
+          </a:fillRef>
+          <a:effectRef idx="2">
+            <a:schemeClr val="accent1"/>
+          </a:effectRef>
+          <a:fontRef idx="minor">
+            <a:schemeClr val="lt1"/>
+          </a:fontRef>
+        </p:style>
+        <p:txBody>
+          <a:bodyPr rtlCol="0" anchor="ctr"/>
+          <a:lstStyle/>
+          <a:p>
+            <a:pPr algn="ctr"/>
+          </a:p>
+        </p:txBody>
+      </p:sp>
+      <p:sp>
+        <p:nvSpPr>
+          <p:cNvPr id="11" name="Oval 10"/>
+          <p:cNvSpPr/>
+          <p:nvPr/>
+        </p:nvSpPr>
+        <p:spPr>
+          <a:xfrm>
+            <a:off x="8200000" y="300000"/>
+            <a:ext cx="1000000" cy="1000000"/>
+          </a:xfrm>
+          <a:prstGeom prst="ellipse">
+            <a:avLst/>
+          </a:prstGeom>
+          <a:solidFill>
+            <a:srgbClr val="FFFFFF">
+              <a:alpha val="15000"/>
+            </a:srgbClr>
+          </a:solidFill>
+          <a:ln>
+            <a:noFill/>
+          </a:ln>
+        </p:spPr>
+        <p:style>
+          <a:lnRef idx="1">
+            <a:schemeClr val="accent1"/>
+          </a:lnRef>
+          <a:fillRef idx="3">
+            <a:schemeClr val="accent1"/>
+          </a:fillRef>
+          <a:effectRef idx="2">
+            <a:schemeClr val="accent1"/>
+          </a:effectRef>
+          <a:fontRef idx="minor">
+            <a:schemeClr val="lt1"/>
+          </a:fontRef>
+        </p:style>
+        <p:txBody>
+          <a:bodyPr rtlCol="0" anchor="ctr"/>
+          <a:lstStyle/>
+          <a:p>
+            <a:pPr algn="ctr"/>
+          </a:p>
+        </p:txBody>
+      </p:sp>
     </p:spTree>
   </p:cSld>
   <p:clrMapOvr>
@@ -5706,7 +5841,7 @@
         <p:spPr>
           <a:xfrm>
             <a:off x="457200" y="1143000"/>
-            <a:ext cx="4023360" cy="3291840"/>
+            <a:ext cx="4023360" cy="3500000"/>
           </a:xfrm>
           <a:prstGeom prst="roundRect">
             <a:avLst>
@@ -8098,7 +8233,7 @@
         <p:spPr>
           <a:xfrm>
             <a:off x="4846320" y="2651760"/>
-            <a:ext cx="3840480" cy="1828800"/>
+            <a:ext cx="3840480" cy="2100000"/>
           </a:xfrm>
           <a:prstGeom prst="roundRect">
             <a:avLst>
@@ -8159,7 +8294,7 @@
         <p:spPr>
           <a:xfrm>
             <a:off x="5029200" y="3108960"/>
-            <a:ext cx="3474720" cy="1188720"/>
+            <a:ext cx="3474720" cy="1500000"/>
           </a:xfrm>
           <a:prstGeom prst="rect">
             <a:avLst/>
@@ -10563,7 +10698,7 @@
         <p:spPr>
           <a:xfrm>
             <a:off x="5577840" y="1097280"/>
-            <a:ext cx="3200400" cy="3200400"/>
+            <a:ext cx="3200400" cy="3500000"/>
           </a:xfrm>
           <a:prstGeom prst="roundRect">
             <a:avLst>
@@ -10644,7 +10779,7 @@
         <p:spPr>
           <a:xfrm>
             <a:off x="5806440" y="1554480"/>
-            <a:ext cx="2834640" cy="2560320"/>
+            <a:ext cx="2834640" cy="2900000"/>
           </a:xfrm>
           <a:prstGeom prst="rect">
             <a:avLst/>
@@ -10689,7 +10824,7 @@
               <a:buNone/>
             </a:pPr>
             <a:r>
-              <a:rPr lang="en-US" sz="1800" b="1" dirty="0">
+              <a:rPr lang="en-US" sz="1100" b="1" dirty="0">
                 <a:solidFill>
                   <a:srgbClr val="0078D4"/>
                 </a:solidFill>
@@ -10718,7 +10853,7 @@
               <a:buNone/>
             </a:pPr>
             <a:r>
-              <a:rPr lang="en-US" sz="1200" dirty="0">
+              <a:rPr lang="en-US" sz="1100" dirty="0">
                 <a:solidFill>
                   <a:srgbClr val="4B5563"/>
                 </a:solidFill>
@@ -12771,6 +12906,49 @@
       </p:grpSpPr>
       <p:sp>
         <p:nvSpPr>
+          <p:cNvPr id="29" name="Rectangle 28"/>
+          <p:cNvSpPr/>
+          <p:nvPr/>
+        </p:nvSpPr>
+        <p:spPr>
+          <a:xfrm>
+            <a:off x="4572000" y="0"/>
+            <a:ext cx="4572000" cy="5143500"/>
+          </a:xfrm>
+          <a:prstGeom prst="rect">
+            <a:avLst/>
+          </a:prstGeom>
+          <a:solidFill>
+            <a:srgbClr val="E8F4FD"/>
+          </a:solidFill>
+          <a:ln>
+            <a:noFill/>
+          </a:ln>
+        </p:spPr>
+        <p:style>
+          <a:lnRef idx="1">
+            <a:schemeClr val="accent1"/>
+          </a:lnRef>
+          <a:fillRef idx="3">
+            <a:schemeClr val="accent1"/>
+          </a:fillRef>
+          <a:effectRef idx="2">
+            <a:schemeClr val="accent1"/>
+          </a:effectRef>
+          <a:fontRef idx="minor">
+            <a:schemeClr val="lt1"/>
+          </a:fontRef>
+        </p:style>
+        <p:txBody>
+          <a:bodyPr rtlCol="0" anchor="ctr"/>
+          <a:lstStyle/>
+          <a:p>
+            <a:pPr algn="ctr"/>
+          </a:p>
+        </p:txBody>
+      </p:sp>
+      <p:sp>
+        <p:nvSpPr>
           <p:cNvPr id="2" name="Shape 0"/>
           <p:cNvSpPr/>
           <p:nvPr/>
@@ -13591,6 +13769,141 @@
               <a:t>Copyright © SDG Group</a:t>
             </a:r>
             <a:endParaRPr lang="en-US" sz="800" dirty="0"/>
+          </a:p>
+        </p:txBody>
+      </p:sp>
+      <p:sp>
+        <p:nvSpPr>
+          <p:cNvPr id="30" name="Oval 29"/>
+          <p:cNvSpPr/>
+          <p:nvPr/>
+        </p:nvSpPr>
+        <p:spPr>
+          <a:xfrm>
+            <a:off x="5500000" y="500000"/>
+            <a:ext cx="2500000" cy="2500000"/>
+          </a:xfrm>
+          <a:prstGeom prst="ellipse">
+            <a:avLst/>
+          </a:prstGeom>
+          <a:solidFill>
+            <a:srgbClr val="0078D4">
+              <a:alpha val="5000"/>
+            </a:srgbClr>
+          </a:solidFill>
+          <a:ln>
+            <a:noFill/>
+          </a:ln>
+        </p:spPr>
+        <p:style>
+          <a:lnRef idx="1">
+            <a:schemeClr val="accent1"/>
+          </a:lnRef>
+          <a:fillRef idx="3">
+            <a:schemeClr val="accent1"/>
+          </a:fillRef>
+          <a:effectRef idx="2">
+            <a:schemeClr val="accent1"/>
+          </a:effectRef>
+          <a:fontRef idx="minor">
+            <a:schemeClr val="lt1"/>
+          </a:fontRef>
+        </p:style>
+        <p:txBody>
+          <a:bodyPr rtlCol="0" anchor="ctr"/>
+          <a:lstStyle/>
+          <a:p>
+            <a:pPr algn="ctr"/>
+          </a:p>
+        </p:txBody>
+      </p:sp>
+      <p:sp>
+        <p:nvSpPr>
+          <p:cNvPr id="31" name="Oval 30"/>
+          <p:cNvSpPr/>
+          <p:nvPr/>
+        </p:nvSpPr>
+        <p:spPr>
+          <a:xfrm>
+            <a:off x="6800000" y="2000000"/>
+            <a:ext cx="1800000" cy="1800000"/>
+          </a:xfrm>
+          <a:prstGeom prst="ellipse">
+            <a:avLst/>
+          </a:prstGeom>
+          <a:solidFill>
+            <a:srgbClr val="0078D4">
+              <a:alpha val="8000"/>
+            </a:srgbClr>
+          </a:solidFill>
+          <a:ln>
+            <a:noFill/>
+          </a:ln>
+        </p:spPr>
+        <p:style>
+          <a:lnRef idx="1">
+            <a:schemeClr val="accent1"/>
+          </a:lnRef>
+          <a:fillRef idx="3">
+            <a:schemeClr val="accent1"/>
+          </a:fillRef>
+          <a:effectRef idx="2">
+            <a:schemeClr val="accent1"/>
+          </a:effectRef>
+          <a:fontRef idx="minor">
+            <a:schemeClr val="lt1"/>
+          </a:fontRef>
+        </p:style>
+        <p:txBody>
+          <a:bodyPr rtlCol="0" anchor="ctr"/>
+          <a:lstStyle/>
+          <a:p>
+            <a:pPr algn="ctr"/>
+          </a:p>
+        </p:txBody>
+      </p:sp>
+      <p:sp>
+        <p:nvSpPr>
+          <p:cNvPr id="32" name="Oval 31"/>
+          <p:cNvSpPr/>
+          <p:nvPr/>
+        </p:nvSpPr>
+        <p:spPr>
+          <a:xfrm>
+            <a:off x="5000000" y="3200000"/>
+            <a:ext cx="1200000" cy="1200000"/>
+          </a:xfrm>
+          <a:prstGeom prst="ellipse">
+            <a:avLst/>
+          </a:prstGeom>
+          <a:solidFill>
+            <a:srgbClr val="0078D4">
+              <a:alpha val="6000"/>
+            </a:srgbClr>
+          </a:solidFill>
+          <a:ln>
+            <a:noFill/>
+          </a:ln>
+        </p:spPr>
+        <p:style>
+          <a:lnRef idx="1">
+            <a:schemeClr val="accent1"/>
+          </a:lnRef>
+          <a:fillRef idx="3">
+            <a:schemeClr val="accent1"/>
+          </a:fillRef>
+          <a:effectRef idx="2">
+            <a:schemeClr val="accent1"/>
+          </a:effectRef>
+          <a:fontRef idx="minor">
+            <a:schemeClr val="lt1"/>
+          </a:fontRef>
+        </p:style>
+        <p:txBody>
+          <a:bodyPr rtlCol="0" anchor="ctr"/>
+          <a:lstStyle/>
+          <a:p>
+            <a:pPr algn="ctr"/>
           </a:p>
         </p:txBody>
       </p:sp>

--- a/Presentacion_Churn_SDG.pptx
+++ b/Presentacion_Churn_SDG.pptx
@@ -3804,6 +3804,10 @@
           </a:solidFill>
           <a:ln/>
         </p:spPr>
+        <p:txBody>
+          <a:bodyPr/>
+          <a:p/>
+        </p:txBody>
       </p:sp>
       <p:sp>
         <p:nvSpPr>
@@ -3939,7 +3943,7 @@
                 <a:ea typeface="Calibri" pitchFamily="34" charset="-122"/>
                 <a:cs typeface="Calibri" pitchFamily="34" charset="-120"/>
               </a:rPr>
-              <a:t>Tomas Montero</a:t>
+              <a:t>Miguel Ángel Montero</a:t>
             </a:r>
             <a:endParaRPr lang="en-US" sz="1400" dirty="0"/>
           </a:p>
@@ -4248,6 +4252,10 @@
           </a:solidFill>
           <a:ln/>
         </p:spPr>
+        <p:txBody>
+          <a:bodyPr/>
+          <a:p/>
+        </p:txBody>
       </p:sp>
       <p:sp>
         <p:nvSpPr>
@@ -4348,6 +4356,10 @@
           </a:solidFill>
           <a:ln/>
         </p:spPr>
+        <p:txBody>
+          <a:bodyPr/>
+          <a:p/>
+        </p:txBody>
       </p:sp>
       <p:sp>
         <p:nvSpPr>
@@ -4368,6 +4380,10 @@
           </a:solidFill>
           <a:ln/>
         </p:spPr>
+        <p:txBody>
+          <a:bodyPr/>
+          <a:p/>
+        </p:txBody>
       </p:sp>
       <p:sp>
         <p:nvSpPr>
@@ -4441,7 +4457,7 @@
                 <a:ea typeface="Calibri" pitchFamily="34" charset="-122"/>
                 <a:cs typeface="Calibri" pitchFamily="34" charset="-120"/>
               </a:rPr>
-              <a:t>Limpieza de trampas</a:t>
+              <a:t>Limpieza de peculiaridades</a:t>
             </a:r>
             <a:endParaRPr lang="en-US" sz="1100" dirty="0"/>
           </a:p>
@@ -4531,6 +4547,10 @@
           </a:solidFill>
           <a:ln/>
         </p:spPr>
+        <p:txBody>
+          <a:bodyPr/>
+          <a:p/>
+        </p:txBody>
       </p:sp>
       <p:sp>
         <p:nvSpPr>
@@ -4551,6 +4571,10 @@
           </a:solidFill>
           <a:ln/>
         </p:spPr>
+        <p:txBody>
+          <a:bodyPr/>
+          <a:p/>
+        </p:txBody>
       </p:sp>
       <p:sp>
         <p:nvSpPr>
@@ -4714,6 +4738,10 @@
           </a:solidFill>
           <a:ln/>
         </p:spPr>
+        <p:txBody>
+          <a:bodyPr/>
+          <a:p/>
+        </p:txBody>
       </p:sp>
       <p:sp>
         <p:nvSpPr>
@@ -4734,6 +4762,10 @@
           </a:solidFill>
           <a:ln/>
         </p:spPr>
+        <p:txBody>
+          <a:bodyPr/>
+          <a:p/>
+        </p:txBody>
       </p:sp>
       <p:sp>
         <p:nvSpPr>
@@ -4897,6 +4929,10 @@
           </a:solidFill>
           <a:ln/>
         </p:spPr>
+        <p:txBody>
+          <a:bodyPr/>
+          <a:p/>
+        </p:txBody>
       </p:sp>
       <p:sp>
         <p:nvSpPr>
@@ -4917,6 +4953,10 @@
           </a:solidFill>
           <a:ln/>
         </p:spPr>
+        <p:txBody>
+          <a:bodyPr/>
+          <a:p/>
+        </p:txBody>
       </p:sp>
       <p:sp>
         <p:nvSpPr>
@@ -5080,6 +5120,10 @@
           </a:solidFill>
           <a:ln/>
         </p:spPr>
+        <p:txBody>
+          <a:bodyPr/>
+          <a:p/>
+        </p:txBody>
       </p:sp>
       <p:sp>
         <p:nvSpPr>
@@ -5100,6 +5144,10 @@
           </a:solidFill>
           <a:ln/>
         </p:spPr>
+        <p:txBody>
+          <a:bodyPr/>
+          <a:p/>
+        </p:txBody>
       </p:sp>
       <p:sp>
         <p:nvSpPr>
@@ -5347,6 +5395,10 @@
           </a:solidFill>
           <a:ln/>
         </p:spPr>
+        <p:txBody>
+          <a:bodyPr/>
+          <a:p/>
+        </p:txBody>
       </p:sp>
       <p:sp>
         <p:nvSpPr>
@@ -5463,6 +5515,10 @@
           </a:solidFill>
           <a:ln/>
         </p:spPr>
+        <p:txBody>
+          <a:bodyPr/>
+          <a:p/>
+        </p:txBody>
       </p:sp>
       <p:sp>
         <p:nvSpPr>
@@ -5483,6 +5539,10 @@
           </a:solidFill>
           <a:ln/>
         </p:spPr>
+        <p:txBody>
+          <a:bodyPr/>
+          <a:p/>
+        </p:txBody>
       </p:sp>
       <p:sp>
         <p:nvSpPr>
@@ -5753,6 +5813,10 @@
           </a:solidFill>
           <a:ln/>
         </p:spPr>
+        <p:txBody>
+          <a:bodyPr/>
+          <a:p/>
+        </p:txBody>
       </p:sp>
       <p:sp>
         <p:nvSpPr>
@@ -5853,6 +5917,10 @@
           </a:solidFill>
           <a:ln/>
         </p:spPr>
+        <p:txBody>
+          <a:bodyPr/>
+          <a:p/>
+        </p:txBody>
       </p:sp>
       <p:sp>
         <p:nvSpPr>
@@ -6772,6 +6840,10 @@
           </a:solidFill>
           <a:ln/>
         </p:spPr>
+        <p:txBody>
+          <a:bodyPr/>
+          <a:p/>
+        </p:txBody>
       </p:sp>
       <p:sp>
         <p:nvSpPr>
@@ -7025,6 +7097,10 @@
           </a:solidFill>
           <a:ln/>
         </p:spPr>
+        <p:txBody>
+          <a:bodyPr/>
+          <a:p/>
+        </p:txBody>
       </p:sp>
       <p:sp>
         <p:nvSpPr>
@@ -7132,6 +7208,10 @@
             </a:outerShdw>
           </a:effectLst>
         </p:spPr>
+        <p:txBody>
+          <a:bodyPr/>
+          <a:p/>
+        </p:txBody>
       </p:sp>
       <p:sp>
         <p:nvSpPr>
@@ -7152,6 +7232,10 @@
           </a:solidFill>
           <a:ln/>
         </p:spPr>
+        <p:txBody>
+          <a:bodyPr/>
+          <a:p/>
+        </p:txBody>
       </p:sp>
       <p:sp>
         <p:nvSpPr>
@@ -7259,6 +7343,10 @@
             </a:outerShdw>
           </a:effectLst>
         </p:spPr>
+        <p:txBody>
+          <a:bodyPr/>
+          <a:p/>
+        </p:txBody>
       </p:sp>
       <p:sp>
         <p:nvSpPr>
@@ -7279,6 +7367,10 @@
           </a:solidFill>
           <a:ln/>
         </p:spPr>
+        <p:txBody>
+          <a:bodyPr/>
+          <a:p/>
+        </p:txBody>
       </p:sp>
       <p:sp>
         <p:nvSpPr>
@@ -7386,6 +7478,10 @@
             </a:outerShdw>
           </a:effectLst>
         </p:spPr>
+        <p:txBody>
+          <a:bodyPr/>
+          <a:p/>
+        </p:txBody>
       </p:sp>
       <p:sp>
         <p:nvSpPr>
@@ -7406,6 +7502,10 @@
           </a:solidFill>
           <a:ln/>
         </p:spPr>
+        <p:txBody>
+          <a:bodyPr/>
+          <a:p/>
+        </p:txBody>
       </p:sp>
       <p:sp>
         <p:nvSpPr>
@@ -7513,6 +7613,10 @@
             </a:outerShdw>
           </a:effectLst>
         </p:spPr>
+        <p:txBody>
+          <a:bodyPr/>
+          <a:p/>
+        </p:txBody>
       </p:sp>
       <p:sp>
         <p:nvSpPr>
@@ -7533,6 +7637,10 @@
           </a:solidFill>
           <a:ln/>
         </p:spPr>
+        <p:txBody>
+          <a:bodyPr/>
+          <a:p/>
+        </p:txBody>
       </p:sp>
       <p:sp>
         <p:nvSpPr>
@@ -7633,6 +7741,10 @@
           </a:solidFill>
           <a:ln/>
         </p:spPr>
+        <p:txBody>
+          <a:bodyPr/>
+          <a:p/>
+        </p:txBody>
       </p:sp>
       <p:sp>
         <p:nvSpPr>
@@ -8245,6 +8357,10 @@
           </a:solidFill>
           <a:ln/>
         </p:spPr>
+        <p:txBody>
+          <a:bodyPr/>
+          <a:p/>
+        </p:txBody>
       </p:sp>
       <p:sp>
         <p:nvSpPr>
@@ -8315,7 +8431,7 @@
                   <a:srgbClr val="4B5563"/>
                 </a:solidFill>
               </a:rPr>
-              <a:t>AUC 0.70 indica capacidad discriminativa moderada-buena. Dado un dataset con 100 features ruidosas y trampas, es un resultado solido.</a:t>
+              <a:t>AUC 0.70 indica capacidad discriminativa moderada-buena. Dado un dataset con 100 features ruidosas y peculiaridades, es un resultado solido.</a:t>
             </a:r>
             <a:endParaRPr lang="en-US" sz="1050" dirty="0"/>
           </a:p>
@@ -8469,6 +8585,10 @@
           </a:solidFill>
           <a:ln/>
         </p:spPr>
+        <p:txBody>
+          <a:bodyPr/>
+          <a:p/>
+        </p:txBody>
       </p:sp>
       <p:sp>
         <p:nvSpPr>
@@ -8569,6 +8689,10 @@
           </a:solidFill>
           <a:ln/>
         </p:spPr>
+        <p:txBody>
+          <a:bodyPr/>
+          <a:p/>
+        </p:txBody>
       </p:sp>
       <p:sp>
         <p:nvSpPr>
@@ -8589,6 +8713,10 @@
           </a:solidFill>
           <a:ln/>
         </p:spPr>
+        <p:txBody>
+          <a:bodyPr/>
+          <a:p/>
+        </p:txBody>
       </p:sp>
       <p:sp>
         <p:nvSpPr>
@@ -8728,6 +8856,10 @@
           </a:solidFill>
           <a:ln/>
         </p:spPr>
+        <p:txBody>
+          <a:bodyPr/>
+          <a:p/>
+        </p:txBody>
       </p:sp>
       <p:sp>
         <p:nvSpPr>
@@ -8748,6 +8880,10 @@
           </a:solidFill>
           <a:ln/>
         </p:spPr>
+        <p:txBody>
+          <a:bodyPr/>
+          <a:p/>
+        </p:txBody>
       </p:sp>
       <p:sp>
         <p:nvSpPr>
@@ -8887,6 +9023,10 @@
           </a:solidFill>
           <a:ln/>
         </p:spPr>
+        <p:txBody>
+          <a:bodyPr/>
+          <a:p/>
+        </p:txBody>
       </p:sp>
       <p:sp>
         <p:nvSpPr>
@@ -8907,6 +9047,10 @@
           </a:solidFill>
           <a:ln/>
         </p:spPr>
+        <p:txBody>
+          <a:bodyPr/>
+          <a:p/>
+        </p:txBody>
       </p:sp>
       <p:sp>
         <p:nvSpPr>
@@ -9046,6 +9190,10 @@
           </a:solidFill>
           <a:ln/>
         </p:spPr>
+        <p:txBody>
+          <a:bodyPr/>
+          <a:p/>
+        </p:txBody>
       </p:sp>
       <p:sp>
         <p:nvSpPr>
@@ -9066,6 +9214,10 @@
           </a:solidFill>
           <a:ln/>
         </p:spPr>
+        <p:txBody>
+          <a:bodyPr/>
+          <a:p/>
+        </p:txBody>
       </p:sp>
       <p:sp>
         <p:nvSpPr>
@@ -9274,6 +9426,10 @@
           </a:solidFill>
           <a:ln/>
         </p:spPr>
+        <p:txBody>
+          <a:bodyPr/>
+          <a:p/>
+        </p:txBody>
       </p:sp>
       <p:sp>
         <p:nvSpPr>
@@ -9374,6 +9530,10 @@
           </a:solidFill>
           <a:ln/>
         </p:spPr>
+        <p:txBody>
+          <a:bodyPr/>
+          <a:p/>
+        </p:txBody>
       </p:sp>
       <p:sp>
         <p:nvSpPr>
@@ -9437,6 +9597,10 @@
           </a:solidFill>
           <a:ln/>
         </p:spPr>
+        <p:txBody>
+          <a:bodyPr/>
+          <a:p/>
+        </p:txBody>
       </p:sp>
       <p:sp>
         <p:nvSpPr>
@@ -9500,6 +9664,10 @@
           </a:solidFill>
           <a:ln/>
         </p:spPr>
+        <p:txBody>
+          <a:bodyPr/>
+          <a:p/>
+        </p:txBody>
       </p:sp>
       <p:sp>
         <p:nvSpPr>
@@ -9563,6 +9731,10 @@
           </a:solidFill>
           <a:ln/>
         </p:spPr>
+        <p:txBody>
+          <a:bodyPr/>
+          <a:p/>
+        </p:txBody>
       </p:sp>
       <p:sp>
         <p:nvSpPr>
@@ -9626,6 +9798,10 @@
           </a:solidFill>
           <a:ln/>
         </p:spPr>
+        <p:txBody>
+          <a:bodyPr/>
+          <a:p/>
+        </p:txBody>
       </p:sp>
       <p:sp>
         <p:nvSpPr>
@@ -9689,6 +9865,10 @@
           </a:solidFill>
           <a:ln/>
         </p:spPr>
+        <p:txBody>
+          <a:bodyPr/>
+          <a:p/>
+        </p:txBody>
       </p:sp>
       <p:sp>
         <p:nvSpPr>
@@ -9752,6 +9932,10 @@
           </a:solidFill>
           <a:ln/>
         </p:spPr>
+        <p:txBody>
+          <a:bodyPr/>
+          <a:p/>
+        </p:txBody>
       </p:sp>
       <p:sp>
         <p:nvSpPr>
@@ -9815,6 +9999,10 @@
           </a:solidFill>
           <a:ln/>
         </p:spPr>
+        <p:txBody>
+          <a:bodyPr/>
+          <a:p/>
+        </p:txBody>
       </p:sp>
       <p:sp>
         <p:nvSpPr>
@@ -9878,6 +10066,10 @@
           </a:solidFill>
           <a:ln/>
         </p:spPr>
+        <p:txBody>
+          <a:bodyPr/>
+          <a:p/>
+        </p:txBody>
       </p:sp>
       <p:sp>
         <p:nvSpPr>
@@ -9941,6 +10133,10 @@
           </a:solidFill>
           <a:ln/>
         </p:spPr>
+        <p:txBody>
+          <a:bodyPr/>
+          <a:p/>
+        </p:txBody>
       </p:sp>
       <p:sp>
         <p:nvSpPr>
@@ -10004,6 +10200,10 @@
           </a:solidFill>
           <a:ln/>
         </p:spPr>
+        <p:txBody>
+          <a:bodyPr/>
+          <a:p/>
+        </p:txBody>
       </p:sp>
       <p:sp>
         <p:nvSpPr>
@@ -10065,6 +10265,10 @@
           </a:solidFill>
           <a:ln/>
         </p:spPr>
+        <p:txBody>
+          <a:bodyPr/>
+          <a:p/>
+        </p:txBody>
       </p:sp>
       <p:sp>
         <p:nvSpPr>
@@ -10347,6 +10551,10 @@
           </a:solidFill>
           <a:ln/>
         </p:spPr>
+        <p:txBody>
+          <a:bodyPr/>
+          <a:p/>
+        </p:txBody>
       </p:sp>
       <p:sp>
         <p:nvSpPr>
@@ -10594,6 +10802,10 @@
           </a:solidFill>
           <a:ln/>
         </p:spPr>
+        <p:txBody>
+          <a:bodyPr/>
+          <a:p/>
+        </p:txBody>
       </p:sp>
       <p:sp>
         <p:nvSpPr>
@@ -10710,6 +10922,10 @@
           </a:solidFill>
           <a:ln/>
         </p:spPr>
+        <p:txBody>
+          <a:bodyPr/>
+          <a:p/>
+        </p:txBody>
       </p:sp>
       <p:sp>
         <p:nvSpPr>
@@ -10730,6 +10946,10 @@
           </a:solidFill>
           <a:ln/>
         </p:spPr>
+        <p:txBody>
+          <a:bodyPr/>
+          <a:p/>
+        </p:txBody>
       </p:sp>
       <p:sp>
         <p:nvSpPr>
@@ -11012,6 +11232,10 @@
           </a:solidFill>
           <a:ln/>
         </p:spPr>
+        <p:txBody>
+          <a:bodyPr/>
+          <a:p/>
+        </p:txBody>
       </p:sp>
       <p:sp>
         <p:nvSpPr>
@@ -11112,6 +11336,10 @@
           </a:solidFill>
           <a:ln/>
         </p:spPr>
+        <p:txBody>
+          <a:bodyPr/>
+          <a:p/>
+        </p:txBody>
       </p:sp>
       <p:sp>
         <p:nvSpPr>
@@ -11185,7 +11413,7 @@
                 <a:ea typeface="Calibri" pitchFamily="34" charset="-122"/>
                 <a:cs typeface="Calibri" pitchFamily="34" charset="-120"/>
               </a:rPr>
-              <a:t>Es el predictor #1 en SHAP. Si representara el cambio DESPUES de la decision de irse, seria trampa. Lo verificamos entrenando el modelo sin esta variable y comparando.</a:t>
+              <a:t>Es el predictor #1 en SHAP. Si representara el cambio DESPUES de la decision de irse, seria data leakage. Lo verificamos entrenando el modelo sin esta variable y comparando.</a:t>
             </a:r>
             <a:endParaRPr lang="en-US" sz="1100" dirty="0"/>
           </a:p>
@@ -11212,6 +11440,10 @@
           </a:solidFill>
           <a:ln/>
         </p:spPr>
+        <p:txBody>
+          <a:bodyPr/>
+          <a:p/>
+        </p:txBody>
       </p:sp>
       <p:graphicFrame>
         <p:nvGraphicFramePr>
@@ -11980,6 +12212,10 @@
           </a:solidFill>
           <a:ln/>
         </p:spPr>
+        <p:txBody>
+          <a:bodyPr/>
+          <a:p/>
+        </p:txBody>
       </p:sp>
       <p:pic>
         <p:nvPicPr>
@@ -12173,6 +12409,10 @@
           </a:solidFill>
           <a:ln/>
         </p:spPr>
+        <p:txBody>
+          <a:bodyPr/>
+          <a:p/>
+        </p:txBody>
       </p:sp>
       <p:sp>
         <p:nvSpPr>
@@ -12273,6 +12513,10 @@
           </a:solidFill>
           <a:ln/>
         </p:spPr>
+        <p:txBody>
+          <a:bodyPr/>
+          <a:p/>
+        </p:txBody>
       </p:sp>
       <p:pic>
         <p:nvPicPr>
@@ -12397,6 +12641,10 @@
           </a:solidFill>
           <a:ln/>
         </p:spPr>
+        <p:txBody>
+          <a:bodyPr/>
+          <a:p/>
+        </p:txBody>
       </p:sp>
       <p:pic>
         <p:nvPicPr>
@@ -12521,6 +12769,10 @@
           </a:solidFill>
           <a:ln/>
         </p:spPr>
+        <p:txBody>
+          <a:bodyPr/>
+          <a:p/>
+        </p:txBody>
       </p:sp>
       <p:pic>
         <p:nvPicPr>
@@ -12645,6 +12897,10 @@
           </a:solidFill>
           <a:ln/>
         </p:spPr>
+        <p:txBody>
+          <a:bodyPr/>
+          <a:p/>
+        </p:txBody>
       </p:sp>
       <p:pic>
         <p:nvPicPr>
@@ -12769,6 +13025,10 @@
           </a:solidFill>
           <a:ln/>
         </p:spPr>
+        <p:txBody>
+          <a:bodyPr/>
+          <a:p/>
+        </p:txBody>
       </p:sp>
       <p:pic>
         <p:nvPicPr>
@@ -12966,6 +13226,10 @@
           </a:solidFill>
           <a:ln/>
         </p:spPr>
+        <p:txBody>
+          <a:bodyPr/>
+          <a:p/>
+        </p:txBody>
       </p:sp>
       <p:sp>
         <p:nvSpPr>
@@ -13025,6 +13289,10 @@
           </a:solidFill>
           <a:ln/>
         </p:spPr>
+        <p:txBody>
+          <a:bodyPr/>
+          <a:p/>
+        </p:txBody>
       </p:sp>
       <p:sp>
         <p:nvSpPr>
@@ -13084,6 +13352,10 @@
           </a:solidFill>
           <a:ln/>
         </p:spPr>
+        <p:txBody>
+          <a:bodyPr/>
+          <a:p/>
+        </p:txBody>
       </p:sp>
       <p:sp>
         <p:nvSpPr>
@@ -13143,6 +13415,10 @@
           </a:solidFill>
           <a:ln/>
         </p:spPr>
+        <p:txBody>
+          <a:bodyPr/>
+          <a:p/>
+        </p:txBody>
       </p:sp>
       <p:sp>
         <p:nvSpPr>
@@ -13202,6 +13478,10 @@
           </a:solidFill>
           <a:ln/>
         </p:spPr>
+        <p:txBody>
+          <a:bodyPr/>
+          <a:p/>
+        </p:txBody>
       </p:sp>
       <p:sp>
         <p:nvSpPr>
@@ -13261,6 +13541,10 @@
           </a:solidFill>
           <a:ln/>
         </p:spPr>
+        <p:txBody>
+          <a:bodyPr/>
+          <a:p/>
+        </p:txBody>
       </p:sp>
       <p:sp>
         <p:nvSpPr>
@@ -13320,6 +13604,10 @@
           </a:solidFill>
           <a:ln/>
         </p:spPr>
+        <p:txBody>
+          <a:bodyPr/>
+          <a:p/>
+        </p:txBody>
       </p:sp>
       <p:sp>
         <p:nvSpPr>
@@ -13379,6 +13667,10 @@
           </a:solidFill>
           <a:ln/>
         </p:spPr>
+        <p:txBody>
+          <a:bodyPr/>
+          <a:p/>
+        </p:txBody>
       </p:sp>
       <p:sp>
         <p:nvSpPr>
@@ -13438,6 +13730,10 @@
           </a:solidFill>
           <a:ln/>
         </p:spPr>
+        <p:txBody>
+          <a:bodyPr/>
+          <a:p/>
+        </p:txBody>
       </p:sp>
       <p:sp>
         <p:nvSpPr>
@@ -13497,6 +13793,10 @@
           </a:solidFill>
           <a:ln/>
         </p:spPr>
+        <p:txBody>
+          <a:bodyPr/>
+          <a:p/>
+        </p:txBody>
       </p:sp>
       <p:sp>
         <p:nvSpPr>
@@ -13556,6 +13856,10 @@
           </a:solidFill>
           <a:ln/>
         </p:spPr>
+        <p:txBody>
+          <a:bodyPr/>
+          <a:p/>
+        </p:txBody>
       </p:sp>
       <p:sp>
         <p:nvSpPr>
@@ -13615,6 +13919,10 @@
           </a:solidFill>
           <a:ln/>
         </p:spPr>
+        <p:txBody>
+          <a:bodyPr/>
+          <a:p/>
+        </p:txBody>
       </p:sp>
       <p:sp>
         <p:nvSpPr>
@@ -13997,6 +14305,10 @@
           </a:solidFill>
           <a:ln/>
         </p:spPr>
+        <p:txBody>
+          <a:bodyPr/>
+          <a:p/>
+        </p:txBody>
       </p:sp>
       <p:sp>
         <p:nvSpPr>
@@ -14244,6 +14556,10 @@
           </a:solidFill>
           <a:ln/>
         </p:spPr>
+        <p:txBody>
+          <a:bodyPr/>
+          <a:p/>
+        </p:txBody>
       </p:sp>
       <p:sp>
         <p:nvSpPr>
@@ -14344,6 +14660,10 @@
           </a:solidFill>
           <a:ln/>
         </p:spPr>
+        <p:txBody>
+          <a:bodyPr/>
+          <a:p/>
+        </p:txBody>
       </p:sp>
       <p:pic>
         <p:nvPicPr>
@@ -14441,7 +14761,7 @@
                 <a:ea typeface="Calibri" pitchFamily="34" charset="-122"/>
                 <a:cs typeface="Calibri" pitchFamily="34" charset="-120"/>
               </a:rPr>
-              <a:t>Limpieza de trampas, feature engineering, encoding, split 70/15/15</a:t>
+              <a:t>Limpieza de peculiaridades, feature engineering, encoding, split 70/15/15</a:t>
             </a:r>
             <a:endParaRPr lang="en-US" sz="1000" dirty="0"/>
           </a:p>
@@ -14468,6 +14788,10 @@
           </a:solidFill>
           <a:ln/>
         </p:spPr>
+        <p:txBody>
+          <a:bodyPr/>
+          <a:p/>
+        </p:txBody>
       </p:sp>
       <p:sp>
         <p:nvSpPr>
@@ -14553,6 +14877,10 @@
           </a:solidFill>
           <a:ln/>
         </p:spPr>
+        <p:txBody>
+          <a:bodyPr/>
+          <a:p/>
+        </p:txBody>
       </p:sp>
       <p:pic>
         <p:nvPicPr>
@@ -14677,6 +15005,10 @@
           </a:solidFill>
           <a:ln/>
         </p:spPr>
+        <p:txBody>
+          <a:bodyPr/>
+          <a:p/>
+        </p:txBody>
       </p:sp>
       <p:sp>
         <p:nvSpPr>
@@ -14762,6 +15094,10 @@
           </a:solidFill>
           <a:ln/>
         </p:spPr>
+        <p:txBody>
+          <a:bodyPr/>
+          <a:p/>
+        </p:txBody>
       </p:sp>
       <p:pic>
         <p:nvPicPr>
@@ -14886,6 +15222,10 @@
           </a:solidFill>
           <a:ln/>
         </p:spPr>
+        <p:txBody>
+          <a:bodyPr/>
+          <a:p/>
+        </p:txBody>
       </p:sp>
       <p:sp>
         <p:nvSpPr>
@@ -14947,6 +15287,10 @@
           </a:solidFill>
           <a:ln/>
         </p:spPr>
+        <p:txBody>
+          <a:bodyPr/>
+          <a:p/>
+        </p:txBody>
       </p:sp>
       <p:sp>
         <p:nvSpPr>
@@ -16894,6 +17238,10 @@
           </a:solidFill>
           <a:ln/>
         </p:spPr>
+        <p:txBody>
+          <a:bodyPr/>
+          <a:p/>
+        </p:txBody>
       </p:sp>
       <p:sp>
         <p:nvSpPr>
@@ -17907,7 +18255,7 @@
                 </a:solidFill>
                 <a:latin typeface="Calibri"/>
               </a:rPr>
-              <a:t>EDA profundo + 13 trampas detectadas</a:t>
+              <a:t>EDA profundo + 13 peculiaridades detectadas</a:t>
             </a:r>
           </a:p>
         </p:txBody>
@@ -18041,6 +18389,10 @@
           </a:solidFill>
           <a:ln/>
         </p:spPr>
+        <p:txBody>
+          <a:bodyPr/>
+          <a:p/>
+        </p:txBody>
       </p:sp>
       <p:sp>
         <p:nvSpPr>
@@ -18114,7 +18466,7 @@
                 <a:ea typeface="Calibri" pitchFamily="34" charset="-122"/>
                 <a:cs typeface="Calibri" pitchFamily="34" charset="-120"/>
               </a:rPr>
-              <a:t>Tomas Montero  |  ma2montero@gmail.com</a:t>
+              <a:t>Miguel Ángel Montero  |  ma2montero@gmail.com</a:t>
             </a:r>
             <a:endParaRPr lang="en-US" sz="1400" dirty="0"/>
           </a:p>
@@ -18249,6 +18601,10 @@
           </a:solidFill>
           <a:ln/>
         </p:spPr>
+        <p:txBody>
+          <a:bodyPr/>
+          <a:p/>
+        </p:txBody>
       </p:sp>
       <p:sp>
         <p:nvSpPr>
@@ -18496,6 +18852,10 @@
           </a:solidFill>
           <a:ln/>
         </p:spPr>
+        <p:txBody>
+          <a:bodyPr/>
+          <a:p/>
+        </p:txBody>
       </p:sp>
       <p:sp>
         <p:nvSpPr>
@@ -18690,6 +19050,10 @@
           </a:solidFill>
           <a:ln/>
         </p:spPr>
+        <p:txBody>
+          <a:bodyPr/>
+          <a:p/>
+        </p:txBody>
       </p:sp>
       <p:sp>
         <p:nvSpPr>
@@ -18710,6 +19074,10 @@
           </a:solidFill>
           <a:ln/>
         </p:spPr>
+        <p:txBody>
+          <a:bodyPr/>
+          <a:p/>
+        </p:txBody>
       </p:sp>
       <p:sp>
         <p:nvSpPr>
@@ -18810,6 +19178,10 @@
           </a:solidFill>
           <a:ln/>
         </p:spPr>
+        <p:txBody>
+          <a:bodyPr/>
+          <a:p/>
+        </p:txBody>
       </p:sp>
       <p:sp>
         <p:nvSpPr>
@@ -18830,6 +19202,10 @@
           </a:solidFill>
           <a:ln/>
         </p:spPr>
+        <p:txBody>
+          <a:bodyPr/>
+          <a:p/>
+        </p:txBody>
       </p:sp>
       <p:sp>
         <p:nvSpPr>
@@ -18930,6 +19306,10 @@
           </a:solidFill>
           <a:ln/>
         </p:spPr>
+        <p:txBody>
+          <a:bodyPr/>
+          <a:p/>
+        </p:txBody>
       </p:sp>
       <p:sp>
         <p:nvSpPr>
@@ -18950,6 +19330,10 @@
           </a:solidFill>
           <a:ln/>
         </p:spPr>
+        <p:txBody>
+          <a:bodyPr/>
+          <a:p/>
+        </p:txBody>
       </p:sp>
       <p:sp>
         <p:nvSpPr>
@@ -19119,6 +19503,10 @@
           </a:solidFill>
           <a:ln/>
         </p:spPr>
+        <p:txBody>
+          <a:bodyPr/>
+          <a:p/>
+        </p:txBody>
       </p:sp>
       <p:sp>
         <p:nvSpPr>
@@ -19192,7 +19580,7 @@
                 <a:ea typeface="Calibri" pitchFamily="34" charset="-122"/>
                 <a:cs typeface="Calibri" pitchFamily="34" charset="-120"/>
               </a:rPr>
-              <a:t>Hallazgos clave, trampas y feature engineering</a:t>
+              <a:t>Hallazgos clave, peculiaridades y feature engineering</a:t>
             </a:r>
             <a:endParaRPr lang="en-US" sz="1500" dirty="0"/>
           </a:p>
@@ -19366,6 +19754,10 @@
           </a:solidFill>
           <a:ln/>
         </p:spPr>
+        <p:txBody>
+          <a:bodyPr/>
+          <a:p/>
+        </p:txBody>
       </p:sp>
       <p:sp>
         <p:nvSpPr>
@@ -19466,6 +19858,10 @@
           </a:solidFill>
           <a:ln/>
         </p:spPr>
+        <p:txBody>
+          <a:bodyPr/>
+          <a:p/>
+        </p:txBody>
       </p:sp>
       <p:pic>
         <p:nvPicPr>
@@ -19590,6 +19986,10 @@
           </a:solidFill>
           <a:ln/>
         </p:spPr>
+        <p:txBody>
+          <a:bodyPr/>
+          <a:p/>
+        </p:txBody>
       </p:sp>
       <p:pic>
         <p:nvPicPr>
@@ -19714,6 +20114,10 @@
           </a:solidFill>
           <a:ln/>
         </p:spPr>
+        <p:txBody>
+          <a:bodyPr/>
+          <a:p/>
+        </p:txBody>
       </p:sp>
       <p:pic>
         <p:nvPicPr>
@@ -19838,6 +20242,10 @@
           </a:solidFill>
           <a:ln/>
         </p:spPr>
+        <p:txBody>
+          <a:bodyPr/>
+          <a:p/>
+        </p:txBody>
       </p:sp>
       <p:pic>
         <p:nvPicPr>
@@ -20006,7 +20414,7 @@
                 <a:ea typeface="Calibri" pitchFamily="34" charset="-122"/>
                 <a:cs typeface="Calibri" pitchFamily="34" charset="-120"/>
               </a:rPr>
-              <a:t>Trampas Detectadas en el Dataset</a:t>
+              <a:t>Peculiaridades Detectadas en el Dataset</a:t>
             </a:r>
             <a:endParaRPr lang="en-US" sz="2400" dirty="0"/>
           </a:p>
@@ -20031,6 +20439,10 @@
           </a:solidFill>
           <a:ln/>
         </p:spPr>
+        <p:txBody>
+          <a:bodyPr/>
+          <a:p/>
+        </p:txBody>
       </p:sp>
       <p:sp>
         <p:nvSpPr>
@@ -20131,6 +20543,10 @@
           </a:solidFill>
           <a:ln/>
         </p:spPr>
+        <p:txBody>
+          <a:bodyPr/>
+          <a:p/>
+        </p:txBody>
       </p:sp>
       <p:sp>
         <p:nvSpPr>
@@ -20151,6 +20567,10 @@
           </a:solidFill>
           <a:ln/>
         </p:spPr>
+        <p:txBody>
+          <a:bodyPr/>
+          <a:p/>
+        </p:txBody>
       </p:sp>
       <p:sp>
         <p:nvSpPr>
@@ -20173,6 +20593,10 @@
           </a:solidFill>
           <a:ln/>
         </p:spPr>
+        <p:txBody>
+          <a:bodyPr/>
+          <a:p/>
+        </p:txBody>
       </p:sp>
       <p:sp>
         <p:nvSpPr>
@@ -20312,6 +20736,10 @@
           </a:solidFill>
           <a:ln/>
         </p:spPr>
+        <p:txBody>
+          <a:bodyPr/>
+          <a:p/>
+        </p:txBody>
       </p:sp>
       <p:sp>
         <p:nvSpPr>
@@ -20332,6 +20760,10 @@
           </a:solidFill>
           <a:ln/>
         </p:spPr>
+        <p:txBody>
+          <a:bodyPr/>
+          <a:p/>
+        </p:txBody>
       </p:sp>
       <p:sp>
         <p:nvSpPr>
@@ -20354,6 +20786,10 @@
           </a:solidFill>
           <a:ln/>
         </p:spPr>
+        <p:txBody>
+          <a:bodyPr/>
+          <a:p/>
+        </p:txBody>
       </p:sp>
       <p:sp>
         <p:nvSpPr>
@@ -20493,6 +20929,10 @@
           </a:solidFill>
           <a:ln/>
         </p:spPr>
+        <p:txBody>
+          <a:bodyPr/>
+          <a:p/>
+        </p:txBody>
       </p:sp>
       <p:sp>
         <p:nvSpPr>
@@ -20513,6 +20953,10 @@
           </a:solidFill>
           <a:ln/>
         </p:spPr>
+        <p:txBody>
+          <a:bodyPr/>
+          <a:p/>
+        </p:txBody>
       </p:sp>
       <p:sp>
         <p:nvSpPr>
@@ -20535,6 +20979,10 @@
           </a:solidFill>
           <a:ln/>
         </p:spPr>
+        <p:txBody>
+          <a:bodyPr/>
+          <a:p/>
+        </p:txBody>
       </p:sp>
       <p:sp>
         <p:nvSpPr>
@@ -20674,6 +21122,10 @@
           </a:solidFill>
           <a:ln/>
         </p:spPr>
+        <p:txBody>
+          <a:bodyPr/>
+          <a:p/>
+        </p:txBody>
       </p:sp>
       <p:sp>
         <p:nvSpPr>
@@ -20694,6 +21146,10 @@
           </a:solidFill>
           <a:ln/>
         </p:spPr>
+        <p:txBody>
+          <a:bodyPr/>
+          <a:p/>
+        </p:txBody>
       </p:sp>
       <p:sp>
         <p:nvSpPr>
@@ -20716,6 +21172,10 @@
           </a:solidFill>
           <a:ln/>
         </p:spPr>
+        <p:txBody>
+          <a:bodyPr/>
+          <a:p/>
+        </p:txBody>
       </p:sp>
       <p:sp>
         <p:nvSpPr>
@@ -20855,6 +21315,10 @@
           </a:solidFill>
           <a:ln/>
         </p:spPr>
+        <p:txBody>
+          <a:bodyPr/>
+          <a:p/>
+        </p:txBody>
       </p:sp>
       <p:sp>
         <p:nvSpPr>
@@ -20875,6 +21339,10 @@
           </a:solidFill>
           <a:ln/>
         </p:spPr>
+        <p:txBody>
+          <a:bodyPr/>
+          <a:p/>
+        </p:txBody>
       </p:sp>
       <p:sp>
         <p:nvSpPr>
@@ -20897,6 +21365,10 @@
           </a:solidFill>
           <a:ln/>
         </p:spPr>
+        <p:txBody>
+          <a:bodyPr/>
+          <a:p/>
+        </p:txBody>
       </p:sp>
       <p:sp>
         <p:nvSpPr>
@@ -21105,6 +21577,10 @@
           </a:solidFill>
           <a:ln/>
         </p:spPr>
+        <p:txBody>
+          <a:bodyPr/>
+          <a:p/>
+        </p:txBody>
       </p:sp>
       <p:sp>
         <p:nvSpPr>
@@ -21203,6 +21679,10 @@
           </a:solidFill>
           <a:ln/>
         </p:spPr>
+        <p:txBody>
+          <a:bodyPr/>
+          <a:p/>
+        </p:txBody>
       </p:sp>
       <p:sp>
         <p:nvSpPr>
@@ -21340,6 +21820,10 @@
           </a:solidFill>
           <a:ln/>
         </p:spPr>
+        <p:txBody>
+          <a:bodyPr/>
+          <a:p/>
+        </p:txBody>
       </p:sp>
       <p:sp>
         <p:nvSpPr>
@@ -21477,6 +21961,10 @@
           </a:solidFill>
           <a:ln/>
         </p:spPr>
+        <p:txBody>
+          <a:bodyPr/>
+          <a:p/>
+        </p:txBody>
       </p:sp>
       <p:sp>
         <p:nvSpPr>
@@ -21614,6 +22102,10 @@
           </a:solidFill>
           <a:ln/>
         </p:spPr>
+        <p:txBody>
+          <a:bodyPr/>
+          <a:p/>
+        </p:txBody>
       </p:sp>
       <p:sp>
         <p:nvSpPr>
@@ -21751,6 +22243,10 @@
           </a:solidFill>
           <a:ln/>
         </p:spPr>
+        <p:txBody>
+          <a:bodyPr/>
+          <a:p/>
+        </p:txBody>
       </p:sp>
       <p:sp>
         <p:nvSpPr>
@@ -21888,6 +22384,10 @@
           </a:solidFill>
           <a:ln/>
         </p:spPr>
+        <p:txBody>
+          <a:bodyPr/>
+          <a:p/>
+        </p:txBody>
       </p:sp>
       <p:sp>
         <p:nvSpPr>
@@ -22025,6 +22525,10 @@
           </a:solidFill>
           <a:ln/>
         </p:spPr>
+        <p:txBody>
+          <a:bodyPr/>
+          <a:p/>
+        </p:txBody>
       </p:sp>
       <p:sp>
         <p:nvSpPr>
@@ -22162,6 +22666,10 @@
           </a:solidFill>
           <a:ln/>
         </p:spPr>
+        <p:txBody>
+          <a:bodyPr/>
+          <a:p/>
+        </p:txBody>
       </p:sp>
       <p:sp>
         <p:nvSpPr>
@@ -22299,6 +22807,10 @@
           </a:solidFill>
           <a:ln/>
         </p:spPr>
+        <p:txBody>
+          <a:bodyPr/>
+          <a:p/>
+        </p:txBody>
       </p:sp>
       <p:sp>
         <p:nvSpPr>
@@ -22546,6 +23058,10 @@
           </a:solidFill>
           <a:ln/>
         </p:spPr>
+        <p:txBody>
+          <a:bodyPr/>
+          <a:p/>
+        </p:txBody>
       </p:sp>
       <p:sp>
         <p:nvSpPr>

--- a/Presentacion_Churn_SDG.pptx
+++ b/Presentacion_Churn_SDG.pptx
@@ -842,7 +842,7 @@
         <a:lstStyle/>
         <a:p>
           <a:pPr>
-            <a:defRPr sz="1000">      </a:defRPr>
+            <a:defRPr sz="1000"/>
           </a:pPr>
           <a:endParaRPr lang="en-US"/>
         </a:p>
@@ -4504,7 +4504,7 @@
       </p:sp>
       <p:pic>
         <p:nvPicPr>
-          <p:cNvPr id="11" name="Image 0" descr="preencoded.png">    </p:cNvPr>
+          <p:cNvPr id="11" name="Image 0" descr="preencoded.png"/>
           <p:cNvPicPr>
             <a:picLocks noChangeAspect="1"/>
           </p:cNvPicPr>
@@ -4695,7 +4695,7 @@
       </p:sp>
       <p:pic>
         <p:nvPicPr>
-          <p:cNvPr id="17" name="Image 1" descr="preencoded.png">    </p:cNvPr>
+          <p:cNvPr id="17" name="Image 1" descr="preencoded.png"/>
           <p:cNvPicPr>
             <a:picLocks noChangeAspect="1"/>
           </p:cNvPicPr>
@@ -4886,7 +4886,7 @@
       </p:sp>
       <p:pic>
         <p:nvPicPr>
-          <p:cNvPr id="23" name="Image 2" descr="preencoded.png">    </p:cNvPr>
+          <p:cNvPr id="23" name="Image 2" descr="preencoded.png"/>
           <p:cNvPicPr>
             <a:picLocks noChangeAspect="1"/>
           </p:cNvPicPr>
@@ -5077,7 +5077,7 @@
       </p:sp>
       <p:pic>
         <p:nvPicPr>
-          <p:cNvPr id="29" name="Image 3" descr="preencoded.png">    </p:cNvPr>
+          <p:cNvPr id="29" name="Image 3" descr="preencoded.png"/>
           <p:cNvPicPr>
             <a:picLocks noChangeAspect="1"/>
           </p:cNvPicPr>
@@ -12219,7 +12219,7 @@
       </p:sp>
       <p:pic>
         <p:nvPicPr>
-          <p:cNvPr id="12" name="Image 0" descr="preencoded.png">    </p:cNvPr>
+          <p:cNvPr id="12" name="Image 0" descr="preencoded.png"/>
           <p:cNvPicPr>
             <a:picLocks noChangeAspect="1"/>
           </p:cNvPicPr>
@@ -12520,7 +12520,7 @@
       </p:sp>
       <p:pic>
         <p:nvPicPr>
-          <p:cNvPr id="7" name="Image 0" descr="preencoded.png">    </p:cNvPr>
+          <p:cNvPr id="7" name="Image 0" descr="preencoded.png"/>
           <p:cNvPicPr>
             <a:picLocks noChangeAspect="1"/>
           </p:cNvPicPr>
@@ -12648,7 +12648,7 @@
       </p:sp>
       <p:pic>
         <p:nvPicPr>
-          <p:cNvPr id="11" name="Image 1" descr="preencoded.png">    </p:cNvPr>
+          <p:cNvPr id="11" name="Image 1" descr="preencoded.png"/>
           <p:cNvPicPr>
             <a:picLocks noChangeAspect="1"/>
           </p:cNvPicPr>
@@ -12776,7 +12776,7 @@
       </p:sp>
       <p:pic>
         <p:nvPicPr>
-          <p:cNvPr id="15" name="Image 2" descr="preencoded.png">    </p:cNvPr>
+          <p:cNvPr id="15" name="Image 2" descr="preencoded.png"/>
           <p:cNvPicPr>
             <a:picLocks noChangeAspect="1"/>
           </p:cNvPicPr>
@@ -12904,7 +12904,7 @@
       </p:sp>
       <p:pic>
         <p:nvPicPr>
-          <p:cNvPr id="19" name="Image 3" descr="preencoded.png">    </p:cNvPr>
+          <p:cNvPr id="19" name="Image 3" descr="preencoded.png"/>
           <p:cNvPicPr>
             <a:picLocks noChangeAspect="1"/>
           </p:cNvPicPr>
@@ -13032,7 +13032,7 @@
       </p:sp>
       <p:pic>
         <p:nvPicPr>
-          <p:cNvPr id="23" name="Image 4" descr="preencoded.png">    </p:cNvPr>
+          <p:cNvPr id="23" name="Image 4" descr="preencoded.png"/>
           <p:cNvPicPr>
             <a:picLocks noChangeAspect="1"/>
           </p:cNvPicPr>
@@ -14667,7 +14667,7 @@
       </p:sp>
       <p:pic>
         <p:nvPicPr>
-          <p:cNvPr id="7" name="Image 0" descr="preencoded.png">    </p:cNvPr>
+          <p:cNvPr id="7" name="Image 0" descr="preencoded.png"/>
           <p:cNvPicPr>
             <a:picLocks noChangeAspect="1"/>
           </p:cNvPicPr>
@@ -14834,7 +14834,7 @@
       </p:sp>
       <p:pic>
         <p:nvPicPr>
-          <p:cNvPr id="12" name="Image 1" descr="preencoded.png">    </p:cNvPr>
+          <p:cNvPr id="12" name="Image 1" descr="preencoded.png"/>
           <p:cNvPicPr>
             <a:picLocks noChangeAspect="1"/>
           </p:cNvPicPr>
@@ -14884,7 +14884,7 @@
       </p:sp>
       <p:pic>
         <p:nvPicPr>
-          <p:cNvPr id="14" name="Image 2" descr="preencoded.png">    </p:cNvPr>
+          <p:cNvPr id="14" name="Image 2" descr="preencoded.png"/>
           <p:cNvPicPr>
             <a:picLocks noChangeAspect="1"/>
           </p:cNvPicPr>
@@ -15051,7 +15051,7 @@
       </p:sp>
       <p:pic>
         <p:nvPicPr>
-          <p:cNvPr id="19" name="Image 3" descr="preencoded.png">    </p:cNvPr>
+          <p:cNvPr id="19" name="Image 3" descr="preencoded.png"/>
           <p:cNvPicPr>
             <a:picLocks noChangeAspect="1"/>
           </p:cNvPicPr>
@@ -15101,7 +15101,7 @@
       </p:sp>
       <p:pic>
         <p:nvPicPr>
-          <p:cNvPr id="21" name="Image 4" descr="preencoded.png">    </p:cNvPr>
+          <p:cNvPr id="21" name="Image 4" descr="preencoded.png"/>
           <p:cNvPicPr>
             <a:picLocks noChangeAspect="1"/>
           </p:cNvPicPr>
@@ -15521,7 +15521,7 @@
         <p:spPr>
           <a:xfrm>
             <a:off x="457200" y="1188720"/>
-            <a:ext cx="2011680" cy="914400"/>
+            <a:ext cx="1920240" cy="914400"/>
           </a:xfrm>
           <a:prstGeom prst="roundRect">
             <a:avLst>
@@ -15554,7 +15554,7 @@
         <p:spPr>
           <a:xfrm>
             <a:off x="457200" y="1188720"/>
-            <a:ext cx="2011680" cy="54864"/>
+            <a:ext cx="1920240" cy="54864"/>
           </a:xfrm>
           <a:prstGeom prst="rect">
             <a:avLst/>
@@ -15578,7 +15578,7 @@
         <p:spPr>
           <a:xfrm>
             <a:off x="548640" y="1325880"/>
-            <a:ext cx="1828800" cy="365760"/>
+            <a:ext cx="1737360" cy="365760"/>
           </a:xfrm>
           <a:prstGeom prst="rect">
             <a:avLst/>
@@ -15617,7 +15617,7 @@
         <p:spPr>
           <a:xfrm>
             <a:off x="548640" y="1691640"/>
-            <a:ext cx="1828800" cy="320040"/>
+            <a:ext cx="1737360" cy="320040"/>
           </a:xfrm>
           <a:prstGeom prst="rect">
             <a:avLst/>
@@ -15655,8 +15655,8 @@
         </p:nvSpPr>
         <p:spPr>
           <a:xfrm>
-            <a:off x="2743200" y="1188720"/>
-            <a:ext cx="2011680" cy="914400"/>
+            <a:off x="2560320" y="1188720"/>
+            <a:ext cx="1920240" cy="914400"/>
           </a:xfrm>
           <a:prstGeom prst="roundRect">
             <a:avLst>
@@ -15688,8 +15688,8 @@
         </p:nvSpPr>
         <p:spPr>
           <a:xfrm>
-            <a:off x="2743200" y="1188720"/>
-            <a:ext cx="2011680" cy="54864"/>
+            <a:off x="2560320" y="1188720"/>
+            <a:ext cx="1920240" cy="54864"/>
           </a:xfrm>
           <a:prstGeom prst="rect">
             <a:avLst/>
@@ -15712,8 +15712,8 @@
         </p:nvSpPr>
         <p:spPr>
           <a:xfrm>
-            <a:off x="2834640" y="1325880"/>
-            <a:ext cx="1828800" cy="365760"/>
+            <a:off x="2651760" y="1325880"/>
+            <a:ext cx="1737360" cy="365760"/>
           </a:xfrm>
           <a:prstGeom prst="rect">
             <a:avLst/>
@@ -15751,8 +15751,8 @@
         </p:nvSpPr>
         <p:spPr>
           <a:xfrm>
-            <a:off x="2834640" y="1691640"/>
-            <a:ext cx="1828800" cy="320040"/>
+            <a:off x="2651760" y="1691640"/>
+            <a:ext cx="1737360" cy="320040"/>
           </a:xfrm>
           <a:prstGeom prst="rect">
             <a:avLst/>
@@ -15790,8 +15790,8 @@
         </p:nvSpPr>
         <p:spPr>
           <a:xfrm>
-            <a:off x="5029200" y="1188720"/>
-            <a:ext cx="2011680" cy="914400"/>
+            <a:off x="4663440" y="1188720"/>
+            <a:ext cx="1920240" cy="914400"/>
           </a:xfrm>
           <a:prstGeom prst="roundRect">
             <a:avLst>
@@ -15823,8 +15823,8 @@
         </p:nvSpPr>
         <p:spPr>
           <a:xfrm>
-            <a:off x="5029200" y="1188720"/>
-            <a:ext cx="2011680" cy="54864"/>
+            <a:off x="4663440" y="1188720"/>
+            <a:ext cx="1920240" cy="54864"/>
           </a:xfrm>
           <a:prstGeom prst="rect">
             <a:avLst/>
@@ -15847,8 +15847,8 @@
         </p:nvSpPr>
         <p:spPr>
           <a:xfrm>
-            <a:off x="5120640" y="1325880"/>
-            <a:ext cx="1828800" cy="365760"/>
+            <a:off x="4754880" y="1325880"/>
+            <a:ext cx="1737360" cy="365760"/>
           </a:xfrm>
           <a:prstGeom prst="rect">
             <a:avLst/>
@@ -15886,8 +15886,8 @@
         </p:nvSpPr>
         <p:spPr>
           <a:xfrm>
-            <a:off x="5120640" y="1691640"/>
-            <a:ext cx="1828800" cy="320040"/>
+            <a:off x="4754880" y="1691640"/>
+            <a:ext cx="1737360" cy="320040"/>
           </a:xfrm>
           <a:prstGeom prst="rect">
             <a:avLst/>
@@ -15925,8 +15925,8 @@
         </p:nvSpPr>
         <p:spPr>
           <a:xfrm>
-            <a:off x="7315200" y="1188720"/>
-            <a:ext cx="2011680" cy="914400"/>
+            <a:off x="6766560" y="1188720"/>
+            <a:ext cx="1920240" cy="914400"/>
           </a:xfrm>
           <a:prstGeom prst="roundRect">
             <a:avLst>
@@ -15958,8 +15958,8 @@
         </p:nvSpPr>
         <p:spPr>
           <a:xfrm>
-            <a:off x="7315200" y="1188720"/>
-            <a:ext cx="2011680" cy="54864"/>
+            <a:off x="6766560" y="1188720"/>
+            <a:ext cx="1920240" cy="54864"/>
           </a:xfrm>
           <a:prstGeom prst="rect">
             <a:avLst/>
@@ -15982,8 +15982,8 @@
         </p:nvSpPr>
         <p:spPr>
           <a:xfrm>
-            <a:off x="7406640" y="1325880"/>
-            <a:ext cx="1828800" cy="365760"/>
+            <a:off x="6858000" y="1325880"/>
+            <a:ext cx="1737360" cy="365760"/>
           </a:xfrm>
           <a:prstGeom prst="rect">
             <a:avLst/>
@@ -16021,8 +16021,8 @@
         </p:nvSpPr>
         <p:spPr>
           <a:xfrm>
-            <a:off x="7406640" y="1691640"/>
-            <a:ext cx="1828800" cy="320040"/>
+            <a:off x="6858000" y="1691640"/>
+            <a:ext cx="1737360" cy="320040"/>
           </a:xfrm>
           <a:prstGeom prst="rect">
             <a:avLst/>
@@ -17639,7 +17639,7 @@
       </p:sp>
       <p:pic>
         <p:nvPicPr>
-          <p:cNvPr id="8" name="Image 0" descr="preencoded.png">    </p:cNvPr>
+          <p:cNvPr id="8" name="Image 0" descr="preencoded.png"/>
           <p:cNvPicPr>
             <a:picLocks noChangeAspect="1"/>
           </p:cNvPicPr>
@@ -17663,7 +17663,7 @@
       </p:pic>
       <p:pic>
         <p:nvPicPr>
-          <p:cNvPr id="10" name="Image 1" descr="preencoded.png">    </p:cNvPr>
+          <p:cNvPr id="10" name="Image 1" descr="preencoded.png"/>
           <p:cNvPicPr>
             <a:picLocks noChangeAspect="1"/>
           </p:cNvPicPr>
@@ -17726,7 +17726,7 @@
       </p:sp>
       <p:pic>
         <p:nvPicPr>
-          <p:cNvPr id="12" name="Image 2" descr="preencoded.png">    </p:cNvPr>
+          <p:cNvPr id="12" name="Image 2" descr="preencoded.png"/>
           <p:cNvPicPr>
             <a:picLocks noChangeAspect="1"/>
           </p:cNvPicPr>
@@ -17789,7 +17789,7 @@
       </p:sp>
       <p:pic>
         <p:nvPicPr>
-          <p:cNvPr id="14" name="Image 3" descr="preencoded.png">    </p:cNvPr>
+          <p:cNvPr id="14" name="Image 3" descr="preencoded.png"/>
           <p:cNvPicPr>
             <a:picLocks noChangeAspect="1"/>
           </p:cNvPicPr>
@@ -17852,7 +17852,7 @@
       </p:sp>
       <p:pic>
         <p:nvPicPr>
-          <p:cNvPr id="16" name="Image 4" descr="preencoded.png">    </p:cNvPr>
+          <p:cNvPr id="16" name="Image 4" descr="preencoded.png"/>
           <p:cNvPicPr>
             <a:picLocks noChangeAspect="1"/>
           </p:cNvPicPr>
@@ -17915,7 +17915,7 @@
       </p:sp>
       <p:pic>
         <p:nvPicPr>
-          <p:cNvPr id="18" name="Image 5" descr="preencoded.png">    </p:cNvPr>
+          <p:cNvPr id="18" name="Image 5" descr="preencoded.png"/>
           <p:cNvPicPr>
             <a:picLocks noChangeAspect="1"/>
           </p:cNvPicPr>
@@ -17978,7 +17978,7 @@
       </p:sp>
       <p:pic>
         <p:nvPicPr>
-          <p:cNvPr id="20" name="Image 6" descr="preencoded.png">    </p:cNvPr>
+          <p:cNvPr id="20" name="Image 6" descr="preencoded.png"/>
           <p:cNvPicPr>
             <a:picLocks noChangeAspect="1"/>
           </p:cNvPicPr>
@@ -18203,7 +18203,7 @@
       </p:sp>
       <p:pic>
         <p:nvPicPr>
-          <p:cNvPr id="51" name="Picture 50" descr="preencoded.png">    </p:cNvPr>
+          <p:cNvPr id="51" name="Picture 50" descr="preencoded.png"/>
           <p:cNvPicPr>
             <a:picLocks noChangeAspect="1"/>
           </p:cNvPicPr>
@@ -19865,7 +19865,7 @@
       </p:sp>
       <p:pic>
         <p:nvPicPr>
-          <p:cNvPr id="7" name="Image 0" descr="preencoded.png">    </p:cNvPr>
+          <p:cNvPr id="7" name="Image 0" descr="preencoded.png"/>
           <p:cNvPicPr>
             <a:picLocks noChangeAspect="1"/>
           </p:cNvPicPr>
@@ -19993,7 +19993,7 @@
       </p:sp>
       <p:pic>
         <p:nvPicPr>
-          <p:cNvPr id="11" name="Image 1" descr="preencoded.png">    </p:cNvPr>
+          <p:cNvPr id="11" name="Image 1" descr="preencoded.png"/>
           <p:cNvPicPr>
             <a:picLocks noChangeAspect="1"/>
           </p:cNvPicPr>
@@ -20121,7 +20121,7 @@
       </p:sp>
       <p:pic>
         <p:nvPicPr>
-          <p:cNvPr id="15" name="Image 2" descr="preencoded.png">    </p:cNvPr>
+          <p:cNvPr id="15" name="Image 2" descr="preencoded.png"/>
           <p:cNvPicPr>
             <a:picLocks noChangeAspect="1"/>
           </p:cNvPicPr>
@@ -20249,7 +20249,7 @@
       </p:sp>
       <p:pic>
         <p:nvPicPr>
-          <p:cNvPr id="19" name="Image 3" descr="preencoded.png">    </p:cNvPr>
+          <p:cNvPr id="19" name="Image 3" descr="preencoded.png"/>
           <p:cNvPicPr>
             <a:picLocks noChangeAspect="1"/>
           </p:cNvPicPr>

--- a/Presentacion_Churn_SDG.pptx
+++ b/Presentacion_Churn_SDG.pptx
@@ -10,6 +10,7 @@
     <p:sldId id="258" r:id="rId4"/>
     <p:sldId id="259" r:id="rId5"/>
     <p:sldId id="260" r:id="rId6"/>
+    <p:sldId id="283" r:id="rId34"/>
     <p:sldId id="261" r:id="rId7"/>
     <p:sldId id="262" r:id="rId8"/>
     <p:sldId id="263" r:id="rId9"/>
@@ -15333,7 +15334,7 @@
                   <a:srgbClr val="4B5563"/>
                 </a:solidFill>
               </a:rPr>
-              <a:t> — cada task importa y ejecuta la funcion main() del script correspondiente. Si un paso falla, el DAG se detiene.</a:t>
+              <a:t xml:space="preserve"> — cada task importa y ejecuta la funcion main() del script correspondiente. Si un paso falla, el DAG se detiene.</a:t>
             </a:r>
             <a:endParaRPr lang="en-US" sz="1100" dirty="0"/>
           </a:p>
@@ -18508,6 +18509,981 @@
               <a:t>Copyright © SDG Group</a:t>
             </a:r>
             <a:endParaRPr lang="en-US" sz="800" dirty="0"/>
+          </a:p>
+        </p:txBody>
+      </p:sp>
+    </p:spTree>
+  </p:cSld>
+  <p:clrMapOvr>
+    <a:masterClrMapping/>
+  </p:clrMapOvr>
+</p:sld>
+</file>
+
+<file path=ppt/slides/slide28.xml><?xml version="1.0" encoding="utf-8"?>
+<p:sld xmlns:a="http://schemas.openxmlformats.org/drawingml/2006/main" xmlns:r="http://schemas.openxmlformats.org/officeDocument/2006/relationships" xmlns:p="http://schemas.openxmlformats.org/presentationml/2006/main">
+  <p:cSld name="Slide 28">
+    <p:bg>
+      <p:bgPr>
+        <a:solidFill>
+          <a:srgbClr val="FFFFFF"/>
+        </a:solidFill>
+      </p:bgPr>
+    </p:bg>
+    <p:spTree>
+      <p:nvGrpSpPr>
+        <p:cNvPr id="1" name=""/>
+        <p:cNvGrpSpPr/>
+        <p:nvPr/>
+      </p:nvGrpSpPr>
+      <p:grpSpPr>
+        <a:xfrm>
+          <a:off x="0" y="0"/>
+          <a:ext cx="0" cy="0"/>
+          <a:chOff x="0" y="0"/>
+          <a:chExt cx="0" cy="0"/>
+        </a:xfrm>
+      </p:grpSpPr>
+      <p:sp>
+        <p:nvSpPr>
+          <p:cNvPr id="2" name="Title"/>
+          <p:cNvSpPr/>
+          <p:nvPr/>
+        </p:nvSpPr>
+        <p:spPr>
+          <a:xfrm>
+            <a:off x="457200" y="182880"/>
+            <a:ext cx="6858000" cy="502920"/>
+          </a:xfrm>
+          <a:prstGeom prst="rect">
+            <a:avLst/>
+          </a:prstGeom>
+          <a:noFill/>
+          <a:ln/>
+        </p:spPr>
+        <p:txBody>
+          <a:bodyPr wrap="square" lIns="0" tIns="0" rIns="0" bIns="0" rtlCol="0" anchor="ctr"/>
+          <a:lstStyle/>
+          <a:p>
+            <a:pPr indent="0" marL="0">
+              <a:buNone/>
+            </a:pPr>
+            <a:r>
+              <a:rPr lang="en-US" sz="2400" b="1" dirty="0">
+                <a:solidFill>
+                  <a:srgbClr val="1B2A4A"/>
+                </a:solidFill>
+                <a:latin typeface="Calibri" pitchFamily="34" charset="0"/>
+              </a:rPr>
+              <a:t>Radiografia del Dataset</a:t>
+            </a:r>
+          </a:p>
+        </p:txBody>
+      </p:sp>
+      <p:sp>
+        <p:nvSpPr>
+          <p:cNvPr id="3" name="AccentBar"/>
+          <p:cNvSpPr/>
+          <p:nvPr/>
+        </p:nvSpPr>
+        <p:spPr>
+          <a:xfrm>
+            <a:off x="457200" y="731520"/>
+            <a:ext cx="1097280" cy="36576"/>
+          </a:xfrm>
+          <a:prstGeom prst="rect">
+            <a:avLst/>
+          </a:prstGeom>
+          <a:solidFill>
+            <a:srgbClr val="0078D4"/>
+          </a:solidFill>
+          <a:ln/>
+        </p:spPr>
+        <p:txBody>
+          <a:bodyPr/>
+          <a:p/>
+        </p:txBody>
+      </p:sp>
+      <p:sp>
+        <p:nvSpPr>
+          <p:cNvPr id="4" name="SDG"/>
+          <p:cNvSpPr/>
+          <p:nvPr/>
+        </p:nvSpPr>
+        <p:spPr>
+          <a:xfrm>
+            <a:off x="7315200" y="137160"/>
+            <a:ext cx="1554480" cy="365760"/>
+          </a:xfrm>
+          <a:prstGeom prst="rect">
+            <a:avLst/>
+          </a:prstGeom>
+          <a:noFill/>
+          <a:ln/>
+        </p:spPr>
+        <p:txBody>
+          <a:bodyPr wrap="square" rtlCol="0" anchor="ctr"/>
+          <a:lstStyle/>
+          <a:p>
+            <a:pPr algn="r" indent="0" marL="0">
+              <a:buNone/>
+            </a:pPr>
+            <a:r>
+              <a:rPr lang="en-US" sz="1400" b="1" dirty="0">
+                <a:solidFill>
+                  <a:srgbClr val="0078D4"/>
+                </a:solidFill>
+                <a:latin typeface="Calibri" pitchFamily="34" charset="0"/>
+              </a:rPr>
+              <a:t>sdg group</a:t>
+            </a:r>
+          </a:p>
+        </p:txBody>
+      </p:sp>
+      <p:sp>
+        <p:nvSpPr>
+          <p:cNvPr id="5" name="Copyright"/>
+          <p:cNvSpPr/>
+          <p:nvPr/>
+        </p:nvSpPr>
+        <p:spPr>
+          <a:xfrm>
+            <a:off x="274320" y="4709160"/>
+            <a:ext cx="2743200" cy="365760"/>
+          </a:xfrm>
+          <a:prstGeom prst="rect">
+            <a:avLst/>
+          </a:prstGeom>
+          <a:noFill/>
+          <a:ln/>
+        </p:spPr>
+        <p:txBody>
+          <a:bodyPr wrap="square" rtlCol="0" anchor="ctr"/>
+          <a:lstStyle/>
+          <a:p>
+            <a:pPr indent="0" marL="0">
+              <a:buNone/>
+            </a:pPr>
+            <a:r>
+              <a:rPr lang="en-US" sz="800" dirty="0">
+                <a:solidFill>
+                  <a:srgbClr val="9CA3AF"/>
+                </a:solidFill>
+                <a:latin typeface="Calibri" pitchFamily="34" charset="0"/>
+              </a:rPr>
+              <a:t>Copyright © SDG Group</a:t>
+            </a:r>
+          </a:p>
+        </p:txBody>
+      </p:sp>
+      <p:sp>
+        <p:nvSpPr>
+          <p:cNvPr id="10" name="S1Bg"/>
+          <p:cNvSpPr/>
+          <p:nvPr/>
+        </p:nvSpPr>
+        <p:spPr>
+          <a:xfrm>
+            <a:off x="457200" y="914400"/>
+            <a:ext cx="2560320" cy="731520"/>
+          </a:xfrm>
+          <a:prstGeom prst="roundRect">
+            <a:avLst>
+              <a:gd name="adj" fmla="val 8000"/>
+            </a:avLst>
+          </a:prstGeom>
+          <a:solidFill>
+            <a:srgbClr val="EBF5FB"/>
+          </a:solidFill>
+          <a:ln>
+            <a:noFill/>
+          </a:ln>
+        </p:spPr>
+        <p:txBody>
+          <a:bodyPr/>
+          <a:p/>
+        </p:txBody>
+      </p:sp>
+      <p:sp>
+        <p:nvSpPr>
+          <p:cNvPr id="11" name="S1Num"/>
+          <p:cNvSpPr/>
+          <p:nvPr/>
+        </p:nvSpPr>
+        <p:spPr>
+          <a:xfrm>
+            <a:off x="457200" y="937260"/>
+            <a:ext cx="2560320" cy="411480"/>
+          </a:xfrm>
+          <a:prstGeom prst="rect">
+            <a:avLst/>
+          </a:prstGeom>
+          <a:noFill/>
+          <a:ln/>
+        </p:spPr>
+        <p:txBody>
+          <a:bodyPr wrap="square" lIns="0" tIns="0" rIns="0" bIns="0" rtlCol="0" anchor="b"/>
+          <a:lstStyle/>
+          <a:p>
+            <a:pPr algn="ctr" indent="0" marL="0">
+              <a:buNone/>
+            </a:pPr>
+            <a:r>
+              <a:rPr lang="en-US" sz="2800" b="1" dirty="0">
+                <a:solidFill>
+                  <a:srgbClr val="0078D4"/>
+                </a:solidFill>
+                <a:latin typeface="Calibri" pitchFamily="34" charset="0"/>
+              </a:rPr>
+              <a:t>100K x 100</a:t>
+            </a:r>
+          </a:p>
+        </p:txBody>
+      </p:sp>
+      <p:sp>
+        <p:nvSpPr>
+          <p:cNvPr id="12" name="S1Lbl"/>
+          <p:cNvSpPr/>
+          <p:nvPr/>
+        </p:nvSpPr>
+        <p:spPr>
+          <a:xfrm>
+            <a:off x="457200" y="1348740"/>
+            <a:ext cx="2560320" cy="274320"/>
+          </a:xfrm>
+          <a:prstGeom prst="rect">
+            <a:avLst/>
+          </a:prstGeom>
+          <a:noFill/>
+          <a:ln/>
+        </p:spPr>
+        <p:txBody>
+          <a:bodyPr wrap="square" lIns="0" tIns="0" rIns="0" bIns="0" rtlCol="0" anchor="t"/>
+          <a:lstStyle/>
+          <a:p>
+            <a:pPr algn="ctr" indent="0" marL="0">
+              <a:buNone/>
+            </a:pPr>
+            <a:r>
+              <a:rPr lang="en-US" sz="1100" dirty="0">
+                <a:solidFill>
+                  <a:srgbClr val="4B5563"/>
+                </a:solidFill>
+                <a:latin typeface="Calibri" pitchFamily="34" charset="0"/>
+              </a:rPr>
+              <a:t>69 float + 10 int + 21 categoricas</a:t>
+            </a:r>
+          </a:p>
+        </p:txBody>
+      </p:sp>
+      <p:sp>
+        <p:nvSpPr>
+          <p:cNvPr id="13" name="S2Bg"/>
+          <p:cNvSpPr/>
+          <p:nvPr/>
+        </p:nvSpPr>
+        <p:spPr>
+          <a:xfrm>
+            <a:off x="3291840" y="914400"/>
+            <a:ext cx="2560320" cy="731520"/>
+          </a:xfrm>
+          <a:prstGeom prst="roundRect">
+            <a:avLst>
+              <a:gd name="adj" fmla="val 8000"/>
+            </a:avLst>
+          </a:prstGeom>
+          <a:solidFill>
+            <a:srgbClr val="FEF3C7"/>
+          </a:solidFill>
+          <a:ln>
+            <a:noFill/>
+          </a:ln>
+        </p:spPr>
+        <p:txBody>
+          <a:bodyPr/>
+          <a:p/>
+        </p:txBody>
+      </p:sp>
+      <p:sp>
+        <p:nvSpPr>
+          <p:cNvPr id="14" name="S2Num"/>
+          <p:cNvSpPr/>
+          <p:nvPr/>
+        </p:nvSpPr>
+        <p:spPr>
+          <a:xfrm>
+            <a:off x="3291840" y="937260"/>
+            <a:ext cx="2560320" cy="411480"/>
+          </a:xfrm>
+          <a:prstGeom prst="rect">
+            <a:avLst/>
+          </a:prstGeom>
+          <a:noFill/>
+          <a:ln/>
+        </p:spPr>
+        <p:txBody>
+          <a:bodyPr wrap="square" lIns="0" tIns="0" rIns="0" bIns="0" rtlCol="0" anchor="b"/>
+          <a:lstStyle/>
+          <a:p>
+            <a:pPr algn="ctr" indent="0" marL="0">
+              <a:buNone/>
+            </a:pPr>
+            <a:r>
+              <a:rPr lang="en-US" sz="2800" b="1" dirty="0">
+                <a:solidFill>
+                  <a:srgbClr val="D97706"/>
+                </a:solidFill>
+                <a:latin typeface="Calibri" pitchFamily="34" charset="0"/>
+              </a:rPr>
+              <a:t>43 cols con nulos</a:t>
+            </a:r>
+          </a:p>
+        </p:txBody>
+      </p:sp>
+      <p:sp>
+        <p:nvSpPr>
+          <p:cNvPr id="15" name="S2Lbl"/>
+          <p:cNvSpPr/>
+          <p:nvPr/>
+        </p:nvSpPr>
+        <p:spPr>
+          <a:xfrm>
+            <a:off x="3291840" y="1348740"/>
+            <a:ext cx="2560320" cy="274320"/>
+          </a:xfrm>
+          <a:prstGeom prst="rect">
+            <a:avLst/>
+          </a:prstGeom>
+          <a:noFill/>
+          <a:ln/>
+        </p:spPr>
+        <p:txBody>
+          <a:bodyPr wrap="square" lIns="0" tIns="0" rIns="0" bIns="0" rtlCol="0" anchor="t"/>
+          <a:lstStyle/>
+          <a:p>
+            <a:pPr algn="ctr" indent="0" marL="0">
+              <a:buNone/>
+            </a:pPr>
+            <a:r>
+              <a:rPr lang="en-US" sz="1100" dirty="0">
+                <a:solidFill>
+                  <a:srgbClr val="4B5563"/>
+                </a:solidFill>
+                <a:latin typeface="Calibri" pitchFamily="34" charset="0"/>
+              </a:rPr>
+              <a:t>Hasta 49% missing + nulos ocultos (U, Z)</a:t>
+            </a:r>
+          </a:p>
+        </p:txBody>
+      </p:sp>
+      <p:sp>
+        <p:nvSpPr>
+          <p:cNvPr id="16" name="S3Bg"/>
+          <p:cNvSpPr/>
+          <p:nvPr/>
+        </p:nvSpPr>
+        <p:spPr>
+          <a:xfrm>
+            <a:off x="6126480" y="914400"/>
+            <a:ext cx="2560320" cy="731520"/>
+          </a:xfrm>
+          <a:prstGeom prst="roundRect">
+            <a:avLst>
+              <a:gd name="adj" fmla="val 8000"/>
+            </a:avLst>
+          </a:prstGeom>
+          <a:solidFill>
+            <a:srgbClr val="D1FAE5"/>
+          </a:solidFill>
+          <a:ln>
+            <a:noFill/>
+          </a:ln>
+        </p:spPr>
+        <p:txBody>
+          <a:bodyPr/>
+          <a:p/>
+        </p:txBody>
+      </p:sp>
+      <p:sp>
+        <p:nvSpPr>
+          <p:cNvPr id="17" name="S3Num"/>
+          <p:cNvSpPr/>
+          <p:nvPr/>
+        </p:nvSpPr>
+        <p:spPr>
+          <a:xfrm>
+            <a:off x="6126480" y="937260"/>
+            <a:ext cx="2560320" cy="411480"/>
+          </a:xfrm>
+          <a:prstGeom prst="rect">
+            <a:avLst/>
+          </a:prstGeom>
+          <a:noFill/>
+          <a:ln/>
+        </p:spPr>
+        <p:txBody>
+          <a:bodyPr wrap="square" lIns="0" tIns="0" rIns="0" bIns="0" rtlCol="0" anchor="b"/>
+          <a:lstStyle/>
+          <a:p>
+            <a:pPr algn="ctr" indent="0" marL="0">
+              <a:buNone/>
+            </a:pPr>
+            <a:r>
+              <a:rPr lang="en-US" sz="2800" b="1" dirty="0">
+                <a:solidFill>
+                  <a:srgbClr val="059669"/>
+                </a:solidFill>
+                <a:latin typeface="Calibri" pitchFamily="34" charset="0"/>
+              </a:rPr>
+              <a:t>50.4 / 49.6%</a:t>
+            </a:r>
+          </a:p>
+        </p:txBody>
+      </p:sp>
+      <p:sp>
+        <p:nvSpPr>
+          <p:cNvPr id="18" name="S3Lbl"/>
+          <p:cNvSpPr/>
+          <p:nvPr/>
+        </p:nvSpPr>
+        <p:spPr>
+          <a:xfrm>
+            <a:off x="6126480" y="1348740"/>
+            <a:ext cx="2560320" cy="274320"/>
+          </a:xfrm>
+          <a:prstGeom prst="rect">
+            <a:avLst/>
+          </a:prstGeom>
+          <a:noFill/>
+          <a:ln/>
+        </p:spPr>
+        <p:txBody>
+          <a:bodyPr wrap="square" lIns="0" tIns="0" rIns="0" bIns="0" rtlCol="0" anchor="t"/>
+          <a:lstStyle/>
+          <a:p>
+            <a:pPr algn="ctr" indent="0" marL="0">
+              <a:buNone/>
+            </a:pPr>
+            <a:r>
+              <a:rPr lang="en-US" sz="1100" dirty="0">
+                <a:solidFill>
+                  <a:srgbClr val="4B5563"/>
+                </a:solidFill>
+                <a:latin typeface="Calibri" pitchFamily="34" charset="0"/>
+              </a:rPr>
+              <a:t>No Churn / Churn (balance artificial)</a:t>
+            </a:r>
+          </a:p>
+        </p:txBody>
+      </p:sp>
+      <p:sp>
+        <p:nvSpPr>
+          <p:cNvPr id="20" name="LBg"/>
+          <p:cNvSpPr/>
+          <p:nvPr/>
+        </p:nvSpPr>
+        <p:spPr>
+          <a:xfrm>
+            <a:off x="457200" y="1828800"/>
+            <a:ext cx="4023360" cy="2743200"/>
+          </a:xfrm>
+          <a:prstGeom prst="roundRect">
+            <a:avLst>
+              <a:gd name="adj" fmla="val 3000"/>
+            </a:avLst>
+          </a:prstGeom>
+          <a:solidFill>
+            <a:srgbClr val="F8FAFC"/>
+          </a:solidFill>
+          <a:ln w="6350">
+            <a:solidFill>
+              <a:srgbClr val="E2E8F0"/>
+            </a:solidFill>
+          </a:ln>
+        </p:spPr>
+        <p:txBody>
+          <a:bodyPr/>
+          <a:p/>
+        </p:txBody>
+      </p:sp>
+      <p:sp>
+        <p:nvSpPr>
+          <p:cNvPr id="21" name="LTitle"/>
+          <p:cNvSpPr/>
+          <p:nvPr/>
+        </p:nvSpPr>
+        <p:spPr>
+          <a:xfrm>
+            <a:off x="594360" y="1905000"/>
+            <a:ext cx="3749040" cy="320040"/>
+          </a:xfrm>
+          <a:prstGeom prst="rect">
+            <a:avLst/>
+          </a:prstGeom>
+          <a:noFill/>
+          <a:ln/>
+        </p:spPr>
+        <p:txBody>
+          <a:bodyPr wrap="square" lIns="0" tIns="0" rIns="0" bIns="0" rtlCol="0" anchor="ctr"/>
+          <a:lstStyle/>
+          <a:p>
+            <a:pPr indent="0" marL="0">
+              <a:buNone/>
+            </a:pPr>
+            <a:r>
+              <a:rPr lang="en-US" sz="1400" b="1" dirty="0">
+                <a:solidFill>
+                  <a:srgbClr val="1B2A4A"/>
+                </a:solidFill>
+                <a:latin typeface="Calibri" pitchFamily="34" charset="0"/>
+              </a:rPr>
+              <a:t>Composicion de variables</a:t>
+            </a:r>
+          </a:p>
+        </p:txBody>
+      </p:sp>
+      <p:sp>
+        <p:nvSpPr>
+          <p:cNvPr id="22" name="LContent"/>
+          <p:cNvSpPr/>
+          <p:nvPr/>
+        </p:nvSpPr>
+        <p:spPr>
+          <a:xfrm>
+            <a:off x="594360" y="2240280"/>
+            <a:ext cx="3749040" cy="2194560"/>
+          </a:xfrm>
+          <a:prstGeom prst="rect">
+            <a:avLst/>
+          </a:prstGeom>
+          <a:noFill/>
+          <a:ln/>
+        </p:spPr>
+        <p:txBody>
+          <a:bodyPr wrap="square" lIns="0" tIns="0" rIns="0" bIns="0" rtlCol="0" anchor="t"/>
+          <a:lstStyle/>
+          <a:p>
+            <a:pPr marL="228600" indent="-228600">
+              <a:buChar char="■"/>
+            </a:pPr>
+            <a:r>
+              <a:rPr lang="en-US" sz="1100" b="1" dirty="0">
+                <a:solidFill>
+                  <a:srgbClr val="0078D4"/>
+                </a:solidFill>
+                <a:latin typeface="Calibri" pitchFamily="34" charset="0"/>
+              </a:rPr>
+              <a:t>69 numericas continuas (float64)</a:t>
+            </a:r>
+          </a:p>
+          <a:p>
+            <a:pPr marL="457200" indent="0">
+              <a:buNone/>
+            </a:pPr>
+            <a:r>
+              <a:rPr lang="en-US" sz="1000" dirty="0">
+                <a:solidFill>
+                  <a:srgbClr val="6B7280"/>
+                </a:solidFill>
+                <a:latin typeface="Calibri" pitchFamily="34" charset="0"/>
+              </a:rPr>
+              <a:t>rev_Mean, mou_Mean, totmrc_Mean, change_mou...</a:t>
+            </a:r>
+          </a:p>
+          <a:p>
+            <a:pPr marL="228600" indent="-228600">
+              <a:buChar char="■"/>
+            </a:pPr>
+            <a:r>
+              <a:rPr lang="en-US" sz="1100" b="1" dirty="0">
+                <a:solidFill>
+                  <a:srgbClr val="059669"/>
+                </a:solidFill>
+                <a:latin typeface="Calibri" pitchFamily="34" charset="0"/>
+              </a:rPr>
+              <a:t>10 numericas enteras (int64)</a:t>
+            </a:r>
+          </a:p>
+          <a:p>
+            <a:pPr marL="457200" indent="0">
+              <a:buNone/>
+            </a:pPr>
+            <a:r>
+              <a:rPr lang="en-US" sz="1000" dirty="0">
+                <a:solidFill>
+                  <a:srgbClr val="6B7280"/>
+                </a:solidFill>
+                <a:latin typeface="Calibri" pitchFamily="34" charset="0"/>
+              </a:rPr>
+              <a:t>months, uniqsubs, actvsubs, eqpdays, churn...</a:t>
+            </a:r>
+          </a:p>
+          <a:p>
+            <a:pPr marL="228600" indent="-228600">
+              <a:buChar char="■"/>
+            </a:pPr>
+            <a:r>
+              <a:rPr lang="en-US" sz="1100" b="1" dirty="0">
+                <a:solidFill>
+                  <a:srgbClr val="D97706"/>
+                </a:solidFill>
+                <a:latin typeface="Calibri" pitchFamily="34" charset="0"/>
+              </a:rPr>
+              <a:t>21 categoricas (object)</a:t>
+            </a:r>
+          </a:p>
+          <a:p>
+            <a:pPr marL="457200" indent="0">
+              <a:buNone/>
+            </a:pPr>
+            <a:r>
+              <a:rPr lang="en-US" sz="1000" dirty="0">
+                <a:solidFill>
+                  <a:srgbClr val="6B7280"/>
+                </a:solidFill>
+                <a:latin typeface="Calibri" pitchFamily="34" charset="0"/>
+              </a:rPr>
+              <a:t>area (19 vals), crclscod (54 vals), ethnic, marital...</a:t>
+            </a:r>
+          </a:p>
+          <a:p>
+            <a:pPr indent="0" marL="0">
+              <a:buNone/>
+            </a:pPr>
+            <a:r>
+              <a:rPr lang="en-US" sz="500" dirty="0">
+                <a:solidFill>
+                  <a:srgbClr val="FFFFFF"/>
+                </a:solidFill>
+              </a:rPr>
+              <a:t xml:space="preserve"> </a:t>
+            </a:r>
+          </a:p>
+          <a:p>
+            <a:pPr marL="228600" indent="-228600">
+              <a:buChar char="■"/>
+            </a:pPr>
+            <a:r>
+              <a:rPr lang="en-US" sz="1100" b="1" dirty="0">
+                <a:solidFill>
+                  <a:srgbClr val="DC2626"/>
+                </a:solidFill>
+                <a:latin typeface="Calibri" pitchFamily="34" charset="0"/>
+              </a:rPr>
+              <a:t xml:space="preserve">Nulos ocultos: </a:t>
+            </a:r>
+            <a:r>
+              <a:rPr lang="en-US" sz="1100" dirty="0">
+                <a:solidFill>
+                  <a:srgbClr val="4B5563"/>
+                </a:solidFill>
+                <a:latin typeface="Calibri" pitchFamily="34" charset="0"/>
+              </a:rPr>
+              <a:t>“U” y “Z” como valores en vez de NaN</a:t>
+            </a:r>
+          </a:p>
+          <a:p>
+            <a:pPr marL="228600" indent="-228600">
+              <a:buChar char="■"/>
+            </a:pPr>
+            <a:r>
+              <a:rPr lang="en-US" sz="1100" b="1" dirty="0">
+                <a:solidFill>
+                  <a:srgbClr val="DC2626"/>
+                </a:solidFill>
+                <a:latin typeface="Calibri" pitchFamily="34" charset="0"/>
+              </a:rPr>
+              <a:t xml:space="preserve">0 duplicados </a:t>
+            </a:r>
+            <a:r>
+              <a:rPr lang="en-US" sz="1100" dirty="0">
+                <a:solidFill>
+                  <a:srgbClr val="4B5563"/>
+                </a:solidFill>
+                <a:latin typeface="Calibri" pitchFamily="34" charset="0"/>
+              </a:rPr>
+              <a:t>(Customer_ID unico por fila)</a:t>
+            </a:r>
+          </a:p>
+        </p:txBody>
+      </p:sp>
+      <p:sp>
+        <p:nvSpPr>
+          <p:cNvPr id="30" name="RBg"/>
+          <p:cNvSpPr/>
+          <p:nvPr/>
+        </p:nvSpPr>
+        <p:spPr>
+          <a:xfrm>
+            <a:off x="4663440" y="1828800"/>
+            <a:ext cx="4023360" cy="2743200"/>
+          </a:xfrm>
+          <a:prstGeom prst="roundRect">
+            <a:avLst>
+              <a:gd name="adj" fmla="val 3000"/>
+            </a:avLst>
+          </a:prstGeom>
+          <a:solidFill>
+            <a:srgbClr val="F8FAFC"/>
+          </a:solidFill>
+          <a:ln w="6350">
+            <a:solidFill>
+              <a:srgbClr val="E2E8F0"/>
+            </a:solidFill>
+          </a:ln>
+        </p:spPr>
+        <p:txBody>
+          <a:bodyPr/>
+          <a:p/>
+        </p:txBody>
+      </p:sp>
+      <p:sp>
+        <p:nvSpPr>
+          <p:cNvPr id="31" name="RTitle"/>
+          <p:cNvSpPr/>
+          <p:nvPr/>
+        </p:nvSpPr>
+        <p:spPr>
+          <a:xfrm>
+            <a:off x="4800600" y="1905000"/>
+            <a:ext cx="3749040" cy="320040"/>
+          </a:xfrm>
+          <a:prstGeom prst="rect">
+            <a:avLst/>
+          </a:prstGeom>
+          <a:noFill/>
+          <a:ln/>
+        </p:spPr>
+        <p:txBody>
+          <a:bodyPr wrap="square" lIns="0" tIns="0" rIns="0" bIns="0" rtlCol="0" anchor="ctr"/>
+          <a:lstStyle/>
+          <a:p>
+            <a:pPr indent="0" marL="0">
+              <a:buNone/>
+            </a:pPr>
+            <a:r>
+              <a:rPr lang="en-US" sz="1400" b="1" dirty="0">
+                <a:solidFill>
+                  <a:srgbClr val="1B2A4A"/>
+                </a:solidFill>
+                <a:latin typeface="Calibri" pitchFamily="34" charset="0"/>
+              </a:rPr>
+              <a:t>Top correlaciones con Churn</a:t>
+            </a:r>
+          </a:p>
+        </p:txBody>
+      </p:sp>
+      <p:sp>
+        <p:nvSpPr>
+          <p:cNvPr id="32" name="RContent"/>
+          <p:cNvSpPr/>
+          <p:nvPr/>
+        </p:nvSpPr>
+        <p:spPr>
+          <a:xfrm>
+            <a:off x="4800600" y="2240280"/>
+            <a:ext cx="3749040" cy="2194560"/>
+          </a:xfrm>
+          <a:prstGeom prst="rect">
+            <a:avLst/>
+          </a:prstGeom>
+          <a:noFill/>
+          <a:ln/>
+        </p:spPr>
+        <p:txBody>
+          <a:bodyPr wrap="square" lIns="0" tIns="0" rIns="0" bIns="0" rtlCol="0" anchor="t"/>
+          <a:lstStyle/>
+          <a:p>
+            <a:pPr indent="0" marL="0">
+              <a:buNone/>
+            </a:pPr>
+            <a:r>
+              <a:rPr lang="en-US" sz="1000" dirty="0">
+                <a:solidFill>
+                  <a:srgbClr val="6B7280"/>
+                </a:solidFill>
+                <a:latin typeface="Calibri" pitchFamily="34" charset="0"/>
+              </a:rPr>
+              <a:t>Correlaciones lineales bajas (max |r|=0.11). XGBoost captura relaciones no lineales que Pearson no ve.</a:t>
+            </a:r>
+          </a:p>
+          <a:p>
+            <a:pPr indent="0" marL="0">
+              <a:buNone/>
+            </a:pPr>
+            <a:r>
+              <a:rPr lang="en-US" sz="500" dirty="0">
+                <a:solidFill>
+                  <a:srgbClr val="FFFFFF"/>
+                </a:solidFill>
+              </a:rPr>
+              <a:t xml:space="preserve"> </a:t>
+            </a:r>
+          </a:p>
+          <a:p>
+            <a:pPr indent="0" marL="0">
+              <a:buNone/>
+            </a:pPr>
+            <a:r>
+              <a:rPr lang="en-US" sz="1100" b="1" dirty="0">
+                <a:solidFill>
+                  <a:srgbClr val="DC2626"/>
+                </a:solidFill>
+                <a:latin typeface="Consolas" pitchFamily="34" charset="0"/>
+              </a:rPr>
+              <a:t xml:space="preserve">↑ eqpdays        </a:t>
+            </a:r>
+            <a:r>
+              <a:rPr lang="en-US" sz="1100" dirty="0">
+                <a:solidFill>
+                  <a:srgbClr val="4B5563"/>
+                </a:solidFill>
+                <a:latin typeface="Calibri" pitchFamily="34" charset="0"/>
+              </a:rPr>
+              <a:t>r = +0.113  (equipo antiguo)</a:t>
+            </a:r>
+          </a:p>
+          <a:p>
+            <a:pPr indent="0" marL="0">
+              <a:buNone/>
+            </a:pPr>
+            <a:r>
+              <a:rPr lang="en-US" sz="1100" b="1" dirty="0">
+                <a:solidFill>
+                  <a:srgbClr val="059669"/>
+                </a:solidFill>
+                <a:latin typeface="Consolas" pitchFamily="34" charset="0"/>
+              </a:rPr>
+              <a:t xml:space="preserve">↓ hnd_price       </a:t>
+            </a:r>
+            <a:r>
+              <a:rPr lang="en-US" sz="1100" dirty="0">
+                <a:solidFill>
+                  <a:srgbClr val="4B5563"/>
+                </a:solidFill>
+                <a:latin typeface="Calibri" pitchFamily="34" charset="0"/>
+              </a:rPr>
+              <a:t>r = -0.103  (telefono barato)</a:t>
+            </a:r>
+          </a:p>
+          <a:p>
+            <a:pPr indent="0" marL="0">
+              <a:buNone/>
+            </a:pPr>
+            <a:r>
+              <a:rPr lang="en-US" sz="1100" b="1" dirty="0">
+                <a:solidFill>
+                  <a:srgbClr val="059669"/>
+                </a:solidFill>
+                <a:latin typeface="Consolas" pitchFamily="34" charset="0"/>
+              </a:rPr>
+              <a:t xml:space="preserve">↓ totmrc_Mean     </a:t>
+            </a:r>
+            <a:r>
+              <a:rPr lang="en-US" sz="1100" dirty="0">
+                <a:solidFill>
+                  <a:srgbClr val="4B5563"/>
+                </a:solidFill>
+                <a:latin typeface="Calibri" pitchFamily="34" charset="0"/>
+              </a:rPr>
+              <a:t>r = -0.069  (factura baja)</a:t>
+            </a:r>
+          </a:p>
+          <a:p>
+            <a:pPr indent="0" marL="0">
+              <a:buNone/>
+            </a:pPr>
+            <a:r>
+              <a:rPr lang="en-US" sz="1100" b="1" dirty="0">
+                <a:solidFill>
+                  <a:srgbClr val="059669"/>
+                </a:solidFill>
+                <a:latin typeface="Consolas" pitchFamily="34" charset="0"/>
+              </a:rPr>
+              <a:t xml:space="preserve">↓ mou_Mean        </a:t>
+            </a:r>
+            <a:r>
+              <a:rPr lang="en-US" sz="1100" dirty="0">
+                <a:solidFill>
+                  <a:srgbClr val="4B5563"/>
+                </a:solidFill>
+                <a:latin typeface="Calibri" pitchFamily="34" charset="0"/>
+              </a:rPr>
+              <a:t>r = -0.057  (poco uso)</a:t>
+            </a:r>
+          </a:p>
+          <a:p>
+            <a:pPr indent="0" marL="0">
+              <a:buNone/>
+            </a:pPr>
+            <a:r>
+              <a:rPr lang="en-US" sz="1100" b="1" dirty="0">
+                <a:solidFill>
+                  <a:srgbClr val="059669"/>
+                </a:solidFill>
+                <a:latin typeface="Consolas" pitchFamily="34" charset="0"/>
+              </a:rPr>
+              <a:t xml:space="preserve">↓ complete_Mean   </a:t>
+            </a:r>
+            <a:r>
+              <a:rPr lang="en-US" sz="1100" dirty="0">
+                <a:solidFill>
+                  <a:srgbClr val="4B5563"/>
+                </a:solidFill>
+                <a:latin typeface="Calibri" pitchFamily="34" charset="0"/>
+              </a:rPr>
+              <a:t>r = -0.052  (pocas llamadas)</a:t>
+            </a:r>
+          </a:p>
+          <a:p>
+            <a:pPr indent="0" marL="0">
+              <a:buNone/>
+            </a:pPr>
+            <a:r>
+              <a:rPr lang="en-US" sz="1100" b="1" dirty="0">
+                <a:solidFill>
+                  <a:srgbClr val="059669"/>
+                </a:solidFill>
+                <a:latin typeface="Consolas" pitchFamily="34" charset="0"/>
+              </a:rPr>
+              <a:t xml:space="preserve">↓ models          </a:t>
+            </a:r>
+            <a:r>
+              <a:rPr lang="en-US" sz="1100" dirty="0">
+                <a:solidFill>
+                  <a:srgbClr val="4B5563"/>
+                </a:solidFill>
+                <a:latin typeface="Calibri" pitchFamily="34" charset="0"/>
+              </a:rPr>
+              <a:t>r = -0.045  (pocos modelos tel.)</a:t>
+            </a:r>
+          </a:p>
+          <a:p>
+            <a:pPr indent="0" marL="0">
+              <a:buNone/>
+            </a:pPr>
+            <a:r>
+              <a:rPr lang="en-US" sz="500" dirty="0">
+                <a:solidFill>
+                  <a:srgbClr val="FFFFFF"/>
+                </a:solidFill>
+              </a:rPr>
+              <a:t xml:space="preserve"> </a:t>
+            </a:r>
+          </a:p>
+          <a:p>
+            <a:pPr indent="0" marL="0">
+              <a:buNone/>
+            </a:pPr>
+            <a:r>
+              <a:rPr lang="en-US" sz="1000" i="1" dirty="0">
+                <a:solidFill>
+                  <a:srgbClr val="9CA3AF"/>
+                </a:solidFill>
+                <a:latin typeface="Calibri" pitchFamily="34" charset="0"/>
+              </a:rPr>
+              <a:t>Perfil churner: equipo viejo, gama baja, poco uso.</a:t>
+            </a:r>
           </a:p>
         </p:txBody>
       </p:sp>

--- a/Presentacion_Churn_SDG.pptx
+++ b/Presentacion_Churn_SDG.pptx
@@ -26,6 +26,7 @@
     <p:sldId id="273" r:id="rId19"/>
     <p:sldId id="274" r:id="rId20"/>
     <p:sldId id="275" r:id="rId21"/>
+    <p:sldId id="284" r:id="rId35"/>
     <p:sldId id="276" r:id="rId22"/>
     <p:sldId id="277" r:id="rId23"/>
     <p:sldId id="281" r:id="rId32"/>
@@ -19495,6 +19496,1300 @@
 </p:sld>
 </file>
 
+<file path=ppt/slides/slide29.xml><?xml version="1.0" encoding="utf-8"?>
+<p:sld xmlns:a="http://schemas.openxmlformats.org/drawingml/2006/main" xmlns:r="http://schemas.openxmlformats.org/officeDocument/2006/relationships" xmlns:p="http://schemas.openxmlformats.org/presentationml/2006/main">
+  <p:cSld name="Slide 29">
+    <p:bg>
+      <p:bgPr>
+        <a:solidFill>
+          <a:srgbClr val="FFFFFF"/>
+        </a:solidFill>
+      </p:bgPr>
+    </p:bg>
+    <p:spTree>
+      <p:nvGrpSpPr>
+        <p:cNvPr id="1" name=""/>
+        <p:cNvGrpSpPr/>
+        <p:nvPr/>
+      </p:nvGrpSpPr>
+      <p:grpSpPr>
+        <a:xfrm>
+          <a:off x="0" y="0"/>
+          <a:ext cx="0" cy="0"/>
+          <a:chOff x="0" y="0"/>
+          <a:chExt cx="0" cy="0"/>
+        </a:xfrm>
+      </p:grpSpPr>
+      <p:sp>
+        <p:nvSpPr>
+          <p:cNvPr id="2" name="Title"/>
+          <p:cNvSpPr/>
+          <p:nvPr/>
+        </p:nvSpPr>
+        <p:spPr>
+          <a:xfrm>
+            <a:off x="457200" y="182880"/>
+            <a:ext cx="6858000" cy="502920"/>
+          </a:xfrm>
+          <a:prstGeom prst="rect">
+            <a:avLst/>
+          </a:prstGeom>
+          <a:noFill/>
+          <a:ln/>
+        </p:spPr>
+        <p:txBody>
+          <a:bodyPr wrap="square" lIns="0" tIns="0" rIns="0" bIns="0" rtlCol="0" anchor="ctr"/>
+          <a:lstStyle/>
+          <a:p>
+            <a:pPr indent="0" marL="0">
+              <a:buNone/>
+            </a:pPr>
+            <a:r>
+              <a:rPr lang="en-US" sz="2400" b="1" dirty="0">
+                <a:solidFill>
+                  <a:srgbClr val="1B2A4A"/>
+                </a:solidFill>
+                <a:latin typeface="Calibri" pitchFamily="34" charset="0"/>
+                <a:ea typeface="Calibri" pitchFamily="34" charset="-122"/>
+                <a:cs typeface="Calibri" pitchFamily="34" charset="-120"/>
+              </a:rPr>
+              <a:t>Estructura del Proyecto y Modularizacion</a:t>
+            </a:r>
+          </a:p>
+        </p:txBody>
+      </p:sp>
+      <p:sp>
+        <p:nvSpPr>
+          <p:cNvPr id="3" name="Accent Line"/>
+          <p:cNvSpPr/>
+          <p:nvPr/>
+        </p:nvSpPr>
+        <p:spPr>
+          <a:xfrm>
+            <a:off x="457200" y="731520"/>
+            <a:ext cx="1097280" cy="36576"/>
+          </a:xfrm>
+          <a:prstGeom prst="rect">
+            <a:avLst/>
+          </a:prstGeom>
+          <a:solidFill>
+            <a:srgbClr val="0078D4"/>
+          </a:solidFill>
+          <a:ln/>
+        </p:spPr>
+        <p:txBody>
+          <a:bodyPr/>
+          <a:p/>
+        </p:txBody>
+      </p:sp>
+      <p:sp>
+        <p:nvSpPr>
+          <p:cNvPr id="4" name="SDG Logo"/>
+          <p:cNvSpPr/>
+          <p:nvPr/>
+        </p:nvSpPr>
+        <p:spPr>
+          <a:xfrm>
+            <a:off x="7315200" y="137160"/>
+            <a:ext cx="1554480" cy="365760"/>
+          </a:xfrm>
+          <a:prstGeom prst="rect">
+            <a:avLst/>
+          </a:prstGeom>
+          <a:noFill/>
+          <a:ln/>
+        </p:spPr>
+        <p:txBody>
+          <a:bodyPr wrap="square" rtlCol="0" anchor="ctr"/>
+          <a:lstStyle/>
+          <a:p>
+            <a:pPr algn="r" indent="0" marL="0">
+              <a:buNone/>
+            </a:pPr>
+            <a:r>
+              <a:rPr lang="en-US" sz="1400" b="1" dirty="0">
+                <a:solidFill>
+                  <a:srgbClr val="0078D4"/>
+                </a:solidFill>
+                <a:latin typeface="Calibri" pitchFamily="34" charset="0"/>
+              </a:rPr>
+              <a:t>sdg group</a:t>
+            </a:r>
+          </a:p>
+        </p:txBody>
+      </p:sp>
+      <p:sp>
+        <p:nvSpPr>
+          <p:cNvPr id="5" name="Copyright"/>
+          <p:cNvSpPr/>
+          <p:nvPr/>
+        </p:nvSpPr>
+        <p:spPr>
+          <a:xfrm>
+            <a:off x="274320" y="4709160"/>
+            <a:ext cx="2743200" cy="365760"/>
+          </a:xfrm>
+          <a:prstGeom prst="rect">
+            <a:avLst/>
+          </a:prstGeom>
+          <a:noFill/>
+          <a:ln/>
+        </p:spPr>
+        <p:txBody>
+          <a:bodyPr wrap="square" rtlCol="0" anchor="ctr"/>
+          <a:lstStyle/>
+          <a:p>
+            <a:pPr indent="0" marL="0">
+              <a:buNone/>
+            </a:pPr>
+            <a:r>
+              <a:rPr lang="en-US" sz="800" dirty="0">
+                <a:solidFill>
+                  <a:srgbClr val="9CA3AF"/>
+                </a:solidFill>
+                <a:latin typeface="Calibri" pitchFamily="34" charset="0"/>
+              </a:rPr>
+              <a:t>Copyright © SDG Group</a:t>
+            </a:r>
+          </a:p>
+        </p:txBody>
+      </p:sp>
+      <p:sp>
+        <p:nvSpPr>
+          <p:cNvPr id="50" name="TreeBg"/>
+          <p:cNvSpPr/>
+          <p:nvPr/>
+        </p:nvSpPr>
+        <p:spPr>
+          <a:xfrm>
+            <a:off x="457200" y="868680"/>
+            <a:ext cx="3200400" cy="3657600"/>
+          </a:xfrm>
+          <a:prstGeom prst="roundRect">
+            <a:avLst>
+              <a:gd name="adj" fmla="val 5000"/>
+            </a:avLst>
+          </a:prstGeom>
+          <a:solidFill>
+            <a:srgbClr val="F0F4F8"/>
+          </a:solidFill>
+          <a:ln w="6350">
+            <a:solidFill>
+              <a:srgbClr val="D1D5DB"/>
+            </a:solidFill>
+          </a:ln>
+        </p:spPr>
+        <p:txBody>
+          <a:bodyPr/>
+          <a:p/>
+        </p:txBody>
+      </p:sp>
+      <p:sp>
+        <p:nvSpPr>
+          <p:cNvPr id="51" name="TreeTitle"/>
+          <p:cNvSpPr/>
+          <p:nvPr/>
+        </p:nvSpPr>
+        <p:spPr>
+          <a:xfrm>
+            <a:off x="571500" y="914400"/>
+            <a:ext cx="2971800" cy="274320"/>
+          </a:xfrm>
+          <a:prstGeom prst="rect">
+            <a:avLst/>
+          </a:prstGeom>
+          <a:noFill/>
+          <a:ln/>
+        </p:spPr>
+        <p:txBody>
+          <a:bodyPr wrap="square" lIns="0" tIns="0" rIns="0" bIns="0" rtlCol="0" anchor="ctr"/>
+          <a:lstStyle/>
+          <a:p>
+            <a:pPr indent="0" marL="0">
+              <a:buNone/>
+            </a:pPr>
+            <a:r>
+              <a:rPr lang="en-US" sz="1100" b="1" dirty="0">
+                <a:solidFill>
+                  <a:srgbClr val="1B2A4A"/>
+                </a:solidFill>
+                <a:latin typeface="Consolas" pitchFamily="49" charset="0"/>
+              </a:rPr>
+              <a:t>AI_Test_SDG/</a:t>
+            </a:r>
+          </a:p>
+        </p:txBody>
+      </p:sp>
+      <p:sp>
+        <p:nvSpPr>
+          <p:cNvPr id="52" name="TreeContent"/>
+          <p:cNvSpPr/>
+          <p:nvPr/>
+        </p:nvSpPr>
+        <p:spPr>
+          <a:xfrm>
+            <a:off x="571500" y="1188720"/>
+            <a:ext cx="2971800" cy="3200400"/>
+          </a:xfrm>
+          <a:prstGeom prst="rect">
+            <a:avLst/>
+          </a:prstGeom>
+          <a:noFill/>
+          <a:ln/>
+        </p:spPr>
+        <p:txBody>
+          <a:bodyPr wrap="square" lIns="0" tIns="0" rIns="0" bIns="0" rtlCol="0" anchor="t"/>
+          <a:lstStyle/>
+          <a:p>
+            <a:pPr indent="0" marL="0">
+              <a:lnSpc>
+                <a:spcPts val="1600"/>
+              </a:lnSpc>
+              <a:buNone/>
+            </a:pPr>
+            <a:r>
+              <a:rPr lang="en-US" sz="900" dirty="0">
+                <a:solidFill>
+                  <a:srgbClr val="0078D4"/>
+                </a:solidFill>
+                <a:latin typeface="Consolas" pitchFamily="49" charset="0"/>
+              </a:rPr>
+              <a:t>├─ scripts/</a:t>
+            </a:r>
+          </a:p>
+          <a:p>
+            <a:pPr indent="0" marL="0">
+              <a:lnSpc>
+                <a:spcPts val="1600"/>
+              </a:lnSpc>
+              <a:buNone/>
+            </a:pPr>
+            <a:r>
+              <a:rPr lang="en-US" sz="900" dirty="0">
+                <a:solidFill>
+                  <a:srgbClr val="4B5563"/>
+                </a:solidFill>
+                <a:latin typeface="Consolas" pitchFamily="49" charset="0"/>
+              </a:rPr>
+              <a:t>│   ├─ data_preparation.py</a:t>
+            </a:r>
+          </a:p>
+          <a:p>
+            <a:pPr indent="0" marL="0">
+              <a:lnSpc>
+                <a:spcPts val="1600"/>
+              </a:lnSpc>
+              <a:buNone/>
+            </a:pPr>
+            <a:r>
+              <a:rPr lang="en-US" sz="900" dirty="0">
+                <a:solidFill>
+                  <a:srgbClr val="4B5563"/>
+                </a:solidFill>
+                <a:latin typeface="Consolas" pitchFamily="49" charset="0"/>
+              </a:rPr>
+              <a:t>│   ├─ train_model.py</a:t>
+            </a:r>
+          </a:p>
+          <a:p>
+            <a:pPr indent="0" marL="0">
+              <a:lnSpc>
+                <a:spcPts val="1600"/>
+              </a:lnSpc>
+              <a:buNone/>
+            </a:pPr>
+            <a:r>
+              <a:rPr lang="en-US" sz="900" dirty="0">
+                <a:solidFill>
+                  <a:srgbClr val="4B5563"/>
+                </a:solidFill>
+                <a:latin typeface="Consolas" pitchFamily="49" charset="0"/>
+              </a:rPr>
+              <a:t>│   ├─ evaluate_model.py</a:t>
+            </a:r>
+          </a:p>
+          <a:p>
+            <a:pPr indent="0" marL="0">
+              <a:lnSpc>
+                <a:spcPts val="1600"/>
+              </a:lnSpc>
+              <a:buNone/>
+            </a:pPr>
+            <a:r>
+              <a:rPr lang="en-US" sz="900" dirty="0">
+                <a:solidFill>
+                  <a:srgbClr val="4B5563"/>
+                </a:solidFill>
+                <a:latin typeface="Consolas" pitchFamily="49" charset="0"/>
+              </a:rPr>
+              <a:t>│   ├─ db_utils.py</a:t>
+            </a:r>
+          </a:p>
+          <a:p>
+            <a:pPr indent="0" marL="0">
+              <a:lnSpc>
+                <a:spcPts val="1600"/>
+              </a:lnSpc>
+              <a:buNone/>
+            </a:pPr>
+            <a:r>
+              <a:rPr lang="en-US" sz="900" dirty="0">
+                <a:solidFill>
+                  <a:srgbClr val="4B5563"/>
+                </a:solidFill>
+                <a:latin typeface="Consolas" pitchFamily="49" charset="0"/>
+              </a:rPr>
+              <a:t>│   └─ metrics_exporter.py</a:t>
+            </a:r>
+          </a:p>
+          <a:p>
+            <a:pPr indent="0" marL="0">
+              <a:lnSpc>
+                <a:spcPts val="1600"/>
+              </a:lnSpc>
+              <a:buNone/>
+            </a:pPr>
+            <a:r>
+              <a:rPr lang="en-US" sz="900" dirty="0">
+                <a:solidFill>
+                  <a:srgbClr val="0078D4"/>
+                </a:solidFill>
+                <a:latin typeface="Consolas" pitchFamily="49" charset="0"/>
+              </a:rPr>
+              <a:t>├─ dags/</a:t>
+            </a:r>
+          </a:p>
+          <a:p>
+            <a:pPr indent="0" marL="0">
+              <a:lnSpc>
+                <a:spcPts val="1600"/>
+              </a:lnSpc>
+              <a:buNone/>
+            </a:pPr>
+            <a:r>
+              <a:rPr lang="en-US" sz="900" dirty="0">
+                <a:solidFill>
+                  <a:srgbClr val="4B5563"/>
+                </a:solidFill>
+                <a:latin typeface="Consolas" pitchFamily="49" charset="0"/>
+              </a:rPr>
+              <a:t>│   └─ churn_pipeline_dag.py</a:t>
+            </a:r>
+          </a:p>
+          <a:p>
+            <a:pPr indent="0" marL="0">
+              <a:lnSpc>
+                <a:spcPts val="1600"/>
+              </a:lnSpc>
+              <a:buNone/>
+            </a:pPr>
+            <a:r>
+              <a:rPr lang="en-US" sz="900" dirty="0">
+                <a:solidFill>
+                  <a:srgbClr val="0078D4"/>
+                </a:solidFill>
+                <a:latin typeface="Consolas" pitchFamily="49" charset="0"/>
+              </a:rPr>
+              <a:t>├─ data/</a:t>
+            </a:r>
+            <a:r>
+              <a:rPr lang="en-US" sz="900" dirty="0">
+                <a:solidFill>
+                  <a:srgbClr val="9CA3AF"/>
+                </a:solidFill>
+                <a:latin typeface="Consolas" pitchFamily="49" charset="0"/>
+              </a:rPr>
+              <a:t xml:space="preserve">  dataset.csv, processed/</a:t>
+            </a:r>
+          </a:p>
+          <a:p>
+            <a:pPr indent="0" marL="0">
+              <a:lnSpc>
+                <a:spcPts val="1600"/>
+              </a:lnSpc>
+              <a:buNone/>
+            </a:pPr>
+            <a:r>
+              <a:rPr lang="en-US" sz="900" dirty="0">
+                <a:solidFill>
+                  <a:srgbClr val="0078D4"/>
+                </a:solidFill>
+                <a:latin typeface="Consolas" pitchFamily="49" charset="0"/>
+              </a:rPr>
+              <a:t>├─ models/</a:t>
+            </a:r>
+            <a:r>
+              <a:rPr lang="en-US" sz="900" dirty="0">
+                <a:solidFill>
+                  <a:srgbClr val="9CA3AF"/>
+                </a:solidFill>
+                <a:latin typeface="Consolas" pitchFamily="49" charset="0"/>
+              </a:rPr>
+              <a:t xml:space="preserve">  *.pickle</a:t>
+            </a:r>
+          </a:p>
+          <a:p>
+            <a:pPr indent="0" marL="0">
+              <a:lnSpc>
+                <a:spcPts val="1600"/>
+              </a:lnSpc>
+              <a:buNone/>
+            </a:pPr>
+            <a:r>
+              <a:rPr lang="en-US" sz="900" dirty="0">
+                <a:solidFill>
+                  <a:srgbClr val="0078D4"/>
+                </a:solidFill>
+                <a:latin typeface="Consolas" pitchFamily="49" charset="0"/>
+              </a:rPr>
+              <a:t>├─ monitoring/</a:t>
+            </a:r>
+            <a:r>
+              <a:rPr lang="en-US" sz="900" dirty="0">
+                <a:solidFill>
+                  <a:srgbClr val="9CA3AF"/>
+                </a:solidFill>
+                <a:latin typeface="Consolas" pitchFamily="49" charset="0"/>
+              </a:rPr>
+              <a:t xml:space="preserve">  prometheus.yml, grafana/</a:t>
+            </a:r>
+          </a:p>
+          <a:p>
+            <a:pPr indent="0" marL="0">
+              <a:lnSpc>
+                <a:spcPts val="1600"/>
+              </a:lnSpc>
+              <a:buNone/>
+            </a:pPr>
+            <a:r>
+              <a:rPr lang="en-US" sz="900" dirty="0">
+                <a:solidFill>
+                  <a:srgbClr val="4B5563"/>
+                </a:solidFill>
+                <a:latin typeface="Consolas" pitchFamily="49" charset="0"/>
+              </a:rPr>
+              <a:t>├─ docker-compose.yaml</a:t>
+            </a:r>
+          </a:p>
+          <a:p>
+            <a:pPr indent="0" marL="0">
+              <a:lnSpc>
+                <a:spcPts val="1600"/>
+              </a:lnSpc>
+              <a:buNone/>
+            </a:pPr>
+            <a:r>
+              <a:rPr lang="en-US" sz="900" dirty="0">
+                <a:solidFill>
+                  <a:srgbClr val="4B5563"/>
+                </a:solidFill>
+                <a:latin typeface="Consolas" pitchFamily="49" charset="0"/>
+              </a:rPr>
+              <a:t>├─ Dockerfile</a:t>
+            </a:r>
+          </a:p>
+          <a:p>
+            <a:pPr indent="0" marL="0">
+              <a:lnSpc>
+                <a:spcPts val="1600"/>
+              </a:lnSpc>
+              <a:buNone/>
+            </a:pPr>
+            <a:r>
+              <a:rPr lang="en-US" sz="900" dirty="0">
+                <a:solidFill>
+                  <a:srgbClr val="4B5563"/>
+                </a:solidFill>
+                <a:latin typeface="Consolas" pitchFamily="49" charset="0"/>
+              </a:rPr>
+              <a:t>└─ requirements.txt</a:t>
+            </a:r>
+          </a:p>
+        </p:txBody>
+      </p:sp>
+      <p:sp>
+        <p:nvSpPr>
+          <p:cNvPr id="60" name="Card1Bg"/>
+          <p:cNvSpPr/>
+          <p:nvPr/>
+        </p:nvSpPr>
+        <p:spPr>
+          <a:xfrm>
+            <a:off x="3886200" y="868680"/>
+            <a:ext cx="4800600" cy="822960"/>
+          </a:xfrm>
+          <a:prstGeom prst="roundRect">
+            <a:avLst>
+              <a:gd name="adj" fmla="val 8000"/>
+            </a:avLst>
+          </a:prstGeom>
+          <a:solidFill>
+            <a:srgbClr val="D6EAF8"/>
+          </a:solidFill>
+          <a:ln/>
+        </p:spPr>
+        <p:txBody>
+          <a:bodyPr/>
+          <a:p/>
+        </p:txBody>
+      </p:sp>
+      <p:sp>
+        <p:nvSpPr>
+          <p:cNvPr id="61" name="Card1Bar"/>
+          <p:cNvSpPr/>
+          <p:nvPr/>
+        </p:nvSpPr>
+        <p:spPr>
+          <a:xfrm>
+            <a:off x="3886200" y="868680"/>
+            <a:ext cx="54864" cy="822960"/>
+          </a:xfrm>
+          <a:prstGeom prst="rect">
+            <a:avLst/>
+          </a:prstGeom>
+          <a:solidFill>
+            <a:srgbClr val="0078D4"/>
+          </a:solidFill>
+          <a:ln/>
+        </p:spPr>
+        <p:txBody>
+          <a:bodyPr/>
+          <a:p/>
+        </p:txBody>
+      </p:sp>
+      <p:sp>
+        <p:nvSpPr>
+          <p:cNvPr id="62" name="Card1Badge"/>
+          <p:cNvSpPr/>
+          <p:nvPr/>
+        </p:nvSpPr>
+        <p:spPr>
+          <a:xfrm>
+            <a:off x="4114800" y="914400"/>
+            <a:ext cx="914400" cy="228600"/>
+          </a:xfrm>
+          <a:prstGeom prst="roundRect">
+            <a:avLst>
+              <a:gd name="adj" fmla="val 16667"/>
+            </a:avLst>
+          </a:prstGeom>
+          <a:solidFill>
+            <a:srgbClr val="0078D4"/>
+          </a:solidFill>
+          <a:ln/>
+        </p:spPr>
+        <p:txBody>
+          <a:bodyPr/>
+          <a:p/>
+        </p:txBody>
+      </p:sp>
+      <p:sp>
+        <p:nvSpPr>
+          <p:cNvPr id="63" name="Card1BadgeTxt"/>
+          <p:cNvSpPr/>
+          <p:nvPr/>
+        </p:nvSpPr>
+        <p:spPr>
+          <a:xfrm>
+            <a:off x="4114800" y="914400"/>
+            <a:ext cx="914400" cy="228600"/>
+          </a:xfrm>
+          <a:prstGeom prst="rect">
+            <a:avLst/>
+          </a:prstGeom>
+          <a:noFill/>
+          <a:ln/>
+        </p:spPr>
+        <p:txBody>
+          <a:bodyPr wrap="square" lIns="0" tIns="0" rIns="0" bIns="0" rtlCol="0" anchor="ctr"/>
+          <a:lstStyle/>
+          <a:p>
+            <a:pPr algn="ctr" indent="0" marL="0">
+              <a:buNone/>
+            </a:pPr>
+            <a:r>
+              <a:rPr lang="en-US" sz="800" b="1" dirty="0">
+                <a:solidFill>
+                  <a:srgbClr val="FFFFFF"/>
+                </a:solidFill>
+                <a:latin typeface="Calibri" pitchFamily="34" charset="0"/>
+              </a:rPr>
+              <a:t>CORE</a:t>
+            </a:r>
+          </a:p>
+        </p:txBody>
+      </p:sp>
+      <p:sp>
+        <p:nvSpPr>
+          <p:cNvPr id="64" name="Card1Title"/>
+          <p:cNvSpPr/>
+          <p:nvPr/>
+        </p:nvSpPr>
+        <p:spPr>
+          <a:xfrm>
+            <a:off x="5143500" y="892632"/>
+            <a:ext cx="3429000" cy="274320"/>
+          </a:xfrm>
+          <a:prstGeom prst="rect">
+            <a:avLst/>
+          </a:prstGeom>
+          <a:noFill/>
+          <a:ln/>
+        </p:spPr>
+        <p:txBody>
+          <a:bodyPr wrap="square" lIns="0" tIns="0" rIns="0" bIns="0" rtlCol="0" anchor="ctr"/>
+          <a:lstStyle/>
+          <a:p>
+            <a:pPr indent="0" marL="0">
+              <a:buNone/>
+            </a:pPr>
+            <a:r>
+              <a:rPr lang="en-US" sz="1100" b="1" dirty="0">
+                <a:solidFill>
+                  <a:srgbClr val="1B2A4A"/>
+                </a:solidFill>
+                <a:latin typeface="Calibri" pitchFamily="34" charset="0"/>
+              </a:rPr>
+              <a:t>3 scripts independientes con main()</a:t>
+            </a:r>
+          </a:p>
+        </p:txBody>
+      </p:sp>
+      <p:sp>
+        <p:nvSpPr>
+          <p:cNvPr id="65" name="Card1Desc"/>
+          <p:cNvSpPr/>
+          <p:nvPr/>
+        </p:nvSpPr>
+        <p:spPr>
+          <a:xfrm>
+            <a:off x="4114800" y="1166928"/>
+            <a:ext cx="4457700" cy="480060"/>
+          </a:xfrm>
+          <a:prstGeom prst="rect">
+            <a:avLst/>
+          </a:prstGeom>
+          <a:noFill/>
+          <a:ln/>
+        </p:spPr>
+        <p:txBody>
+          <a:bodyPr wrap="square" lIns="0" tIns="0" rIns="0" bIns="0" rtlCol="0" anchor="t"/>
+          <a:lstStyle/>
+          <a:p>
+            <a:pPr indent="0" marL="0">
+              <a:lnSpc>
+                <a:spcPts val="1400"/>
+              </a:lnSpc>
+              <a:buNone/>
+            </a:pPr>
+            <a:r>
+              <a:rPr lang="en-US" sz="950" dirty="0">
+                <a:solidFill>
+                  <a:srgbClr val="4B5563"/>
+                </a:solidFill>
+                <a:latin typeface="Calibri" pitchFamily="34" charset="0"/>
+              </a:rPr>
+              <a:t>Cada script tiene una unica responsabilidad. El DAG importa y ejecuta cada main() via PythonOperator. Sin dependencias circulares.</a:t>
+            </a:r>
+          </a:p>
+        </p:txBody>
+      </p:sp>
+      <p:sp>
+        <p:nvSpPr>
+          <p:cNvPr id="70" name="Card2Bg"/>
+          <p:cNvSpPr/>
+          <p:nvPr/>
+        </p:nvSpPr>
+        <p:spPr>
+          <a:xfrm>
+            <a:off x="3886200" y="1783080"/>
+            <a:ext cx="4800600" cy="822960"/>
+          </a:xfrm>
+          <a:prstGeom prst="roundRect">
+            <a:avLst>
+              <a:gd name="adj" fmla="val 8000"/>
+            </a:avLst>
+          </a:prstGeom>
+          <a:solidFill>
+            <a:srgbClr val="D6EAF8"/>
+          </a:solidFill>
+          <a:ln/>
+        </p:spPr>
+        <p:txBody>
+          <a:bodyPr/>
+          <a:p/>
+        </p:txBody>
+      </p:sp>
+      <p:sp>
+        <p:nvSpPr>
+          <p:cNvPr id="71" name="Card2Bar"/>
+          <p:cNvSpPr/>
+          <p:nvPr/>
+        </p:nvSpPr>
+        <p:spPr>
+          <a:xfrm>
+            <a:off x="3886200" y="1783080"/>
+            <a:ext cx="54864" cy="822960"/>
+          </a:xfrm>
+          <a:prstGeom prst="rect">
+            <a:avLst/>
+          </a:prstGeom>
+          <a:solidFill>
+            <a:srgbClr val="22C55E"/>
+          </a:solidFill>
+          <a:ln/>
+        </p:spPr>
+        <p:txBody>
+          <a:bodyPr/>
+          <a:p/>
+        </p:txBody>
+      </p:sp>
+      <p:sp>
+        <p:nvSpPr>
+          <p:cNvPr id="72" name="Card2Badge"/>
+          <p:cNvSpPr/>
+          <p:nvPr/>
+        </p:nvSpPr>
+        <p:spPr>
+          <a:xfrm>
+            <a:off x="4114800" y="1828800"/>
+            <a:ext cx="914400" cy="228600"/>
+          </a:xfrm>
+          <a:prstGeom prst="roundRect">
+            <a:avLst>
+              <a:gd name="adj" fmla="val 16667"/>
+            </a:avLst>
+          </a:prstGeom>
+          <a:solidFill>
+            <a:srgbClr val="22C55E"/>
+          </a:solidFill>
+          <a:ln/>
+        </p:spPr>
+        <p:txBody>
+          <a:bodyPr/>
+          <a:p/>
+        </p:txBody>
+      </p:sp>
+      <p:sp>
+        <p:nvSpPr>
+          <p:cNvPr id="73" name="Card2BadgeTxt"/>
+          <p:cNvSpPr/>
+          <p:nvPr/>
+        </p:nvSpPr>
+        <p:spPr>
+          <a:xfrm>
+            <a:off x="4114800" y="1828800"/>
+            <a:ext cx="914400" cy="228600"/>
+          </a:xfrm>
+          <a:prstGeom prst="rect">
+            <a:avLst/>
+          </a:prstGeom>
+          <a:noFill/>
+          <a:ln/>
+        </p:spPr>
+        <p:txBody>
+          <a:bodyPr wrap="square" lIns="0" tIns="0" rIns="0" bIns="0" rtlCol="0" anchor="ctr"/>
+          <a:lstStyle/>
+          <a:p>
+            <a:pPr algn="ctr" indent="0" marL="0">
+              <a:buNone/>
+            </a:pPr>
+            <a:r>
+              <a:rPr lang="en-US" sz="800" b="1" dirty="0">
+                <a:solidFill>
+                  <a:srgbClr val="FFFFFF"/>
+                </a:solidFill>
+                <a:latin typeface="Calibri" pitchFamily="34" charset="0"/>
+              </a:rPr>
+              <a:t>UTILS</a:t>
+            </a:r>
+          </a:p>
+        </p:txBody>
+      </p:sp>
+      <p:sp>
+        <p:nvSpPr>
+          <p:cNvPr id="74" name="Card2Title"/>
+          <p:cNvSpPr/>
+          <p:nvPr/>
+        </p:nvSpPr>
+        <p:spPr>
+          <a:xfrm>
+            <a:off x="5143500" y="1807032"/>
+            <a:ext cx="3429000" cy="274320"/>
+          </a:xfrm>
+          <a:prstGeom prst="rect">
+            <a:avLst/>
+          </a:prstGeom>
+          <a:noFill/>
+          <a:ln/>
+        </p:spPr>
+        <p:txBody>
+          <a:bodyPr wrap="square" lIns="0" tIns="0" rIns="0" bIns="0" rtlCol="0" anchor="ctr"/>
+          <a:lstStyle/>
+          <a:p>
+            <a:pPr indent="0" marL="0">
+              <a:buNone/>
+            </a:pPr>
+            <a:r>
+              <a:rPr lang="en-US" sz="1100" b="1" dirty="0">
+                <a:solidFill>
+                  <a:srgbClr val="1B2A4A"/>
+                </a:solidFill>
+                <a:latin typeface="Calibri" pitchFamily="34" charset="0"/>
+              </a:rPr>
+              <a:t>Modulos reutilizables</a:t>
+            </a:r>
+          </a:p>
+        </p:txBody>
+      </p:sp>
+      <p:sp>
+        <p:nvSpPr>
+          <p:cNvPr id="75" name="Card2Desc"/>
+          <p:cNvSpPr/>
+          <p:nvPr/>
+        </p:nvSpPr>
+        <p:spPr>
+          <a:xfrm>
+            <a:off x="4114800" y="2081328"/>
+            <a:ext cx="4457700" cy="480060"/>
+          </a:xfrm>
+          <a:prstGeom prst="rect">
+            <a:avLst/>
+          </a:prstGeom>
+          <a:noFill/>
+          <a:ln/>
+        </p:spPr>
+        <p:txBody>
+          <a:bodyPr wrap="square" lIns="0" tIns="0" rIns="0" bIns="0" rtlCol="0" anchor="t"/>
+          <a:lstStyle/>
+          <a:p>
+            <a:pPr indent="0" marL="0">
+              <a:lnSpc>
+                <a:spcPts val="1400"/>
+              </a:lnSpc>
+              <a:buNone/>
+            </a:pPr>
+            <a:r>
+              <a:rPr lang="en-US" sz="950" b="1" dirty="0">
+                <a:solidFill>
+                  <a:srgbClr val="4B5563"/>
+                </a:solidFill>
+                <a:latin typeface="Calibri" pitchFamily="34" charset="0"/>
+              </a:rPr>
+              <a:t>db_utils.py:</a:t>
+            </a:r>
+            <a:r>
+              <a:rPr lang="en-US" sz="950" dirty="0">
+                <a:solidFill>
+                  <a:srgbClr val="4B5563"/>
+                </a:solidFill>
+                <a:latin typeface="Calibri" pitchFamily="34" charset="0"/>
+              </a:rPr>
+              <a:t xml:space="preserve"> conexion PostgreSQL y helpers CRUD. </a:t>
+            </a:r>
+            <a:r>
+              <a:rPr lang="en-US" sz="950" b="1" dirty="0">
+                <a:solidFill>
+                  <a:srgbClr val="4B5563"/>
+                </a:solidFill>
+                <a:latin typeface="Calibri" pitchFamily="34" charset="0"/>
+              </a:rPr>
+              <a:t>metrics_exporter.py:</a:t>
+            </a:r>
+            <a:r>
+              <a:rPr lang="en-US" sz="950" dirty="0">
+                <a:solidFill>
+                  <a:srgbClr val="4B5563"/>
+                </a:solidFill>
+                <a:latin typeface="Calibri" pitchFamily="34" charset="0"/>
+              </a:rPr>
+              <a:t xml:space="preserve"> push de metricas a Prometheus Pushgateway.</a:t>
+            </a:r>
+          </a:p>
+        </p:txBody>
+      </p:sp>
+      <p:sp>
+        <p:nvSpPr>
+          <p:cNvPr id="80" name="Card3Bg"/>
+          <p:cNvSpPr/>
+          <p:nvPr/>
+        </p:nvSpPr>
+        <p:spPr>
+          <a:xfrm>
+            <a:off x="3886200" y="2697480"/>
+            <a:ext cx="4800600" cy="822960"/>
+          </a:xfrm>
+          <a:prstGeom prst="roundRect">
+            <a:avLst>
+              <a:gd name="adj" fmla="val 8000"/>
+            </a:avLst>
+          </a:prstGeom>
+          <a:solidFill>
+            <a:srgbClr val="D6EAF8"/>
+          </a:solidFill>
+          <a:ln/>
+        </p:spPr>
+        <p:txBody>
+          <a:bodyPr/>
+          <a:p/>
+        </p:txBody>
+      </p:sp>
+      <p:sp>
+        <p:nvSpPr>
+          <p:cNvPr id="81" name="Card3Bar"/>
+          <p:cNvSpPr/>
+          <p:nvPr/>
+        </p:nvSpPr>
+        <p:spPr>
+          <a:xfrm>
+            <a:off x="3886200" y="2697480"/>
+            <a:ext cx="54864" cy="822960"/>
+          </a:xfrm>
+          <a:prstGeom prst="rect">
+            <a:avLst/>
+          </a:prstGeom>
+          <a:solidFill>
+            <a:srgbClr val="7C3AED"/>
+          </a:solidFill>
+          <a:ln/>
+        </p:spPr>
+        <p:txBody>
+          <a:bodyPr/>
+          <a:p/>
+        </p:txBody>
+      </p:sp>
+      <p:sp>
+        <p:nvSpPr>
+          <p:cNvPr id="82" name="Card3Badge"/>
+          <p:cNvSpPr/>
+          <p:nvPr/>
+        </p:nvSpPr>
+        <p:spPr>
+          <a:xfrm>
+            <a:off x="4114800" y="2743200"/>
+            <a:ext cx="914400" cy="228600"/>
+          </a:xfrm>
+          <a:prstGeom prst="roundRect">
+            <a:avLst>
+              <a:gd name="adj" fmla="val 16667"/>
+            </a:avLst>
+          </a:prstGeom>
+          <a:solidFill>
+            <a:srgbClr val="7C3AED"/>
+          </a:solidFill>
+          <a:ln/>
+        </p:spPr>
+        <p:txBody>
+          <a:bodyPr/>
+          <a:p/>
+        </p:txBody>
+      </p:sp>
+      <p:sp>
+        <p:nvSpPr>
+          <p:cNvPr id="83" name="Card3BadgeTxt"/>
+          <p:cNvSpPr/>
+          <p:nvPr/>
+        </p:nvSpPr>
+        <p:spPr>
+          <a:xfrm>
+            <a:off x="4114800" y="2743200"/>
+            <a:ext cx="914400" cy="228600"/>
+          </a:xfrm>
+          <a:prstGeom prst="rect">
+            <a:avLst/>
+          </a:prstGeom>
+          <a:noFill/>
+          <a:ln/>
+        </p:spPr>
+        <p:txBody>
+          <a:bodyPr wrap="square" lIns="0" tIns="0" rIns="0" bIns="0" rtlCol="0" anchor="ctr"/>
+          <a:lstStyle/>
+          <a:p>
+            <a:pPr algn="ctr" indent="0" marL="0">
+              <a:buNone/>
+            </a:pPr>
+            <a:r>
+              <a:rPr lang="en-US" sz="800" b="1" dirty="0">
+                <a:solidFill>
+                  <a:srgbClr val="FFFFFF"/>
+                </a:solidFill>
+                <a:latin typeface="Calibri" pitchFamily="34" charset="0"/>
+              </a:rPr>
+              <a:t>INFRA</a:t>
+            </a:r>
+          </a:p>
+        </p:txBody>
+      </p:sp>
+      <p:sp>
+        <p:nvSpPr>
+          <p:cNvPr id="84" name="Card3Title"/>
+          <p:cNvSpPr/>
+          <p:nvPr/>
+        </p:nvSpPr>
+        <p:spPr>
+          <a:xfrm>
+            <a:off x="5143500" y="2721432"/>
+            <a:ext cx="3429000" cy="274320"/>
+          </a:xfrm>
+          <a:prstGeom prst="rect">
+            <a:avLst/>
+          </a:prstGeom>
+          <a:noFill/>
+          <a:ln/>
+        </p:spPr>
+        <p:txBody>
+          <a:bodyPr wrap="square" lIns="0" tIns="0" rIns="0" bIns="0" rtlCol="0" anchor="ctr"/>
+          <a:lstStyle/>
+          <a:p>
+            <a:pPr indent="0" marL="0">
+              <a:buNone/>
+            </a:pPr>
+            <a:r>
+              <a:rPr lang="en-US" sz="1100" b="1" dirty="0">
+                <a:solidFill>
+                  <a:srgbClr val="1B2A4A"/>
+                </a:solidFill>
+                <a:latin typeface="Calibri" pitchFamily="34" charset="0"/>
+              </a:rPr>
+              <a:t>Infraestructura como codigo</a:t>
+            </a:r>
+          </a:p>
+        </p:txBody>
+      </p:sp>
+      <p:sp>
+        <p:nvSpPr>
+          <p:cNvPr id="85" name="Card3Desc"/>
+          <p:cNvSpPr/>
+          <p:nvPr/>
+        </p:nvSpPr>
+        <p:spPr>
+          <a:xfrm>
+            <a:off x="4114800" y="2995728"/>
+            <a:ext cx="4457700" cy="480060"/>
+          </a:xfrm>
+          <a:prstGeom prst="rect">
+            <a:avLst/>
+          </a:prstGeom>
+          <a:noFill/>
+          <a:ln/>
+        </p:spPr>
+        <p:txBody>
+          <a:bodyPr wrap="square" lIns="0" tIns="0" rIns="0" bIns="0" rtlCol="0" anchor="t"/>
+          <a:lstStyle/>
+          <a:p>
+            <a:pPr indent="0" marL="0">
+              <a:lnSpc>
+                <a:spcPts val="1400"/>
+              </a:lnSpc>
+              <a:buNone/>
+            </a:pPr>
+            <a:r>
+              <a:rPr lang="en-US" sz="950" dirty="0">
+                <a:solidFill>
+                  <a:srgbClr val="4B5563"/>
+                </a:solidFill>
+                <a:latin typeface="Calibri" pitchFamily="34" charset="0"/>
+              </a:rPr>
+              <a:t>Docker Compose con 10 servicios. Dockerfile custom con dependencias ML. Volumenes montados para hot-reload de scripts.</a:t>
+            </a:r>
+          </a:p>
+        </p:txBody>
+      </p:sp>
+      <p:sp>
+        <p:nvSpPr>
+          <p:cNvPr id="90" name="Card4Bg"/>
+          <p:cNvSpPr/>
+          <p:nvPr/>
+        </p:nvSpPr>
+        <p:spPr>
+          <a:xfrm>
+            <a:off x="3886200" y="3611880"/>
+            <a:ext cx="4800600" cy="822960"/>
+          </a:xfrm>
+          <a:prstGeom prst="roundRect">
+            <a:avLst>
+              <a:gd name="adj" fmla="val 8000"/>
+            </a:avLst>
+          </a:prstGeom>
+          <a:solidFill>
+            <a:srgbClr val="D6EAF8"/>
+          </a:solidFill>
+          <a:ln/>
+        </p:spPr>
+        <p:txBody>
+          <a:bodyPr/>
+          <a:p/>
+        </p:txBody>
+      </p:sp>
+      <p:sp>
+        <p:nvSpPr>
+          <p:cNvPr id="91" name="Card4Bar"/>
+          <p:cNvSpPr/>
+          <p:nvPr/>
+        </p:nvSpPr>
+        <p:spPr>
+          <a:xfrm>
+            <a:off x="3886200" y="3611880"/>
+            <a:ext cx="54864" cy="822960"/>
+          </a:xfrm>
+          <a:prstGeom prst="rect">
+            <a:avLst/>
+          </a:prstGeom>
+          <a:solidFill>
+            <a:srgbClr val="D97706"/>
+          </a:solidFill>
+          <a:ln/>
+        </p:spPr>
+        <p:txBody>
+          <a:bodyPr/>
+          <a:p/>
+        </p:txBody>
+      </p:sp>
+      <p:sp>
+        <p:nvSpPr>
+          <p:cNvPr id="92" name="Card4Badge"/>
+          <p:cNvSpPr/>
+          <p:nvPr/>
+        </p:nvSpPr>
+        <p:spPr>
+          <a:xfrm>
+            <a:off x="4114800" y="3657600"/>
+            <a:ext cx="914400" cy="228600"/>
+          </a:xfrm>
+          <a:prstGeom prst="roundRect">
+            <a:avLst>
+              <a:gd name="adj" fmla="val 16667"/>
+            </a:avLst>
+          </a:prstGeom>
+          <a:solidFill>
+            <a:srgbClr val="D97706"/>
+          </a:solidFill>
+          <a:ln/>
+        </p:spPr>
+        <p:txBody>
+          <a:bodyPr/>
+          <a:p/>
+        </p:txBody>
+      </p:sp>
+      <p:sp>
+        <p:nvSpPr>
+          <p:cNvPr id="93" name="Card4BadgeTxt"/>
+          <p:cNvSpPr/>
+          <p:nvPr/>
+        </p:nvSpPr>
+        <p:spPr>
+          <a:xfrm>
+            <a:off x="4114800" y="3657600"/>
+            <a:ext cx="914400" cy="228600"/>
+          </a:xfrm>
+          <a:prstGeom prst="rect">
+            <a:avLst/>
+          </a:prstGeom>
+          <a:noFill/>
+          <a:ln/>
+        </p:spPr>
+        <p:txBody>
+          <a:bodyPr wrap="square" lIns="0" tIns="0" rIns="0" bIns="0" rtlCol="0" anchor="ctr"/>
+          <a:lstStyle/>
+          <a:p>
+            <a:pPr algn="ctr" indent="0" marL="0">
+              <a:buNone/>
+            </a:pPr>
+            <a:r>
+              <a:rPr lang="en-US" sz="800" b="1" dirty="0">
+                <a:solidFill>
+                  <a:srgbClr val="FFFFFF"/>
+                </a:solidFill>
+                <a:latin typeface="Calibri" pitchFamily="34" charset="0"/>
+              </a:rPr>
+              <a:t>DESIGN</a:t>
+            </a:r>
+          </a:p>
+        </p:txBody>
+      </p:sp>
+      <p:sp>
+        <p:nvSpPr>
+          <p:cNvPr id="94" name="Card4Title"/>
+          <p:cNvSpPr/>
+          <p:nvPr/>
+        </p:nvSpPr>
+        <p:spPr>
+          <a:xfrm>
+            <a:off x="5143500" y="3635832"/>
+            <a:ext cx="3429000" cy="274320"/>
+          </a:xfrm>
+          <a:prstGeom prst="rect">
+            <a:avLst/>
+          </a:prstGeom>
+          <a:noFill/>
+          <a:ln/>
+        </p:spPr>
+        <p:txBody>
+          <a:bodyPr wrap="square" lIns="0" tIns="0" rIns="0" bIns="0" rtlCol="0" anchor="ctr"/>
+          <a:lstStyle/>
+          <a:p>
+            <a:pPr indent="0" marL="0">
+              <a:buNone/>
+            </a:pPr>
+            <a:r>
+              <a:rPr lang="en-US" sz="1100" b="1" dirty="0">
+                <a:solidFill>
+                  <a:srgbClr val="1B2A4A"/>
+                </a:solidFill>
+                <a:latin typeface="Calibri" pitchFamily="34" charset="0"/>
+              </a:rPr>
+              <a:t>Pickle auto-contenido + fallbacks</a:t>
+            </a:r>
+          </a:p>
+        </p:txBody>
+      </p:sp>
+      <p:sp>
+        <p:nvSpPr>
+          <p:cNvPr id="95" name="Card4Desc"/>
+          <p:cNvSpPr/>
+          <p:nvPr/>
+        </p:nvSpPr>
+        <p:spPr>
+          <a:xfrm>
+            <a:off x="4114800" y="3910128"/>
+            <a:ext cx="4457700" cy="480060"/>
+          </a:xfrm>
+          <a:prstGeom prst="rect">
+            <a:avLst/>
+          </a:prstGeom>
+          <a:noFill/>
+          <a:ln/>
+        </p:spPr>
+        <p:txBody>
+          <a:bodyPr wrap="square" lIns="0" tIns="0" rIns="0" bIns="0" rtlCol="0" anchor="t"/>
+          <a:lstStyle/>
+          <a:p>
+            <a:pPr indent="0" marL="0">
+              <a:lnSpc>
+                <a:spcPts val="1400"/>
+              </a:lnSpc>
+              <a:buNone/>
+            </a:pPr>
+            <a:r>
+              <a:rPr lang="en-US" sz="950" dirty="0">
+                <a:solidFill>
+                  <a:srgbClr val="4B5563"/>
+                </a:solidFill>
+                <a:latin typeface="Calibri" pitchFamily="34" charset="0"/>
+              </a:rPr>
+              <a:t>El pickle incluye modelo + encoders + imputer + scaler. Cada extension (DB, MLflow, Prometheus) tiene fallback graceful si no esta disponible.</a:t>
+            </a:r>
+          </a:p>
+        </p:txBody>
+      </p:sp>
+    </p:spTree>
+  </p:cSld>
+  <p:clrMapOvr>
+    <a:masterClrMapping/>
+  </p:clrMapOvr>
+</p:sld>
+</file>
+
 <file path=ppt/slides/slide3.xml><?xml version="1.0" encoding="utf-8"?>
 <p:sld xmlns:a="http://schemas.openxmlformats.org/drawingml/2006/main" xmlns:r="http://schemas.openxmlformats.org/officeDocument/2006/relationships" xmlns:p="http://schemas.openxmlformats.org/presentationml/2006/main">
   <p:cSld name="Slide 3">

--- a/Presentacion_Churn_SDG.pptx
+++ b/Presentacion_Churn_SDG.pptx
@@ -19,7 +19,6 @@
     <p:sldId id="266" r:id="rId12"/>
     <p:sldId id="267" r:id="rId13"/>
     <p:sldId id="268" r:id="rId14"/>
-    <p:sldId id="269" r:id="rId15"/>
     <p:sldId id="270" r:id="rId16"/>
     <p:sldId id="271" r:id="rId17"/>
     <p:sldId id="272" r:id="rId18"/>
@@ -3847,7 +3846,7 @@
                 <a:ea typeface="Calibri" pitchFamily="34" charset="-122"/>
                 <a:cs typeface="Calibri" pitchFamily="34" charset="-120"/>
               </a:rPr>
-              <a:t>Prediccion de Churn</a:t>
+              <a:t>Predicción de Churn</a:t>
             </a:r>
             <a:endParaRPr lang="en-US" sz="3600" dirty="0"/>
           </a:p>
@@ -3906,7 +3905,7 @@
                 <a:ea typeface="Calibri" pitchFamily="34" charset="-122"/>
                 <a:cs typeface="Calibri" pitchFamily="34" charset="-120"/>
               </a:rPr>
-              <a:t>Prueba Tecnica — Data Scientist</a:t>
+              <a:t>Prueba Técnica — Data Scientist</a:t>
             </a:r>
             <a:endParaRPr lang="en-US" sz="1800" dirty="0"/>
           </a:p>
@@ -4689,7 +4688,7 @@
                 <a:ea typeface="Calibri" pitchFamily="34" charset="-122"/>
                 <a:cs typeface="Calibri" pitchFamily="34" charset="-120"/>
               </a:rPr>
-              <a:t>8 variables nuevas con logica de negocio</a:t>
+              <a:t>8 variables nuevas con lógica de negocio</a:t>
             </a:r>
             <a:endParaRPr lang="en-US" sz="950" dirty="0"/>
           </a:p>
@@ -5032,7 +5031,7 @@
                 <a:ea typeface="Calibri" pitchFamily="34" charset="-122"/>
                 <a:cs typeface="Calibri" pitchFamily="34" charset="-120"/>
               </a:rPr>
-              <a:t>Imputacion mediana</a:t>
+              <a:t>Imputación mediana</a:t>
             </a:r>
             <a:endParaRPr lang="en-US" sz="1100" dirty="0"/>
           </a:p>
@@ -5645,7 +5644,7 @@
                   <a:srgbClr val="4B5563"/>
                 </a:solidFill>
               </a:rPr>
-              <a:t>Regularizacion L1/L2 nativa que controla overfitting</a:t>
+              <a:t>Regularización L1/L2 nativa que controla overfitting</a:t>
             </a:r>
             <a:endParaRPr lang="en-US" sz="1100" dirty="0"/>
           </a:p>
@@ -5690,7 +5689,7 @@
                   <a:srgbClr val="4B5563"/>
                 </a:solidFill>
               </a:rPr>
-              <a:t>Tuning mas controlable via scale_pos_weight</a:t>
+              <a:t>Tuning más controlable via scale_pos_weight</a:t>
             </a:r>
             <a:endParaRPr lang="en-US" sz="1100" dirty="0"/>
           </a:p>
@@ -5957,7 +5956,7 @@
                 <a:ea typeface="Calibri" pitchFamily="34" charset="-122"/>
                 <a:cs typeface="Calibri" pitchFamily="34" charset="-120"/>
               </a:rPr>
-              <a:t>Configuracion</a:t>
+              <a:t>Configuración</a:t>
             </a:r>
             <a:endParaRPr lang="en-US" sz="1400" dirty="0"/>
           </a:p>
@@ -5996,7 +5995,7 @@
                 <a:ea typeface="Calibri" pitchFamily="34" charset="-122"/>
                 <a:cs typeface="Calibri" pitchFamily="34" charset="-120"/>
               </a:rPr>
-              <a:t>Metodo</a:t>
+              <a:t>Método</a:t>
             </a:r>
             <a:endParaRPr lang="en-US" sz="1000" dirty="0"/>
           </a:p>
@@ -6230,7 +6229,7 @@
                 <a:ea typeface="Calibri" pitchFamily="34" charset="-122"/>
                 <a:cs typeface="Calibri" pitchFamily="34" charset="-120"/>
               </a:rPr>
-              <a:t>Metrica objetivo</a:t>
+              <a:t>Métrica objetivo</a:t>
             </a:r>
             <a:endParaRPr lang="en-US" sz="1000" dirty="0"/>
           </a:p>
@@ -6880,7 +6879,7 @@
                 <a:ea typeface="Calibri" pitchFamily="34" charset="-122"/>
                 <a:cs typeface="Calibri" pitchFamily="34" charset="-120"/>
               </a:rPr>
-              <a:t>Por que esta configuracion?</a:t>
+              <a:t>Por que esta configuración?</a:t>
             </a:r>
             <a:endParaRPr lang="en-US" sz="1400" dirty="0"/>
           </a:p>
@@ -6916,7 +6915,7 @@
                   <a:srgbClr val="4B5563"/>
                 </a:solidFill>
               </a:rPr>
-              <a:t>RandomizedSearch vs GridSearch: con 11 hiperparametros, el grid completo seria intratable. 30 iteraciones aleatorias cubren el espacio de forma eficiente.</a:t>
+              <a:t>RandomizedSearch vs GridSearch: con 11 hiperparámetros, el grid completo seria intratable. 30 iteraciones aleatorias cubren el espacio de forma eficiente.</a:t>
             </a:r>
             <a:endParaRPr lang="en-US" sz="1050" dirty="0"/>
           </a:p>
@@ -6945,7 +6944,7 @@
                   <a:srgbClr val="4B5563"/>
                 </a:solidFill>
               </a:rPr>
-              <a:t>3-fold: equilibrio entre robustez estadistica y tiempo de computo. Con 100K filas, cada fold tiene ~67K muestras.</a:t>
+              <a:t>3-fold: equilibrio entre robustez estadística y tiempo de computo. Con 100K filas, cada fold tiene ~67K muestras.</a:t>
             </a:r>
             <a:endParaRPr lang="en-US" sz="1050" dirty="0"/>
           </a:p>
@@ -6974,7 +6973,7 @@
                   <a:srgbClr val="4B5563"/>
                 </a:solidFill>
               </a:rPr>
-              <a:t>AUC-ROC como metrica: es threshold-independent, lo que permite optimizar sin comprometerse a un punto de corte fijo.</a:t>
+              <a:t>AUC-ROC como métrica: es threshold-independent, lo que permite optimizar sin comprometerse a un punto de corte fijo.</a:t>
             </a:r>
             <a:endParaRPr lang="en-US" sz="1050" dirty="0"/>
           </a:p>
@@ -7003,7 +7002,7 @@
                   <a:srgbClr val="4B5563"/>
                 </a:solidFill>
               </a:rPr>
-              <a:t>Regularizacion (alpha, lambda): controla overfitting en un dataset con 88 features.</a:t>
+              <a:t>Regularización (alpha, lambda): controla overfitting en un dataset con 88 features.</a:t>
             </a:r>
             <a:endParaRPr lang="en-US" sz="1050" dirty="0"/>
           </a:p>
@@ -7074,7 +7073,7 @@
                 <a:ea typeface="Calibri" pitchFamily="34" charset="-122"/>
                 <a:cs typeface="Calibri" pitchFamily="34" charset="-120"/>
               </a:rPr>
-              <a:t>Metricas Finales en Test Set (Holdout)</a:t>
+              <a:t>Métricas Finales en Test Set (Holdout)</a:t>
             </a:r>
             <a:endParaRPr lang="en-US" sz="2400" dirty="0"/>
           </a:p>
@@ -8397,7 +8396,7 @@
                 <a:ea typeface="Calibri" pitchFamily="34" charset="-122"/>
                 <a:cs typeface="Calibri" pitchFamily="34" charset="-120"/>
               </a:rPr>
-              <a:t>Interpretacion</a:t>
+              <a:t>Interpretación</a:t>
             </a:r>
             <a:endParaRPr lang="en-US" sz="1300" dirty="0"/>
           </a:p>
@@ -8562,7 +8561,7 @@
                 <a:ea typeface="Calibri" pitchFamily="34" charset="-122"/>
                 <a:cs typeface="Calibri" pitchFamily="34" charset="-120"/>
               </a:rPr>
-              <a:t>Entendiendo las Metricas</a:t>
+              <a:t>Entendiendo las Métricas</a:t>
             </a:r>
             <a:endParaRPr lang="en-US" sz="2400" dirty="0"/>
           </a:p>
@@ -8831,7 +8830,7 @@
                 <a:ea typeface="Calibri" pitchFamily="34" charset="-122"/>
                 <a:cs typeface="Calibri" pitchFamily="34" charset="-120"/>
               </a:rPr>
-              <a:t>Es la metrica principal porque no depende de un punto de corte arbitrario.</a:t>
+              <a:t>Es la métrica principal porque no depende de un punto de corte arbitrario.</a:t>
             </a:r>
             <a:endParaRPr lang="en-US" sz="1000" dirty="0"/>
           </a:p>
@@ -8998,7 +8997,7 @@
                 <a:ea typeface="Calibri" pitchFamily="34" charset="-122"/>
                 <a:cs typeface="Calibri" pitchFamily="34" charset="-120"/>
               </a:rPr>
-              <a:t>Alta precision = menos falsos positivos = menos gasto en retencion de clientes que no iban a irse.</a:t>
+              <a:t>Alta precision = menos falsos positivos = menos gasto en retención de clientes que no iban a irse.</a:t>
             </a:r>
             <a:endParaRPr lang="en-US" sz="1000" dirty="0"/>
           </a:p>
@@ -9165,7 +9164,7 @@
                 <a:ea typeface="Calibri" pitchFamily="34" charset="-122"/>
                 <a:cs typeface="Calibri" pitchFamily="34" charset="-120"/>
               </a:rPr>
-              <a:t>Alto recall = detectamos mas churners = menos ingresos perdidos por clientes no identificados.</a:t>
+              <a:t>Alto recall = detectamos más churners = menos ingresos perdidos por clientes no identificados.</a:t>
             </a:r>
             <a:endParaRPr lang="en-US" sz="1000" dirty="0"/>
           </a:p>
@@ -9293,7 +9292,7 @@
                 <a:ea typeface="Calibri" pitchFamily="34" charset="-122"/>
                 <a:cs typeface="Calibri" pitchFamily="34" charset="-120"/>
               </a:rPr>
-              <a:t>Media armonica de Precision y Recall.</a:t>
+              <a:t>Media armónica de Precision y Recall.</a:t>
             </a:r>
             <a:endParaRPr lang="en-US" sz="1050" dirty="0"/>
           </a:p>
@@ -9332,7 +9331,7 @@
                 <a:ea typeface="Calibri" pitchFamily="34" charset="-122"/>
                 <a:cs typeface="Calibri" pitchFamily="34" charset="-120"/>
               </a:rPr>
-              <a:t>Equilibra ambas metricas. Util cuando el coste de FP y FN es similar.</a:t>
+              <a:t>Equilibra ambas métricas. Útil cuando el coste de FP y FN es similar.</a:t>
             </a:r>
             <a:endParaRPr lang="en-US" sz="1000" dirty="0"/>
           </a:p>
@@ -10305,7 +10304,7 @@
                 <a:ea typeface="Calibri" pitchFamily="34" charset="-122"/>
                 <a:cs typeface="Calibri" pitchFamily="34" charset="-120"/>
               </a:rPr>
-              <a:t>Interpretacion clave</a:t>
+              <a:t>Interpretación clave</a:t>
             </a:r>
             <a:endParaRPr lang="en-US" sz="1300" dirty="0"/>
           </a:p>
@@ -10341,7 +10340,7 @@
                   <a:srgbClr val="4B5563"/>
                 </a:solidFill>
               </a:rPr>
-              <a:t>change_mou (cambio en minutos de uso) es el predictor mas fuerte: una caida en el uso es la senal mas clara de abandono.</a:t>
+              <a:t>change_mou (cambio en minutos de uso) es el predictor más fuerte: una caida en el uso es la señal más clara de abandono.</a:t>
             </a:r>
             <a:endParaRPr lang="en-US" sz="1050" dirty="0"/>
           </a:p>
@@ -10399,7 +10398,7 @@
                   <a:srgbClr val="4B5563"/>
                 </a:solidFill>
               </a:rPr>
-              <a:t>months: clientes nuevos (&lt;6 meses) son mas volatiles.</a:t>
+              <a:t>months: clientes nuevos (&lt;6 meses) son más volátiles.</a:t>
             </a:r>
             <a:endParaRPr lang="en-US" sz="1050" dirty="0"/>
           </a:p>
@@ -10630,7 +10629,7 @@
                 <a:ea typeface="Calibri" pitchFamily="34" charset="-122"/>
                 <a:cs typeface="Calibri" pitchFamily="34" charset="-120"/>
               </a:rPr>
-              <a:t>Lift curve, analisis de threshold y recomendaciones</a:t>
+              <a:t>Lift curve, análisis de threshold y recomendaciones</a:t>
             </a:r>
             <a:endParaRPr lang="en-US" sz="1500" dirty="0"/>
           </a:p>
@@ -10986,7 +10985,7 @@
                 <a:ea typeface="Calibri" pitchFamily="34" charset="-122"/>
                 <a:cs typeface="Calibri" pitchFamily="34" charset="-120"/>
               </a:rPr>
-              <a:t>Impacto practico</a:t>
+              <a:t>Impacto práctico</a:t>
             </a:r>
             <a:endParaRPr lang="en-US" sz="1400" dirty="0"/>
           </a:p>
@@ -11109,7 +11108,7 @@
                   <a:srgbClr val="4B5563"/>
                 </a:solidFill>
               </a:rPr>
-              <a:t>Esto significa un 59% mas de eficiencia en campanas de retencion frente a un enfoque aleatorio.</a:t>
+              <a:t>Esto significa un 59% más de eficiencia en campañas de retención frente a un enfoque aleatorio.</a:t>
             </a:r>
             <a:endParaRPr lang="en-US" sz="1100" dirty="0"/>
           </a:p>
@@ -11138,7 +11137,7 @@
                   <a:srgbClr val="6B7280"/>
                 </a:solidFill>
               </a:rPr>
-              <a:t>El ahorro depende del coste de retencion y del ARPU del cliente, pero en telco el ROI suele ser positivo contactando al top 20-30%.</a:t>
+              <a:t>El ahorro depende del coste de retención y del ARPU del cliente, pero en telco el ROI suele ser positivo contactando al top 20-30%.</a:t>
             </a:r>
             <a:endParaRPr lang="en-US" sz="1100" dirty="0"/>
           </a:p>
@@ -11376,7 +11375,7 @@
                 <a:ea typeface="Calibri" pitchFamily="34" charset="-122"/>
                 <a:cs typeface="Calibri" pitchFamily="34" charset="-120"/>
               </a:rPr>
-              <a:t>Sospecha: change_mou podria contener informacion del futuro (leakage)</a:t>
+              <a:t>Sospecha: change_mou podria contener información del futuro (leakage)</a:t>
             </a:r>
             <a:endParaRPr lang="en-US" sz="1300" dirty="0"/>
           </a:p>
@@ -11415,7 +11414,7 @@
                 <a:ea typeface="Calibri" pitchFamily="34" charset="-122"/>
                 <a:cs typeface="Calibri" pitchFamily="34" charset="-120"/>
               </a:rPr>
-              <a:t>Es el predictor #1 en SHAP. Si representara el cambio DESPUES de la decision de irse, seria data leakage. Lo verificamos entrenando el modelo sin esta variable y comparando.</a:t>
+              <a:t>Es el predictor #1 en SHAP. Si representara el cambio DESPUÉS de la decision de irse, seria data leakage. Lo verificamos entrenando el modelo sin esta variable y comparando.</a:t>
             </a:r>
             <a:endParaRPr lang="en-US" sz="1100" dirty="0"/>
           </a:p>
@@ -11490,7 +11489,7 @@
                             <a:srgbClr val="FFFFFF"/>
                           </a:solidFill>
                         </a:rPr>
-                        <a:t>Metrica</a:t>
+                        <a:t>Métrica</a:t>
                       </a:r>
                       <a:endParaRPr lang="en-US" sz="1100" dirty="0"/>
                     </a:p>
@@ -12276,7 +12275,7 @@
                 <a:ea typeface="Calibri" pitchFamily="34" charset="-122"/>
                 <a:cs typeface="Calibri" pitchFamily="34" charset="-120"/>
               </a:rPr>
-              <a:t>Conclusion</a:t>
+              <a:t>Conclusión</a:t>
             </a:r>
             <a:endParaRPr lang="en-US" sz="1300" dirty="0"/>
           </a:p>
@@ -12315,7 +12314,7 @@
                 <a:ea typeface="Calibri" pitchFamily="34" charset="-122"/>
                 <a:cs typeface="Calibri" pitchFamily="34" charset="-120"/>
               </a:rPr>
-              <a:t>Delta &lt; 5 pp: change_mou NO es leakage. Es una senal legitima de comportamiento previo al churn.</a:t>
+              <a:t>Delta &lt; 5 pp: change_mou NO es leakage. Es una señal legitima de comportamiento previo al churn.</a:t>
             </a:r>
             <a:endParaRPr lang="en-US" sz="1050" dirty="0"/>
           </a:p>
@@ -12577,7 +12576,7 @@
                 <a:ea typeface="Calibri" pitchFamily="34" charset="-122"/>
                 <a:cs typeface="Calibri" pitchFamily="34" charset="-120"/>
               </a:rPr>
-              <a:t>Campanas de retencion focalizadas</a:t>
+              <a:t>Campañas de retención focalizadas</a:t>
             </a:r>
             <a:endParaRPr lang="en-US" sz="1200" dirty="0"/>
           </a:p>
@@ -12872,7 +12871,7 @@
                 <a:ea typeface="Calibri" pitchFamily="34" charset="-122"/>
                 <a:cs typeface="Calibri" pitchFamily="34" charset="-120"/>
               </a:rPr>
-              <a:t>call_fail_rate predice churn. Monitorizar y actuar proactivamente ante degradacion de servicio.</a:t>
+              <a:t>call_fail_rate predice churn. Monitorizar y actuar proactivamente ante degradación de servicio.</a:t>
             </a:r>
             <a:endParaRPr lang="en-US" sz="1050" dirty="0"/>
           </a:p>
@@ -13000,7 +12999,7 @@
                 <a:ea typeface="Calibri" pitchFamily="34" charset="-122"/>
                 <a:cs typeface="Calibri" pitchFamily="34" charset="-120"/>
               </a:rPr>
-              <a:t>Clientes &lt; 6 meses son volatiles. Implementar programa de bienvenida con incentivos.</a:t>
+              <a:t>Clientes &lt; 6 meses son volátiles. Implementar programa de bienvenida con incentivos.</a:t>
             </a:r>
             <a:endParaRPr lang="en-US" sz="1050" dirty="0"/>
           </a:p>
@@ -13128,7 +13127,7 @@
                 <a:ea typeface="Calibri" pitchFamily="34" charset="-122"/>
                 <a:cs typeface="Calibri" pitchFamily="34" charset="-120"/>
               </a:rPr>
-              <a:t>Ejecutar el pipeline periodicamente para actualizar scores y alimentar CRM.</a:t>
+              <a:t>Ejecutar el pipeline periódicamente para actualizar scores y alimentar CRM.</a:t>
             </a:r>
             <a:endParaRPr lang="en-US" sz="1050" dirty="0"/>
           </a:p>
@@ -13518,7 +13517,7 @@
                 <a:ea typeface="Calibri" pitchFamily="34" charset="-122"/>
                 <a:cs typeface="Calibri" pitchFamily="34" charset="-120"/>
               </a:rPr>
-              <a:t>Analisis exploratorio</a:t>
+              <a:t>Análisis exploratorio</a:t>
             </a:r>
             <a:endParaRPr lang="en-US" sz="1300" dirty="0"/>
           </a:p>
@@ -14980,7 +14979,7 @@
                 <a:ea typeface="Calibri" pitchFamily="34" charset="-122"/>
                 <a:cs typeface="Calibri" pitchFamily="34" charset="-120"/>
               </a:rPr>
-              <a:t>XGBoost entrenamiento, evaluacion en val set, guardado como pickle</a:t>
+              <a:t>XGBoost entrenamiento, evaluación en val set, guardado como pickle</a:t>
             </a:r>
             <a:endParaRPr lang="en-US" sz="1000" dirty="0"/>
           </a:p>
@@ -15197,7 +15196,7 @@
                 <a:ea typeface="Calibri" pitchFamily="34" charset="-122"/>
                 <a:cs typeface="Calibri" pitchFamily="34" charset="-120"/>
               </a:rPr>
-              <a:t>Carga pickle, predicciones en holdout, metricas en logs, JSON</a:t>
+              <a:t>Carga pickle, predicciones en holdout, métricas en logs, JSON</a:t>
             </a:r>
             <a:endParaRPr lang="en-US" sz="1000" dirty="0"/>
           </a:p>
@@ -15335,7 +15334,7 @@
                   <a:srgbClr val="4B5563"/>
                 </a:solidFill>
               </a:rPr>
-              <a:t xml:space="preserve"> — cada task importa y ejecuta la funcion main() del script correspondiente. Si un paso falla, el DAG se detiene.</a:t>
+              <a:t xml:space="preserve"> — cada task importa y ejecuta la función main() del script correspondiente. Si un paso falla, el DAG se detiene.</a:t>
             </a:r>
             <a:endParaRPr lang="en-US" sz="1100" dirty="0"/>
           </a:p>
@@ -16113,7 +16112,7 @@
                 <a:ea typeface="Calibri" pitchFamily="34" charset="-122"/>
                 <a:cs typeface="Calibri" pitchFamily="34" charset="-120"/>
               </a:rPr>
-              <a:t>Decisiones de diseno</a:t>
+              <a:t>Decisiones de diseño</a:t>
             </a:r>
             <a:endParaRPr lang="en-US" sz="1300" dirty="0"/>
           </a:p>
@@ -16180,7 +16179,7 @@
                   <a:srgbClr val="4B5563"/>
                 </a:solidFill>
               </a:rPr>
-              <a:t>Monitoring stack: evaluate_model exporta metricas al Pushgateway, Prometheus las scrapea, Grafana las visualiza.</a:t>
+              <a:t>Monitoring stack: evaluate_model exporta métricas al Pushgateway, Prometheus las scrapea, Grafana las visualiza.</a:t>
             </a:r>
             <a:endParaRPr lang="en-US" sz="1050" dirty="0"/>
           </a:p>
@@ -16517,7 +16516,7 @@
                 </a:solidFill>
                 <a:latin typeface="Calibri"/>
               </a:rPr>
-              <a:t>Evidencia: Orquestacion y Experiment Tracking</a:t>
+              <a:t>Evidencia: Orquestación y Experiment Tracking</a:t>
             </a:r>
           </a:p>
         </p:txBody>
@@ -16724,7 +16723,7 @@
                 </a:solidFill>
                 <a:latin typeface="Calibri"/>
               </a:rPr>
-              <a:t>MLflow 2.12.2 — Run completado con metricas</a:t>
+              <a:t>MLflow 2.12.2 — Run completado con métricas</a:t>
             </a:r>
           </a:p>
         </p:txBody>
@@ -16783,7 +16782,7 @@
                 </a:solidFill>
                 <a:latin typeface="Calibri"/>
               </a:rPr>
-              <a:t>Airflow ejecuta el DAG de 3 tasks (data_preparation → train_model → evaluate_model) en ~1 min 21s. MLflow registra automaticamente 41 hiperparametros y 4 metricas de validacion (val_auc_roc=0.6913, val_f1=0.6376). Cada run queda versionado para comparacion futura.</a:t>
+              <a:t>Airflow ejecuta el DAG de 3 tasks (data_preparation → train_model → evaluate_model) en ~1 min 21s. MLflow registra automáticamente 41 hiperparámetros y 4 métricas de validación (val_auc_roc=0.6913, val_f1=0.6376). Cada run queda versionado para comparación futura.</a:t>
             </a:r>
           </a:p>
         </p:txBody>
@@ -17051,7 +17050,7 @@
                 </a:solidFill>
                 <a:latin typeface="Calibri"/>
               </a:rPr>
-              <a:t>Prometheus — Metricas en tiempo real</a:t>
+              <a:t>Prometheus — Métricas en tiempo real</a:t>
             </a:r>
           </a:p>
         </p:txBody>
@@ -17110,7 +17109,7 @@
                 </a:solidFill>
                 <a:latin typeface="Calibri"/>
               </a:rPr>
-              <a:t>El pipeline exporta metricas al Pushgateway tras cada ejecucion. Prometheus las scrapea cada 15s. El dashboard muestra AUC-ROC, F1, confusion matrix, lift por percentil y datos del pipeline en tiempo real.</a:t>
+              <a:t>El pipeline exporta métricas al Pushgateway tras cada ejecución. Prometheus las scrapea cada 15s. El dashboard muestra AUC-ROC, F1, confusion matrix, lift por percentil y datos del pipeline en tiempo real.</a:t>
             </a:r>
           </a:p>
         </p:txBody>
@@ -17720,7 +17719,7 @@
                 <a:ea typeface="Calibri" pitchFamily="34" charset="-122"/>
                 <a:cs typeface="Calibri" pitchFamily="34" charset="-120"/>
               </a:rPr>
-              <a:t>8 features nuevas con logica de negocio</a:t>
+              <a:t>8 features nuevas con lógica de negocio</a:t>
             </a:r>
             <a:endParaRPr lang="en-US" sz="1100" dirty="0"/>
           </a:p>
@@ -18113,7 +18112,7 @@
                   <a:srgbClr val="4B5563"/>
                 </a:solidFill>
               </a:rPr>
-              <a:t>A/B testing para validar impacto real de las campanas de retencion.</a:t>
+              <a:t>A/B testing para validar impacto real de las campañas de retención.</a:t>
             </a:r>
             <a:endParaRPr lang="en-US" sz="1050" dirty="0"/>
           </a:p>
@@ -18143,7 +18142,7 @@
                   <a:srgbClr val="4B5563"/>
                 </a:solidFill>
               </a:rPr>
-              <a:t>Alertas automaticas en Grafana (umbrales de AUC, drift detection).</a:t>
+              <a:t>Alertas automáticas en Grafana (umbrales de AUC, drift detection).</a:t>
             </a:r>
             <a:endParaRPr lang="en-US" sz="1050" dirty="0"/>
           </a:p>
@@ -18576,7 +18575,7 @@
                 </a:solidFill>
                 <a:latin typeface="Calibri" pitchFamily="34" charset="0"/>
               </a:rPr>
-              <a:t>Radiografia del Dataset</a:t>
+              <a:t>Radiografía del Dataset</a:t>
             </a:r>
           </a:p>
         </p:txBody>
@@ -18772,7 +18771,7 @@
                 </a:solidFill>
                 <a:latin typeface="Calibri" pitchFamily="34" charset="0"/>
               </a:rPr>
-              <a:t>69 float + 10 int + 21 categoricas</a:t>
+              <a:t>69 float + 10 int + 21 categóricas</a:t>
             </a:r>
           </a:p>
         </p:txBody>
@@ -19038,7 +19037,7 @@
                 </a:solidFill>
                 <a:latin typeface="Calibri" pitchFamily="34" charset="0"/>
               </a:rPr>
-              <a:t>Composicion de variables</a:t>
+              <a:t>Composición de variables</a:t>
             </a:r>
           </a:p>
         </p:txBody>
@@ -19074,7 +19073,7 @@
                 </a:solidFill>
                 <a:latin typeface="Calibri" pitchFamily="34" charset="0"/>
               </a:rPr>
-              <a:t>69 numericas continuas (float64)</a:t>
+              <a:t>69 numéricas continuas (float64)</a:t>
             </a:r>
           </a:p>
           <a:p>
@@ -19102,7 +19101,7 @@
                 </a:solidFill>
                 <a:latin typeface="Calibri" pitchFamily="34" charset="0"/>
               </a:rPr>
-              <a:t>10 numericas enteras (int64)</a:t>
+              <a:t>10 numéricas enteras (int64)</a:t>
             </a:r>
           </a:p>
           <a:p>
@@ -19130,7 +19129,7 @@
                 </a:solidFill>
                 <a:latin typeface="Calibri" pitchFamily="34" charset="0"/>
               </a:rPr>
-              <a:t>21 categoricas (object)</a:t>
+              <a:t>21 categóricas (object)</a:t>
             </a:r>
           </a:p>
           <a:p>
@@ -19364,7 +19363,7 @@
                 </a:solidFill>
                 <a:latin typeface="Calibri" pitchFamily="34" charset="0"/>
               </a:rPr>
-              <a:t>r = -0.103  (telefono barato)</a:t>
+              <a:t>r = -0.103  (teléfono barato)</a:t>
             </a:r>
           </a:p>
           <a:p>
@@ -19553,7 +19552,7 @@
                 <a:ea typeface="Calibri" pitchFamily="34" charset="-122"/>
                 <a:cs typeface="Calibri" pitchFamily="34" charset="-120"/>
               </a:rPr>
-              <a:t>Estructura del Proyecto y Modularizacion</a:t>
+              <a:t>Estructura del Proyecto y Modularización</a:t>
             </a:r>
           </a:p>
         </p:txBody>
@@ -20189,7 +20188,7 @@
                 </a:solidFill>
                 <a:latin typeface="Calibri" pitchFamily="34" charset="0"/>
               </a:rPr>
-              <a:t>Cada script tiene una unica responsabilidad. El DAG importa y ejecuta cada main() via PythonOperator. Sin dependencias circulares.</a:t>
+              <a:t>Cada script tiene una única responsabilidad. El DAG importa y ejecuta cada main() via PythonOperator. Sin dependencias circulares.</a:t>
             </a:r>
           </a:p>
         </p:txBody>
@@ -20337,7 +20336,7 @@
                 </a:solidFill>
                 <a:latin typeface="Calibri" pitchFamily="34" charset="0"/>
               </a:rPr>
-              <a:t>Modulos reutilizables</a:t>
+              <a:t>Módulos reutilizables</a:t>
             </a:r>
           </a:p>
         </p:txBody>
@@ -20385,7 +20384,7 @@
                 </a:solidFill>
                 <a:latin typeface="Calibri" pitchFamily="34" charset="0"/>
               </a:rPr>
-              <a:t xml:space="preserve"> conexion PostgreSQL y helpers CRUD. </a:t>
+              <a:t xml:space="preserve"> conexión PostgreSQL y helpers CRUD. </a:t>
             </a:r>
             <a:r>
               <a:rPr lang="en-US" sz="950" b="1" dirty="0">
@@ -20403,7 +20402,7 @@
                 </a:solidFill>
                 <a:latin typeface="Calibri" pitchFamily="34" charset="0"/>
               </a:rPr>
-              <a:t xml:space="preserve"> push de metricas a Prometheus Pushgateway.</a:t>
+              <a:t xml:space="preserve"> push de métricas a Prometheus Pushgateway.</a:t>
             </a:r>
           </a:p>
         </p:txBody>
@@ -20551,7 +20550,7 @@
                 </a:solidFill>
                 <a:latin typeface="Calibri" pitchFamily="34" charset="0"/>
               </a:rPr>
-              <a:t>Infraestructura como codigo</a:t>
+              <a:t>Infraestructura como código</a:t>
             </a:r>
           </a:p>
         </p:txBody>
@@ -21236,7 +21235,7 @@
                   <a:srgbClr val="1F2937"/>
                 </a:solidFill>
               </a:rPr>
-              <a:t>Captar un nuevo cliente cuesta 5-7x mas que retener uno existente.</a:t>
+              <a:t>Captar un nuevo cliente cuesta 5-7x más que retener uno existente.</a:t>
             </a:r>
             <a:endParaRPr lang="en-US" sz="1400" dirty="0"/>
           </a:p>
@@ -21265,7 +21264,7 @@
                   <a:srgbClr val="4B5563"/>
                 </a:solidFill>
               </a:rPr>
-              <a:t>En telecomunicaciones, el churn mensual tipico oscila entre el 1-3%. Identificar clientes en riesgo ANTES de que se vayan permite intervenir con ofertas de retencion dirigidas.</a:t>
+              <a:t>En telecomunicaciones, el churn mensual típico oscila entre el 1-3%. Identificar clientes en riesgo ANTES de que se vayan permite intervenir con ofertas de retención dirigidas.</a:t>
             </a:r>
             <a:endParaRPr lang="en-US" sz="1400" dirty="0"/>
           </a:p>
@@ -21294,7 +21293,7 @@
                   <a:srgbClr val="4B5563"/>
                 </a:solidFill>
               </a:rPr>
-              <a:t>Objetivo: construir un modelo predictivo que identifique a los clientes con mayor probabilidad de abandonar, permitiendo priorizar acciones de retencion.</a:t>
+              <a:t>Objetivo: construir un modelo predictivo que identifique a los clientes con mayor probabilidad de abandonar, permitiendo priorizar acciones de retención.</a:t>
             </a:r>
             <a:endParaRPr lang="en-US" sz="1400" dirty="0"/>
           </a:p>
@@ -21812,7 +21811,7 @@
                 <a:ea typeface="Calibri" pitchFamily="34" charset="-122"/>
                 <a:cs typeface="Calibri" pitchFamily="34" charset="-120"/>
               </a:rPr>
-              <a:t>Analisis Exploratorio</a:t>
+              <a:t>Análisis Exploratorio</a:t>
             </a:r>
             <a:endParaRPr lang="en-US" sz="3200" dirty="0"/>
           </a:p>
@@ -22230,7 +22229,7 @@
                 <a:ea typeface="Calibri" pitchFamily="34" charset="-122"/>
                 <a:cs typeface="Calibri" pitchFamily="34" charset="-120"/>
               </a:rPr>
-              <a:t>El dataset esta balanceado artificialmente. Poco realista (churn real ~1-3%), pero elimina la necesidad de tecnicas de oversampling.</a:t>
+              <a:t>El dataset esta balanceado artificialmente. Poco realista (churn real ~1-3%), pero elimina la necesidad de técnicas de oversampling.</a:t>
             </a:r>
             <a:endParaRPr lang="en-US" sz="1050" dirty="0"/>
           </a:p>
@@ -22358,7 +22357,7 @@
                 <a:ea typeface="Calibri" pitchFamily="34" charset="-122"/>
                 <a:cs typeface="Calibri" pitchFamily="34" charset="-120"/>
               </a:rPr>
-              <a:t>Las columnas kid0_2 a kid16_17 usan 'U' como null (&gt;90%). Otros campos usan 'Z'. Reemplazados por NaN antes de cualquier analisis.</a:t>
+              <a:t>Las columnas kid0_2 a kid16_17 usan 'U' como null (&gt;90%). Otros campos usan 'Z'. Reemplazados por NaN antes de cualquier análisis.</a:t>
             </a:r>
             <a:endParaRPr lang="en-US" sz="1050" dirty="0"/>
           </a:p>
@@ -22486,7 +22485,7 @@
                 <a:ea typeface="Calibri" pitchFamily="34" charset="-122"/>
                 <a:cs typeface="Calibri" pitchFamily="34" charset="-120"/>
               </a:rPr>
-              <a:t>Pares de variables con correlacion r=1.000 (p.ej. rev_Mean/totrev). Eliminamos la de menor correlacion con churn (umbral: r&gt;0.98).</a:t>
+              <a:t>Pares de variables con correlación r=1.000 (p.ej. rev_Mean/totrev). Eliminamos la de menor correlación con churn (umbral: r&gt;0.98).</a:t>
             </a:r>
             <a:endParaRPr lang="en-US" sz="1050" dirty="0"/>
           </a:p>
@@ -22902,7 +22901,7 @@
                 <a:ea typeface="Calibri" pitchFamily="34" charset="-122"/>
                 <a:cs typeface="Calibri" pitchFamily="34" charset="-120"/>
               </a:rPr>
-              <a:t>CRITICA</a:t>
+              <a:t>CRÍTICA</a:t>
             </a:r>
             <a:endParaRPr lang="en-US" sz="800" dirty="0"/>
           </a:p>
@@ -23173,7 +23172,7 @@
                 <a:ea typeface="Calibri" pitchFamily="34" charset="-122"/>
                 <a:cs typeface="Calibri" pitchFamily="34" charset="-120"/>
               </a:rPr>
-              <a:t>Variables con &gt;99% del mismo valor eliminadas: no aportan informacion discriminativa.</a:t>
+              <a:t>Variables con &gt;99% del mismo valor eliminadas: no aportan información discriminativa.</a:t>
             </a:r>
             <a:endParaRPr lang="en-US" sz="1050" dirty="0"/>
           </a:p>
@@ -23327,7 +23326,7 @@
                 <a:ea typeface="Calibri" pitchFamily="34" charset="-122"/>
                 <a:cs typeface="Calibri" pitchFamily="34" charset="-120"/>
               </a:rPr>
-              <a:t>Dummies sin senal</a:t>
+              <a:t>Dummies sin señal</a:t>
             </a:r>
             <a:endParaRPr lang="en-US" sz="1200" dirty="0"/>
           </a:p>
@@ -23752,7 +23751,7 @@
                 <a:ea typeface="Calibri" pitchFamily="34" charset="-122"/>
                 <a:cs typeface="Calibri" pitchFamily="34" charset="-120"/>
               </a:rPr>
-              <a:t>Eliminadas directamente. Imputar mas del 85% seria inventar datos.</a:t>
+              <a:t>Eliminadas directamente. Imputar más del 85% seria inventar datos.</a:t>
             </a:r>
             <a:endParaRPr lang="en-US" sz="1050" dirty="0"/>
           </a:p>
@@ -24027,7 +24026,7 @@
                 <a:ea typeface="Calibri" pitchFamily="34" charset="-122"/>
                 <a:cs typeface="Calibri" pitchFamily="34" charset="-120"/>
               </a:rPr>
-              <a:t>Descripcion</a:t>
+              <a:t>Descripción</a:t>
             </a:r>
             <a:endParaRPr lang="en-US" sz="1100" dirty="0"/>
           </a:p>
@@ -24066,7 +24065,7 @@
                 <a:ea typeface="Calibri" pitchFamily="34" charset="-122"/>
                 <a:cs typeface="Calibri" pitchFamily="34" charset="-120"/>
               </a:rPr>
-              <a:t>Logica</a:t>
+              <a:t>Lógica</a:t>
             </a:r>
             <a:endParaRPr lang="en-US" sz="1100" dirty="0"/>
           </a:p>
@@ -24591,7 +24590,7 @@
                 <a:ea typeface="Calibri" pitchFamily="34" charset="-122"/>
                 <a:cs typeface="Calibri" pitchFamily="34" charset="-120"/>
               </a:rPr>
-              <a:t>Equipo antiguo (&gt;1 ano)</a:t>
+              <a:t>Equipo antiguo (&gt;1 año)</a:t>
             </a:r>
             <a:endParaRPr lang="en-US" sz="1050" dirty="0"/>
           </a:p>
@@ -24873,7 +24872,7 @@
                 <a:ea typeface="Calibri" pitchFamily="34" charset="-122"/>
                 <a:cs typeface="Calibri" pitchFamily="34" charset="-120"/>
               </a:rPr>
-              <a:t>Facturacion vs media historica</a:t>
+              <a:t>Facturación vs media histórica</a:t>
             </a:r>
             <a:endParaRPr lang="en-US" sz="1050" dirty="0"/>
           </a:p>
@@ -25406,7 +25405,7 @@
                 <a:ea typeface="Calibri" pitchFamily="34" charset="-122"/>
                 <a:cs typeface="Calibri" pitchFamily="34" charset="-120"/>
               </a:rPr>
-              <a:t>Seleccion, entrenamiento, evaluacion e interpretabilidad</a:t>
+              <a:t>Selección, entrenamiento, evaluación e interpretabilidad</a:t>
             </a:r>
             <a:endParaRPr lang="en-US" sz="1500" dirty="0"/>
           </a:p>
